--- a/outputs/figures/Figure_2_Visibility_and_exposure.pptx
+++ b/outputs/figures/Figure_2_Visibility_and_exposure.pptx
@@ -10,7 +10,7 @@
   <p:sldIdLst>
     <p:sldId xmlns:r="http://schemas.openxmlformats.org/officeDocument/2006/relationships" id="256" r:id="R4bbf837b57534cee"/>
   </p:sldIdLst>
-  <p:sldSz cx="5981700" cy="5619750"/>
+  <p:sldSz cx="5981700" cy="5979750"/>
   <p:notesSz cx="6858000" cy="9144000"/>
 </p:presentation>
 </file>
@@ -1072,7 +1072,7 @@
         </p:nvSpPr>
         <p:spPr>
           <a:xfrm xmlns:a="http://schemas.openxmlformats.org/drawingml/2006/main">
-            <a:off x="76200" y="19050"/>
+            <a:off x="76200" y="379050"/>
             <a:ext cx="5715000" cy="247650"/>
           </a:xfrm>
           <a:prstGeom xmlns:a="http://schemas.openxmlformats.org/drawingml/2006/main" prst="rect">
@@ -1129,7 +1129,7 @@
         </p:nvSpPr>
         <p:spPr>
           <a:xfrm xmlns:a="http://schemas.openxmlformats.org/drawingml/2006/main">
-            <a:off x="628650" y="2333625"/>
+            <a:off x="628650" y="2693625"/>
             <a:ext cx="5095875" cy="9525"/>
           </a:xfrm>
           <a:prstGeom xmlns:a="http://schemas.openxmlformats.org/drawingml/2006/main" prst="rect">
@@ -1159,7 +1159,7 @@
         </p:nvSpPr>
         <p:spPr>
           <a:xfrm xmlns:a="http://schemas.openxmlformats.org/drawingml/2006/main">
-            <a:off x="628650" y="571500"/>
+            <a:off x="628650" y="931500"/>
             <a:ext cx="9525" cy="1762125"/>
           </a:xfrm>
           <a:prstGeom xmlns:a="http://schemas.openxmlformats.org/drawingml/2006/main" prst="rect">
@@ -1189,7 +1189,7 @@
         </p:nvSpPr>
         <p:spPr>
           <a:xfrm xmlns:a="http://schemas.openxmlformats.org/drawingml/2006/main">
-            <a:off x="590550" y="2333625"/>
+            <a:off x="590550" y="2693625"/>
             <a:ext cx="38100" cy="9525"/>
           </a:xfrm>
           <a:prstGeom xmlns:a="http://schemas.openxmlformats.org/drawingml/2006/main" prst="rect">
@@ -1219,7 +1219,7 @@
         </p:nvSpPr>
         <p:spPr>
           <a:xfrm xmlns:a="http://schemas.openxmlformats.org/drawingml/2006/main">
-            <a:off x="238125" y="2257425"/>
+            <a:off x="238125" y="2617425"/>
             <a:ext cx="323850" cy="180975"/>
           </a:xfrm>
           <a:prstGeom xmlns:a="http://schemas.openxmlformats.org/drawingml/2006/main" prst="rect">
@@ -1276,7 +1276,7 @@
         </p:nvSpPr>
         <p:spPr>
           <a:xfrm xmlns:a="http://schemas.openxmlformats.org/drawingml/2006/main">
-            <a:off x="590550" y="1893094"/>
+            <a:off x="590550" y="2253094"/>
             <a:ext cx="38100" cy="9525"/>
           </a:xfrm>
           <a:prstGeom xmlns:a="http://schemas.openxmlformats.org/drawingml/2006/main" prst="rect">
@@ -1306,7 +1306,7 @@
         </p:nvSpPr>
         <p:spPr>
           <a:xfrm xmlns:a="http://schemas.openxmlformats.org/drawingml/2006/main">
-            <a:off x="238125" y="1816894"/>
+            <a:off x="238125" y="2176894"/>
             <a:ext cx="323850" cy="180975"/>
           </a:xfrm>
           <a:prstGeom xmlns:a="http://schemas.openxmlformats.org/drawingml/2006/main" prst="rect">
@@ -1363,7 +1363,7 @@
         </p:nvSpPr>
         <p:spPr>
           <a:xfrm xmlns:a="http://schemas.openxmlformats.org/drawingml/2006/main">
-            <a:off x="638175" y="1893094"/>
+            <a:off x="638175" y="2253094"/>
             <a:ext cx="5086350" cy="7620"/>
           </a:xfrm>
           <a:prstGeom xmlns:a="http://schemas.openxmlformats.org/drawingml/2006/main" prst="rect">
@@ -1393,7 +1393,7 @@
         </p:nvSpPr>
         <p:spPr>
           <a:xfrm xmlns:a="http://schemas.openxmlformats.org/drawingml/2006/main">
-            <a:off x="590550" y="1452563"/>
+            <a:off x="590550" y="1812563"/>
             <a:ext cx="38100" cy="9525"/>
           </a:xfrm>
           <a:prstGeom xmlns:a="http://schemas.openxmlformats.org/drawingml/2006/main" prst="rect">
@@ -1423,7 +1423,7 @@
         </p:nvSpPr>
         <p:spPr>
           <a:xfrm xmlns:a="http://schemas.openxmlformats.org/drawingml/2006/main">
-            <a:off x="238125" y="1376363"/>
+            <a:off x="238125" y="1736363"/>
             <a:ext cx="323850" cy="180975"/>
           </a:xfrm>
           <a:prstGeom xmlns:a="http://schemas.openxmlformats.org/drawingml/2006/main" prst="rect">
@@ -1480,7 +1480,7 @@
         </p:nvSpPr>
         <p:spPr>
           <a:xfrm xmlns:a="http://schemas.openxmlformats.org/drawingml/2006/main">
-            <a:off x="638175" y="1452563"/>
+            <a:off x="638175" y="1812563"/>
             <a:ext cx="5086350" cy="7620"/>
           </a:xfrm>
           <a:prstGeom xmlns:a="http://schemas.openxmlformats.org/drawingml/2006/main" prst="rect">
@@ -1510,7 +1510,7 @@
         </p:nvSpPr>
         <p:spPr>
           <a:xfrm xmlns:a="http://schemas.openxmlformats.org/drawingml/2006/main">
-            <a:off x="590550" y="1012031"/>
+            <a:off x="590550" y="1372031"/>
             <a:ext cx="38100" cy="9525"/>
           </a:xfrm>
           <a:prstGeom xmlns:a="http://schemas.openxmlformats.org/drawingml/2006/main" prst="rect">
@@ -1540,7 +1540,7 @@
         </p:nvSpPr>
         <p:spPr>
           <a:xfrm xmlns:a="http://schemas.openxmlformats.org/drawingml/2006/main">
-            <a:off x="238125" y="935831"/>
+            <a:off x="238125" y="1295831"/>
             <a:ext cx="323850" cy="180975"/>
           </a:xfrm>
           <a:prstGeom xmlns:a="http://schemas.openxmlformats.org/drawingml/2006/main" prst="rect">
@@ -1597,7 +1597,7 @@
         </p:nvSpPr>
         <p:spPr>
           <a:xfrm xmlns:a="http://schemas.openxmlformats.org/drawingml/2006/main">
-            <a:off x="638175" y="1012031"/>
+            <a:off x="638175" y="1372031"/>
             <a:ext cx="5086350" cy="7620"/>
           </a:xfrm>
           <a:prstGeom xmlns:a="http://schemas.openxmlformats.org/drawingml/2006/main" prst="rect">
@@ -1627,7 +1627,7 @@
         </p:nvSpPr>
         <p:spPr>
           <a:xfrm xmlns:a="http://schemas.openxmlformats.org/drawingml/2006/main">
-            <a:off x="590550" y="571500"/>
+            <a:off x="590550" y="931500"/>
             <a:ext cx="38100" cy="9525"/>
           </a:xfrm>
           <a:prstGeom xmlns:a="http://schemas.openxmlformats.org/drawingml/2006/main" prst="rect">
@@ -1657,7 +1657,7 @@
         </p:nvSpPr>
         <p:spPr>
           <a:xfrm xmlns:a="http://schemas.openxmlformats.org/drawingml/2006/main">
-            <a:off x="238125" y="495300"/>
+            <a:off x="238125" y="855300"/>
             <a:ext cx="323850" cy="180975"/>
           </a:xfrm>
           <a:prstGeom xmlns:a="http://schemas.openxmlformats.org/drawingml/2006/main" prst="rect">
@@ -1714,7 +1714,7 @@
         </p:nvSpPr>
         <p:spPr>
           <a:xfrm xmlns:a="http://schemas.openxmlformats.org/drawingml/2006/main">
-            <a:off x="638175" y="571500"/>
+            <a:off x="638175" y="931500"/>
             <a:ext cx="5086350" cy="7620"/>
           </a:xfrm>
           <a:prstGeom xmlns:a="http://schemas.openxmlformats.org/drawingml/2006/main" prst="rect">
@@ -1744,7 +1744,7 @@
         </p:nvSpPr>
         <p:spPr>
           <a:xfrm xmlns:a="http://schemas.openxmlformats.org/drawingml/2006/main">
-            <a:off x="552450" y="219075"/>
+            <a:off x="552450" y="579075"/>
             <a:ext cx="5248275" cy="247650"/>
           </a:xfrm>
           <a:prstGeom xmlns:a="http://schemas.openxmlformats.org/drawingml/2006/main" prst="rect">
@@ -1801,7 +1801,7 @@
         </p:nvSpPr>
         <p:spPr>
           <a:xfrm xmlns:a="http://schemas.openxmlformats.org/drawingml/2006/main">
-            <a:off x="485775" y="2400300"/>
+            <a:off x="485775" y="2760300"/>
             <a:ext cx="552450" cy="209550"/>
           </a:xfrm>
           <a:prstGeom xmlns:a="http://schemas.openxmlformats.org/drawingml/2006/main" prst="rect">
@@ -1858,7 +1858,7 @@
         </p:nvSpPr>
         <p:spPr>
           <a:xfrm xmlns:a="http://schemas.openxmlformats.org/drawingml/2006/main">
-            <a:off x="1428750" y="2400300"/>
+            <a:off x="1428750" y="2760300"/>
             <a:ext cx="552450" cy="209550"/>
           </a:xfrm>
           <a:prstGeom xmlns:a="http://schemas.openxmlformats.org/drawingml/2006/main" prst="rect">
@@ -1915,7 +1915,7 @@
         </p:nvSpPr>
         <p:spPr>
           <a:xfrm xmlns:a="http://schemas.openxmlformats.org/drawingml/2006/main">
-            <a:off x="2371725" y="2400300"/>
+            <a:off x="2371725" y="2760300"/>
             <a:ext cx="552450" cy="209550"/>
           </a:xfrm>
           <a:prstGeom xmlns:a="http://schemas.openxmlformats.org/drawingml/2006/main" prst="rect">
@@ -1972,7 +1972,7 @@
         </p:nvSpPr>
         <p:spPr>
           <a:xfrm xmlns:a="http://schemas.openxmlformats.org/drawingml/2006/main">
-            <a:off x="3314700" y="2400300"/>
+            <a:off x="3314700" y="2760300"/>
             <a:ext cx="552450" cy="209550"/>
           </a:xfrm>
           <a:prstGeom xmlns:a="http://schemas.openxmlformats.org/drawingml/2006/main" prst="rect">
@@ -2029,7 +2029,7 @@
         </p:nvSpPr>
         <p:spPr>
           <a:xfrm xmlns:a="http://schemas.openxmlformats.org/drawingml/2006/main">
-            <a:off x="4257675" y="2400300"/>
+            <a:off x="4257675" y="2760300"/>
             <a:ext cx="552450" cy="209550"/>
           </a:xfrm>
           <a:prstGeom xmlns:a="http://schemas.openxmlformats.org/drawingml/2006/main" prst="rect">
@@ -2086,7 +2086,7 @@
         </p:nvSpPr>
         <p:spPr>
           <a:xfrm xmlns:a="http://schemas.openxmlformats.org/drawingml/2006/main">
-            <a:off x="590550" y="571500"/>
+            <a:off x="590550" y="931500"/>
             <a:ext cx="342900" cy="1762125"/>
           </a:xfrm>
           <a:prstGeom xmlns:a="http://schemas.openxmlformats.org/drawingml/2006/main" prst="rect">
@@ -2116,7 +2116,7 @@
         </p:nvSpPr>
         <p:spPr>
           <a:xfrm xmlns:a="http://schemas.openxmlformats.org/drawingml/2006/main">
-            <a:off x="476250" y="342900"/>
+            <a:off x="476250" y="702900"/>
             <a:ext cx="571500" cy="200025"/>
           </a:xfrm>
           <a:prstGeom xmlns:a="http://schemas.openxmlformats.org/drawingml/2006/main" prst="rect">
@@ -2173,7 +2173,7 @@
         </p:nvSpPr>
         <p:spPr>
           <a:xfrm xmlns:a="http://schemas.openxmlformats.org/drawingml/2006/main">
-            <a:off x="1533525" y="837581"/>
+            <a:off x="1533525" y="1197581"/>
             <a:ext cx="342900" cy="1496044"/>
           </a:xfrm>
           <a:prstGeom xmlns:a="http://schemas.openxmlformats.org/drawingml/2006/main" prst="rect">
@@ -2203,7 +2203,7 @@
         </p:nvSpPr>
         <p:spPr>
           <a:xfrm xmlns:a="http://schemas.openxmlformats.org/drawingml/2006/main">
-            <a:off x="1419225" y="608981"/>
+            <a:off x="1419225" y="968981"/>
             <a:ext cx="571500" cy="200025"/>
           </a:xfrm>
           <a:prstGeom xmlns:a="http://schemas.openxmlformats.org/drawingml/2006/main" prst="rect">
@@ -2260,7 +2260,7 @@
         </p:nvSpPr>
         <p:spPr>
           <a:xfrm xmlns:a="http://schemas.openxmlformats.org/drawingml/2006/main">
-            <a:off x="2476500" y="920401"/>
+            <a:off x="2476500" y="1280401"/>
             <a:ext cx="342900" cy="1413224"/>
           </a:xfrm>
           <a:prstGeom xmlns:a="http://schemas.openxmlformats.org/drawingml/2006/main" prst="rect">
@@ -2290,7 +2290,7 @@
         </p:nvSpPr>
         <p:spPr>
           <a:xfrm xmlns:a="http://schemas.openxmlformats.org/drawingml/2006/main">
-            <a:off x="2362200" y="691801"/>
+            <a:off x="2362200" y="1051801"/>
             <a:ext cx="571500" cy="200025"/>
           </a:xfrm>
           <a:prstGeom xmlns:a="http://schemas.openxmlformats.org/drawingml/2006/main" prst="rect">
@@ -2347,7 +2347,7 @@
         </p:nvSpPr>
         <p:spPr>
           <a:xfrm xmlns:a="http://schemas.openxmlformats.org/drawingml/2006/main">
-            <a:off x="3419475" y="1174147"/>
+            <a:off x="3419475" y="1534147"/>
             <a:ext cx="342900" cy="1159478"/>
           </a:xfrm>
           <a:prstGeom xmlns:a="http://schemas.openxmlformats.org/drawingml/2006/main" prst="rect">
@@ -2377,7 +2377,7 @@
         </p:nvSpPr>
         <p:spPr>
           <a:xfrm xmlns:a="http://schemas.openxmlformats.org/drawingml/2006/main">
-            <a:off x="3305175" y="945547"/>
+            <a:off x="3305175" y="1305547"/>
             <a:ext cx="571500" cy="200025"/>
           </a:xfrm>
           <a:prstGeom xmlns:a="http://schemas.openxmlformats.org/drawingml/2006/main" prst="rect">
@@ -2434,7 +2434,7 @@
         </p:nvSpPr>
         <p:spPr>
           <a:xfrm xmlns:a="http://schemas.openxmlformats.org/drawingml/2006/main">
-            <a:off x="4362450" y="1500140"/>
+            <a:off x="4362450" y="1860140"/>
             <a:ext cx="342900" cy="833485"/>
           </a:xfrm>
           <a:prstGeom xmlns:a="http://schemas.openxmlformats.org/drawingml/2006/main" prst="rect">
@@ -2464,7 +2464,7 @@
         </p:nvSpPr>
         <p:spPr>
           <a:xfrm xmlns:a="http://schemas.openxmlformats.org/drawingml/2006/main">
-            <a:off x="4248150" y="1271540"/>
+            <a:off x="4248150" y="1631540"/>
             <a:ext cx="571500" cy="200025"/>
           </a:xfrm>
           <a:prstGeom xmlns:a="http://schemas.openxmlformats.org/drawingml/2006/main" prst="rect">
@@ -2521,7 +2521,7 @@
         </p:nvSpPr>
         <p:spPr>
           <a:xfrm xmlns:a="http://schemas.openxmlformats.org/drawingml/2006/main">
-            <a:off x="1905000" y="2619375"/>
+            <a:off x="1905000" y="2979375"/>
             <a:ext cx="2286000" cy="209550"/>
           </a:xfrm>
           <a:prstGeom xmlns:a="http://schemas.openxmlformats.org/drawingml/2006/main" prst="rect">
@@ -2578,7 +2578,7 @@
         </p:nvSpPr>
         <p:spPr>
           <a:xfrm xmlns:a="http://schemas.openxmlformats.org/drawingml/2006/main">
-            <a:off x="76200" y="2981325"/>
+            <a:off x="76200" y="3341325"/>
             <a:ext cx="5810250" cy="247650"/>
           </a:xfrm>
           <a:prstGeom xmlns:a="http://schemas.openxmlformats.org/drawingml/2006/main" prst="rect">
@@ -2635,7 +2635,7 @@
         </p:nvSpPr>
         <p:spPr>
           <a:xfrm xmlns:a="http://schemas.openxmlformats.org/drawingml/2006/main">
-            <a:off x="552450" y="3257550"/>
+            <a:off x="552450" y="3617550"/>
             <a:ext cx="5248275" cy="247650"/>
           </a:xfrm>
           <a:prstGeom xmlns:a="http://schemas.openxmlformats.org/drawingml/2006/main" prst="rect">
@@ -2692,7 +2692,7 @@
         </p:nvSpPr>
         <p:spPr>
           <a:xfrm xmlns:a="http://schemas.openxmlformats.org/drawingml/2006/main">
-            <a:off x="485775" y="5038725"/>
+            <a:off x="485775" y="5398725"/>
             <a:ext cx="552450" cy="209550"/>
           </a:xfrm>
           <a:prstGeom xmlns:a="http://schemas.openxmlformats.org/drawingml/2006/main" prst="rect">
@@ -2749,7 +2749,7 @@
         </p:nvSpPr>
         <p:spPr>
           <a:xfrm xmlns:a="http://schemas.openxmlformats.org/drawingml/2006/main">
-            <a:off x="1428750" y="5038725"/>
+            <a:off x="1428750" y="5398725"/>
             <a:ext cx="552450" cy="209550"/>
           </a:xfrm>
           <a:prstGeom xmlns:a="http://schemas.openxmlformats.org/drawingml/2006/main" prst="rect">
@@ -2806,7 +2806,7 @@
         </p:nvSpPr>
         <p:spPr>
           <a:xfrm xmlns:a="http://schemas.openxmlformats.org/drawingml/2006/main">
-            <a:off x="2371725" y="5038725"/>
+            <a:off x="2371725" y="5398725"/>
             <a:ext cx="552450" cy="209550"/>
           </a:xfrm>
           <a:prstGeom xmlns:a="http://schemas.openxmlformats.org/drawingml/2006/main" prst="rect">
@@ -2863,7 +2863,7 @@
         </p:nvSpPr>
         <p:spPr>
           <a:xfrm xmlns:a="http://schemas.openxmlformats.org/drawingml/2006/main">
-            <a:off x="3314700" y="5038725"/>
+            <a:off x="3314700" y="5398725"/>
             <a:ext cx="552450" cy="209550"/>
           </a:xfrm>
           <a:prstGeom xmlns:a="http://schemas.openxmlformats.org/drawingml/2006/main" prst="rect">
@@ -2920,7 +2920,7 @@
         </p:nvSpPr>
         <p:spPr>
           <a:xfrm xmlns:a="http://schemas.openxmlformats.org/drawingml/2006/main">
-            <a:off x="4257675" y="5038725"/>
+            <a:off x="4257675" y="5398725"/>
             <a:ext cx="552450" cy="209550"/>
           </a:xfrm>
           <a:prstGeom xmlns:a="http://schemas.openxmlformats.org/drawingml/2006/main" prst="rect">
@@ -2977,7 +2977,7 @@
         </p:nvSpPr>
         <p:spPr>
           <a:xfrm xmlns:a="http://schemas.openxmlformats.org/drawingml/2006/main">
-            <a:off x="628650" y="3609975"/>
+            <a:off x="628650" y="3969975"/>
             <a:ext cx="9525" cy="1362075"/>
           </a:xfrm>
           <a:prstGeom xmlns:a="http://schemas.openxmlformats.org/drawingml/2006/main" prst="rect">
@@ -3007,7 +3007,7 @@
         </p:nvSpPr>
         <p:spPr>
           <a:xfrm xmlns:a="http://schemas.openxmlformats.org/drawingml/2006/main">
-            <a:off x="628650" y="4972050"/>
+            <a:off x="628650" y="5332050"/>
             <a:ext cx="5095875" cy="9525"/>
           </a:xfrm>
           <a:prstGeom xmlns:a="http://schemas.openxmlformats.org/drawingml/2006/main" prst="rect">
@@ -3037,7 +3037,7 @@
         </p:nvSpPr>
         <p:spPr>
           <a:xfrm xmlns:a="http://schemas.openxmlformats.org/drawingml/2006/main">
-            <a:off x="628650" y="4972050"/>
+            <a:off x="628650" y="5332050"/>
             <a:ext cx="5095875" cy="7620"/>
           </a:xfrm>
           <a:prstGeom xmlns:a="http://schemas.openxmlformats.org/drawingml/2006/main" prst="rect">
@@ -3067,7 +3067,7 @@
         </p:nvSpPr>
         <p:spPr>
           <a:xfrm xmlns:a="http://schemas.openxmlformats.org/drawingml/2006/main">
-            <a:off x="257175" y="4895850"/>
+            <a:off x="257175" y="5255850"/>
             <a:ext cx="304800" cy="180975"/>
           </a:xfrm>
           <a:prstGeom xmlns:a="http://schemas.openxmlformats.org/drawingml/2006/main" prst="rect">
@@ -3124,7 +3124,7 @@
         </p:nvSpPr>
         <p:spPr>
           <a:xfrm xmlns:a="http://schemas.openxmlformats.org/drawingml/2006/main">
-            <a:off x="628650" y="4518025"/>
+            <a:off x="628650" y="4878025"/>
             <a:ext cx="5095875" cy="7620"/>
           </a:xfrm>
           <a:prstGeom xmlns:a="http://schemas.openxmlformats.org/drawingml/2006/main" prst="rect">
@@ -3154,7 +3154,7 @@
         </p:nvSpPr>
         <p:spPr>
           <a:xfrm xmlns:a="http://schemas.openxmlformats.org/drawingml/2006/main">
-            <a:off x="257175" y="4441825"/>
+            <a:off x="257175" y="4801825"/>
             <a:ext cx="304800" cy="180975"/>
           </a:xfrm>
           <a:prstGeom xmlns:a="http://schemas.openxmlformats.org/drawingml/2006/main" prst="rect">
@@ -3211,7 +3211,7 @@
         </p:nvSpPr>
         <p:spPr>
           <a:xfrm xmlns:a="http://schemas.openxmlformats.org/drawingml/2006/main">
-            <a:off x="628650" y="4064000"/>
+            <a:off x="628650" y="4424000"/>
             <a:ext cx="5095875" cy="7620"/>
           </a:xfrm>
           <a:prstGeom xmlns:a="http://schemas.openxmlformats.org/drawingml/2006/main" prst="rect">
@@ -3241,7 +3241,7 @@
         </p:nvSpPr>
         <p:spPr>
           <a:xfrm xmlns:a="http://schemas.openxmlformats.org/drawingml/2006/main">
-            <a:off x="257175" y="3987800"/>
+            <a:off x="257175" y="4347800"/>
             <a:ext cx="304800" cy="180975"/>
           </a:xfrm>
           <a:prstGeom xmlns:a="http://schemas.openxmlformats.org/drawingml/2006/main" prst="rect">
@@ -3298,7 +3298,7 @@
         </p:nvSpPr>
         <p:spPr>
           <a:xfrm xmlns:a="http://schemas.openxmlformats.org/drawingml/2006/main">
-            <a:off x="628650" y="3609975"/>
+            <a:off x="628650" y="3969975"/>
             <a:ext cx="5095875" cy="7620"/>
           </a:xfrm>
           <a:prstGeom xmlns:a="http://schemas.openxmlformats.org/drawingml/2006/main" prst="rect">
@@ -3328,7 +3328,7 @@
         </p:nvSpPr>
         <p:spPr>
           <a:xfrm xmlns:a="http://schemas.openxmlformats.org/drawingml/2006/main">
-            <a:off x="257175" y="3533775"/>
+            <a:off x="257175" y="3893775"/>
             <a:ext cx="304800" cy="180975"/>
           </a:xfrm>
           <a:prstGeom xmlns:a="http://schemas.openxmlformats.org/drawingml/2006/main" prst="rect">
@@ -3385,7 +3385,7 @@
         </p:nvSpPr>
         <p:spPr>
           <a:xfrm xmlns:a="http://schemas.openxmlformats.org/drawingml/2006/main">
-            <a:off x="728663" y="3652293"/>
+            <a:off x="728663" y="4012293"/>
             <a:ext cx="66675" cy="66675"/>
           </a:xfrm>
           <a:prstGeom xmlns:a="http://schemas.openxmlformats.org/drawingml/2006/main" prst="ellipse">
@@ -3415,7 +3415,7 @@
         </p:nvSpPr>
         <p:spPr>
           <a:xfrm xmlns:a="http://schemas.openxmlformats.org/drawingml/2006/main">
-            <a:off x="728663" y="3972880"/>
+            <a:off x="728663" y="4332880"/>
             <a:ext cx="66675" cy="66675"/>
           </a:xfrm>
           <a:prstGeom xmlns:a="http://schemas.openxmlformats.org/drawingml/2006/main" prst="ellipse">
@@ -3445,7 +3445,7 @@
         </p:nvSpPr>
         <p:spPr>
           <a:xfrm xmlns:a="http://schemas.openxmlformats.org/drawingml/2006/main">
-            <a:off x="762000" y="3685631"/>
+            <a:off x="762000" y="4045631"/>
             <a:ext cx="17145" cy="17145"/>
           </a:xfrm>
           <a:prstGeom xmlns:a="http://schemas.openxmlformats.org/drawingml/2006/main" prst="rect">
@@ -3475,7 +3475,7 @@
         </p:nvSpPr>
         <p:spPr>
           <a:xfrm xmlns:a="http://schemas.openxmlformats.org/drawingml/2006/main">
-            <a:off x="780860" y="3686382"/>
+            <a:off x="780860" y="4046382"/>
             <a:ext cx="17145" cy="17145"/>
           </a:xfrm>
           <a:prstGeom xmlns:a="http://schemas.openxmlformats.org/drawingml/2006/main" prst="rect">
@@ -3505,7 +3505,7 @@
         </p:nvSpPr>
         <p:spPr>
           <a:xfrm xmlns:a="http://schemas.openxmlformats.org/drawingml/2006/main">
-            <a:off x="799719" y="3687132"/>
+            <a:off x="799719" y="4047132"/>
             <a:ext cx="17145" cy="17145"/>
           </a:xfrm>
           <a:prstGeom xmlns:a="http://schemas.openxmlformats.org/drawingml/2006/main" prst="rect">
@@ -3535,7 +3535,7 @@
         </p:nvSpPr>
         <p:spPr>
           <a:xfrm xmlns:a="http://schemas.openxmlformats.org/drawingml/2006/main">
-            <a:off x="818579" y="3687883"/>
+            <a:off x="818579" y="4047883"/>
             <a:ext cx="17145" cy="17145"/>
           </a:xfrm>
           <a:prstGeom xmlns:a="http://schemas.openxmlformats.org/drawingml/2006/main" prst="rect">
@@ -3565,7 +3565,7 @@
         </p:nvSpPr>
         <p:spPr>
           <a:xfrm xmlns:a="http://schemas.openxmlformats.org/drawingml/2006/main">
-            <a:off x="837438" y="3688634"/>
+            <a:off x="837438" y="4048634"/>
             <a:ext cx="17145" cy="17145"/>
           </a:xfrm>
           <a:prstGeom xmlns:a="http://schemas.openxmlformats.org/drawingml/2006/main" prst="rect">
@@ -3595,7 +3595,7 @@
         </p:nvSpPr>
         <p:spPr>
           <a:xfrm xmlns:a="http://schemas.openxmlformats.org/drawingml/2006/main">
-            <a:off x="856298" y="3689385"/>
+            <a:off x="856298" y="4049385"/>
             <a:ext cx="17145" cy="17145"/>
           </a:xfrm>
           <a:prstGeom xmlns:a="http://schemas.openxmlformats.org/drawingml/2006/main" prst="rect">
@@ -3625,7 +3625,7 @@
         </p:nvSpPr>
         <p:spPr>
           <a:xfrm xmlns:a="http://schemas.openxmlformats.org/drawingml/2006/main">
-            <a:off x="875157" y="3690136"/>
+            <a:off x="875157" y="4050136"/>
             <a:ext cx="17145" cy="17145"/>
           </a:xfrm>
           <a:prstGeom xmlns:a="http://schemas.openxmlformats.org/drawingml/2006/main" prst="rect">
@@ -3655,7 +3655,7 @@
         </p:nvSpPr>
         <p:spPr>
           <a:xfrm xmlns:a="http://schemas.openxmlformats.org/drawingml/2006/main">
-            <a:off x="894017" y="3690887"/>
+            <a:off x="894017" y="4050887"/>
             <a:ext cx="17145" cy="17145"/>
           </a:xfrm>
           <a:prstGeom xmlns:a="http://schemas.openxmlformats.org/drawingml/2006/main" prst="rect">
@@ -3685,7 +3685,7 @@
         </p:nvSpPr>
         <p:spPr>
           <a:xfrm xmlns:a="http://schemas.openxmlformats.org/drawingml/2006/main">
-            <a:off x="912876" y="3691638"/>
+            <a:off x="912876" y="4051638"/>
             <a:ext cx="17145" cy="17145"/>
           </a:xfrm>
           <a:prstGeom xmlns:a="http://schemas.openxmlformats.org/drawingml/2006/main" prst="rect">
@@ -3715,7 +3715,7 @@
         </p:nvSpPr>
         <p:spPr>
           <a:xfrm xmlns:a="http://schemas.openxmlformats.org/drawingml/2006/main">
-            <a:off x="931735" y="3692388"/>
+            <a:off x="931735" y="4052388"/>
             <a:ext cx="17145" cy="17145"/>
           </a:xfrm>
           <a:prstGeom xmlns:a="http://schemas.openxmlformats.org/drawingml/2006/main" prst="rect">
@@ -3745,7 +3745,7 @@
         </p:nvSpPr>
         <p:spPr>
           <a:xfrm xmlns:a="http://schemas.openxmlformats.org/drawingml/2006/main">
-            <a:off x="950595" y="3693139"/>
+            <a:off x="950595" y="4053139"/>
             <a:ext cx="17145" cy="17145"/>
           </a:xfrm>
           <a:prstGeom xmlns:a="http://schemas.openxmlformats.org/drawingml/2006/main" prst="rect">
@@ -3775,7 +3775,7 @@
         </p:nvSpPr>
         <p:spPr>
           <a:xfrm xmlns:a="http://schemas.openxmlformats.org/drawingml/2006/main">
-            <a:off x="969455" y="3693890"/>
+            <a:off x="969455" y="4053890"/>
             <a:ext cx="17145" cy="17145"/>
           </a:xfrm>
           <a:prstGeom xmlns:a="http://schemas.openxmlformats.org/drawingml/2006/main" prst="rect">
@@ -3805,7 +3805,7 @@
         </p:nvSpPr>
         <p:spPr>
           <a:xfrm xmlns:a="http://schemas.openxmlformats.org/drawingml/2006/main">
-            <a:off x="988314" y="3694641"/>
+            <a:off x="988314" y="4054641"/>
             <a:ext cx="17145" cy="17145"/>
           </a:xfrm>
           <a:prstGeom xmlns:a="http://schemas.openxmlformats.org/drawingml/2006/main" prst="rect">
@@ -3835,7 +3835,7 @@
         </p:nvSpPr>
         <p:spPr>
           <a:xfrm xmlns:a="http://schemas.openxmlformats.org/drawingml/2006/main">
-            <a:off x="1007174" y="3695392"/>
+            <a:off x="1007174" y="4055392"/>
             <a:ext cx="17145" cy="17145"/>
           </a:xfrm>
           <a:prstGeom xmlns:a="http://schemas.openxmlformats.org/drawingml/2006/main" prst="rect">
@@ -3865,7 +3865,7 @@
         </p:nvSpPr>
         <p:spPr>
           <a:xfrm xmlns:a="http://schemas.openxmlformats.org/drawingml/2006/main">
-            <a:off x="1026033" y="3696143"/>
+            <a:off x="1026033" y="4056143"/>
             <a:ext cx="17145" cy="17145"/>
           </a:xfrm>
           <a:prstGeom xmlns:a="http://schemas.openxmlformats.org/drawingml/2006/main" prst="rect">
@@ -3895,7 +3895,7 @@
         </p:nvSpPr>
         <p:spPr>
           <a:xfrm xmlns:a="http://schemas.openxmlformats.org/drawingml/2006/main">
-            <a:off x="1044893" y="3696894"/>
+            <a:off x="1044893" y="4056894"/>
             <a:ext cx="17145" cy="17145"/>
           </a:xfrm>
           <a:prstGeom xmlns:a="http://schemas.openxmlformats.org/drawingml/2006/main" prst="rect">
@@ -3925,7 +3925,7 @@
         </p:nvSpPr>
         <p:spPr>
           <a:xfrm xmlns:a="http://schemas.openxmlformats.org/drawingml/2006/main">
-            <a:off x="1063752" y="3697645"/>
+            <a:off x="1063752" y="4057645"/>
             <a:ext cx="17145" cy="17145"/>
           </a:xfrm>
           <a:prstGeom xmlns:a="http://schemas.openxmlformats.org/drawingml/2006/main" prst="rect">
@@ -3955,7 +3955,7 @@
         </p:nvSpPr>
         <p:spPr>
           <a:xfrm xmlns:a="http://schemas.openxmlformats.org/drawingml/2006/main">
-            <a:off x="1082612" y="3698395"/>
+            <a:off x="1082612" y="4058395"/>
             <a:ext cx="17145" cy="17145"/>
           </a:xfrm>
           <a:prstGeom xmlns:a="http://schemas.openxmlformats.org/drawingml/2006/main" prst="rect">
@@ -3985,7 +3985,7 @@
         </p:nvSpPr>
         <p:spPr>
           <a:xfrm xmlns:a="http://schemas.openxmlformats.org/drawingml/2006/main">
-            <a:off x="1101471" y="3699146"/>
+            <a:off x="1101471" y="4059146"/>
             <a:ext cx="17145" cy="17145"/>
           </a:xfrm>
           <a:prstGeom xmlns:a="http://schemas.openxmlformats.org/drawingml/2006/main" prst="rect">
@@ -4015,7 +4015,7 @@
         </p:nvSpPr>
         <p:spPr>
           <a:xfrm xmlns:a="http://schemas.openxmlformats.org/drawingml/2006/main">
-            <a:off x="1120331" y="3699897"/>
+            <a:off x="1120331" y="4059897"/>
             <a:ext cx="17145" cy="17145"/>
           </a:xfrm>
           <a:prstGeom xmlns:a="http://schemas.openxmlformats.org/drawingml/2006/main" prst="rect">
@@ -4045,7 +4045,7 @@
         </p:nvSpPr>
         <p:spPr>
           <a:xfrm xmlns:a="http://schemas.openxmlformats.org/drawingml/2006/main">
-            <a:off x="1139190" y="3700648"/>
+            <a:off x="1139190" y="4060648"/>
             <a:ext cx="17145" cy="17145"/>
           </a:xfrm>
           <a:prstGeom xmlns:a="http://schemas.openxmlformats.org/drawingml/2006/main" prst="rect">
@@ -4075,7 +4075,7 @@
         </p:nvSpPr>
         <p:spPr>
           <a:xfrm xmlns:a="http://schemas.openxmlformats.org/drawingml/2006/main">
-            <a:off x="1158050" y="3701399"/>
+            <a:off x="1158050" y="4061399"/>
             <a:ext cx="17145" cy="17145"/>
           </a:xfrm>
           <a:prstGeom xmlns:a="http://schemas.openxmlformats.org/drawingml/2006/main" prst="rect">
@@ -4105,7 +4105,7 @@
         </p:nvSpPr>
         <p:spPr>
           <a:xfrm xmlns:a="http://schemas.openxmlformats.org/drawingml/2006/main">
-            <a:off x="1176909" y="3702150"/>
+            <a:off x="1176909" y="4062150"/>
             <a:ext cx="17145" cy="17145"/>
           </a:xfrm>
           <a:prstGeom xmlns:a="http://schemas.openxmlformats.org/drawingml/2006/main" prst="rect">
@@ -4135,7 +4135,7 @@
         </p:nvSpPr>
         <p:spPr>
           <a:xfrm xmlns:a="http://schemas.openxmlformats.org/drawingml/2006/main">
-            <a:off x="1195769" y="3702901"/>
+            <a:off x="1195769" y="4062901"/>
             <a:ext cx="17145" cy="17145"/>
           </a:xfrm>
           <a:prstGeom xmlns:a="http://schemas.openxmlformats.org/drawingml/2006/main" prst="rect">
@@ -4165,7 +4165,7 @@
         </p:nvSpPr>
         <p:spPr>
           <a:xfrm xmlns:a="http://schemas.openxmlformats.org/drawingml/2006/main">
-            <a:off x="1214628" y="3703652"/>
+            <a:off x="1214628" y="4063652"/>
             <a:ext cx="17145" cy="17145"/>
           </a:xfrm>
           <a:prstGeom xmlns:a="http://schemas.openxmlformats.org/drawingml/2006/main" prst="rect">
@@ -4195,7 +4195,7 @@
         </p:nvSpPr>
         <p:spPr>
           <a:xfrm xmlns:a="http://schemas.openxmlformats.org/drawingml/2006/main">
-            <a:off x="1233488" y="3704402"/>
+            <a:off x="1233488" y="4064402"/>
             <a:ext cx="17145" cy="17145"/>
           </a:xfrm>
           <a:prstGeom xmlns:a="http://schemas.openxmlformats.org/drawingml/2006/main" prst="rect">
@@ -4225,7 +4225,7 @@
         </p:nvSpPr>
         <p:spPr>
           <a:xfrm xmlns:a="http://schemas.openxmlformats.org/drawingml/2006/main">
-            <a:off x="1252347" y="3705153"/>
+            <a:off x="1252347" y="4065153"/>
             <a:ext cx="17145" cy="17145"/>
           </a:xfrm>
           <a:prstGeom xmlns:a="http://schemas.openxmlformats.org/drawingml/2006/main" prst="rect">
@@ -4255,7 +4255,7 @@
         </p:nvSpPr>
         <p:spPr>
           <a:xfrm xmlns:a="http://schemas.openxmlformats.org/drawingml/2006/main">
-            <a:off x="1271207" y="3705904"/>
+            <a:off x="1271207" y="4065904"/>
             <a:ext cx="17145" cy="17145"/>
           </a:xfrm>
           <a:prstGeom xmlns:a="http://schemas.openxmlformats.org/drawingml/2006/main" prst="rect">
@@ -4285,7 +4285,7 @@
         </p:nvSpPr>
         <p:spPr>
           <a:xfrm xmlns:a="http://schemas.openxmlformats.org/drawingml/2006/main">
-            <a:off x="1290066" y="3706655"/>
+            <a:off x="1290066" y="4066655"/>
             <a:ext cx="17145" cy="17145"/>
           </a:xfrm>
           <a:prstGeom xmlns:a="http://schemas.openxmlformats.org/drawingml/2006/main" prst="rect">
@@ -4315,7 +4315,7 @@
         </p:nvSpPr>
         <p:spPr>
           <a:xfrm xmlns:a="http://schemas.openxmlformats.org/drawingml/2006/main">
-            <a:off x="1308926" y="3707406"/>
+            <a:off x="1308926" y="4067406"/>
             <a:ext cx="17145" cy="17145"/>
           </a:xfrm>
           <a:prstGeom xmlns:a="http://schemas.openxmlformats.org/drawingml/2006/main" prst="rect">
@@ -4345,7 +4345,7 @@
         </p:nvSpPr>
         <p:spPr>
           <a:xfrm xmlns:a="http://schemas.openxmlformats.org/drawingml/2006/main">
-            <a:off x="1327785" y="3708157"/>
+            <a:off x="1327785" y="4068157"/>
             <a:ext cx="17145" cy="17145"/>
           </a:xfrm>
           <a:prstGeom xmlns:a="http://schemas.openxmlformats.org/drawingml/2006/main" prst="rect">
@@ -4375,7 +4375,7 @@
         </p:nvSpPr>
         <p:spPr>
           <a:xfrm xmlns:a="http://schemas.openxmlformats.org/drawingml/2006/main">
-            <a:off x="1346645" y="3708908"/>
+            <a:off x="1346645" y="4068908"/>
             <a:ext cx="17145" cy="17145"/>
           </a:xfrm>
           <a:prstGeom xmlns:a="http://schemas.openxmlformats.org/drawingml/2006/main" prst="rect">
@@ -4405,7 +4405,7 @@
         </p:nvSpPr>
         <p:spPr>
           <a:xfrm xmlns:a="http://schemas.openxmlformats.org/drawingml/2006/main">
-            <a:off x="1365504" y="3709658"/>
+            <a:off x="1365504" y="4069658"/>
             <a:ext cx="17145" cy="17145"/>
           </a:xfrm>
           <a:prstGeom xmlns:a="http://schemas.openxmlformats.org/drawingml/2006/main" prst="rect">
@@ -4435,7 +4435,7 @@
         </p:nvSpPr>
         <p:spPr>
           <a:xfrm xmlns:a="http://schemas.openxmlformats.org/drawingml/2006/main">
-            <a:off x="1384364" y="3710409"/>
+            <a:off x="1384364" y="4070409"/>
             <a:ext cx="17145" cy="17145"/>
           </a:xfrm>
           <a:prstGeom xmlns:a="http://schemas.openxmlformats.org/drawingml/2006/main" prst="rect">
@@ -4465,7 +4465,7 @@
         </p:nvSpPr>
         <p:spPr>
           <a:xfrm xmlns:a="http://schemas.openxmlformats.org/drawingml/2006/main">
-            <a:off x="1403223" y="3711160"/>
+            <a:off x="1403223" y="4071160"/>
             <a:ext cx="17145" cy="17145"/>
           </a:xfrm>
           <a:prstGeom xmlns:a="http://schemas.openxmlformats.org/drawingml/2006/main" prst="rect">
@@ -4495,7 +4495,7 @@
         </p:nvSpPr>
         <p:spPr>
           <a:xfrm xmlns:a="http://schemas.openxmlformats.org/drawingml/2006/main">
-            <a:off x="1422083" y="3711911"/>
+            <a:off x="1422083" y="4071911"/>
             <a:ext cx="17145" cy="17145"/>
           </a:xfrm>
           <a:prstGeom xmlns:a="http://schemas.openxmlformats.org/drawingml/2006/main" prst="rect">
@@ -4525,7 +4525,7 @@
         </p:nvSpPr>
         <p:spPr>
           <a:xfrm xmlns:a="http://schemas.openxmlformats.org/drawingml/2006/main">
-            <a:off x="1440942" y="3712662"/>
+            <a:off x="1440942" y="4072662"/>
             <a:ext cx="17145" cy="17145"/>
           </a:xfrm>
           <a:prstGeom xmlns:a="http://schemas.openxmlformats.org/drawingml/2006/main" prst="rect">
@@ -4555,7 +4555,7 @@
         </p:nvSpPr>
         <p:spPr>
           <a:xfrm xmlns:a="http://schemas.openxmlformats.org/drawingml/2006/main">
-            <a:off x="1459802" y="3713413"/>
+            <a:off x="1459802" y="4073413"/>
             <a:ext cx="17145" cy="17145"/>
           </a:xfrm>
           <a:prstGeom xmlns:a="http://schemas.openxmlformats.org/drawingml/2006/main" prst="rect">
@@ -4585,7 +4585,7 @@
         </p:nvSpPr>
         <p:spPr>
           <a:xfrm xmlns:a="http://schemas.openxmlformats.org/drawingml/2006/main">
-            <a:off x="1478661" y="3714164"/>
+            <a:off x="1478661" y="4074164"/>
             <a:ext cx="17145" cy="17145"/>
           </a:xfrm>
           <a:prstGeom xmlns:a="http://schemas.openxmlformats.org/drawingml/2006/main" prst="rect">
@@ -4615,7 +4615,7 @@
         </p:nvSpPr>
         <p:spPr>
           <a:xfrm xmlns:a="http://schemas.openxmlformats.org/drawingml/2006/main">
-            <a:off x="1497521" y="3714915"/>
+            <a:off x="1497521" y="4074915"/>
             <a:ext cx="17145" cy="17145"/>
           </a:xfrm>
           <a:prstGeom xmlns:a="http://schemas.openxmlformats.org/drawingml/2006/main" prst="rect">
@@ -4645,7 +4645,7 @@
         </p:nvSpPr>
         <p:spPr>
           <a:xfrm xmlns:a="http://schemas.openxmlformats.org/drawingml/2006/main">
-            <a:off x="1516380" y="3715665"/>
+            <a:off x="1516380" y="4075665"/>
             <a:ext cx="17145" cy="17145"/>
           </a:xfrm>
           <a:prstGeom xmlns:a="http://schemas.openxmlformats.org/drawingml/2006/main" prst="rect">
@@ -4675,7 +4675,7 @@
         </p:nvSpPr>
         <p:spPr>
           <a:xfrm xmlns:a="http://schemas.openxmlformats.org/drawingml/2006/main">
-            <a:off x="1535240" y="3716416"/>
+            <a:off x="1535240" y="4076416"/>
             <a:ext cx="17145" cy="17145"/>
           </a:xfrm>
           <a:prstGeom xmlns:a="http://schemas.openxmlformats.org/drawingml/2006/main" prst="rect">
@@ -4705,7 +4705,7 @@
         </p:nvSpPr>
         <p:spPr>
           <a:xfrm xmlns:a="http://schemas.openxmlformats.org/drawingml/2006/main">
-            <a:off x="1554099" y="3717167"/>
+            <a:off x="1554099" y="4077167"/>
             <a:ext cx="17145" cy="17145"/>
           </a:xfrm>
           <a:prstGeom xmlns:a="http://schemas.openxmlformats.org/drawingml/2006/main" prst="rect">
@@ -4735,7 +4735,7 @@
         </p:nvSpPr>
         <p:spPr>
           <a:xfrm xmlns:a="http://schemas.openxmlformats.org/drawingml/2006/main">
-            <a:off x="1572958" y="3717918"/>
+            <a:off x="1572958" y="4077918"/>
             <a:ext cx="17145" cy="17145"/>
           </a:xfrm>
           <a:prstGeom xmlns:a="http://schemas.openxmlformats.org/drawingml/2006/main" prst="rect">
@@ -4765,7 +4765,7 @@
         </p:nvSpPr>
         <p:spPr>
           <a:xfrm xmlns:a="http://schemas.openxmlformats.org/drawingml/2006/main">
-            <a:off x="1591818" y="3718669"/>
+            <a:off x="1591818" y="4078669"/>
             <a:ext cx="17145" cy="17145"/>
           </a:xfrm>
           <a:prstGeom xmlns:a="http://schemas.openxmlformats.org/drawingml/2006/main" prst="rect">
@@ -4795,7 +4795,7 @@
         </p:nvSpPr>
         <p:spPr>
           <a:xfrm xmlns:a="http://schemas.openxmlformats.org/drawingml/2006/main">
-            <a:off x="1610678" y="3719420"/>
+            <a:off x="1610678" y="4079420"/>
             <a:ext cx="17145" cy="17145"/>
           </a:xfrm>
           <a:prstGeom xmlns:a="http://schemas.openxmlformats.org/drawingml/2006/main" prst="rect">
@@ -4825,7 +4825,7 @@
         </p:nvSpPr>
         <p:spPr>
           <a:xfrm xmlns:a="http://schemas.openxmlformats.org/drawingml/2006/main">
-            <a:off x="1629537" y="3720171"/>
+            <a:off x="1629537" y="4080171"/>
             <a:ext cx="17145" cy="17145"/>
           </a:xfrm>
           <a:prstGeom xmlns:a="http://schemas.openxmlformats.org/drawingml/2006/main" prst="rect">
@@ -4855,7 +4855,7 @@
         </p:nvSpPr>
         <p:spPr>
           <a:xfrm xmlns:a="http://schemas.openxmlformats.org/drawingml/2006/main">
-            <a:off x="1648397" y="3720921"/>
+            <a:off x="1648397" y="4080921"/>
             <a:ext cx="17145" cy="17145"/>
           </a:xfrm>
           <a:prstGeom xmlns:a="http://schemas.openxmlformats.org/drawingml/2006/main" prst="rect">
@@ -4885,7 +4885,7 @@
         </p:nvSpPr>
         <p:spPr>
           <a:xfrm xmlns:a="http://schemas.openxmlformats.org/drawingml/2006/main">
-            <a:off x="1667256" y="3721672"/>
+            <a:off x="1667256" y="4081672"/>
             <a:ext cx="17145" cy="17145"/>
           </a:xfrm>
           <a:prstGeom xmlns:a="http://schemas.openxmlformats.org/drawingml/2006/main" prst="rect">
@@ -4915,7 +4915,7 @@
         </p:nvSpPr>
         <p:spPr>
           <a:xfrm xmlns:a="http://schemas.openxmlformats.org/drawingml/2006/main">
-            <a:off x="1686115" y="3722423"/>
+            <a:off x="1686115" y="4082423"/>
             <a:ext cx="17145" cy="17145"/>
           </a:xfrm>
           <a:prstGeom xmlns:a="http://schemas.openxmlformats.org/drawingml/2006/main" prst="rect">
@@ -4945,7 +4945,7 @@
         </p:nvSpPr>
         <p:spPr>
           <a:xfrm xmlns:a="http://schemas.openxmlformats.org/drawingml/2006/main">
-            <a:off x="762000" y="4006218"/>
+            <a:off x="762000" y="4366218"/>
             <a:ext cx="17145" cy="17145"/>
           </a:xfrm>
           <a:prstGeom xmlns:a="http://schemas.openxmlformats.org/drawingml/2006/main" prst="rect">
@@ -4975,7 +4975,7 @@
         </p:nvSpPr>
         <p:spPr>
           <a:xfrm xmlns:a="http://schemas.openxmlformats.org/drawingml/2006/main">
-            <a:off x="780860" y="4008460"/>
+            <a:off x="780860" y="4368460"/>
             <a:ext cx="17145" cy="17145"/>
           </a:xfrm>
           <a:prstGeom xmlns:a="http://schemas.openxmlformats.org/drawingml/2006/main" prst="rect">
@@ -5005,7 +5005,7 @@
         </p:nvSpPr>
         <p:spPr>
           <a:xfrm xmlns:a="http://schemas.openxmlformats.org/drawingml/2006/main">
-            <a:off x="799719" y="4010702"/>
+            <a:off x="799719" y="4370702"/>
             <a:ext cx="17145" cy="17145"/>
           </a:xfrm>
           <a:prstGeom xmlns:a="http://schemas.openxmlformats.org/drawingml/2006/main" prst="rect">
@@ -5035,7 +5035,7 @@
         </p:nvSpPr>
         <p:spPr>
           <a:xfrm xmlns:a="http://schemas.openxmlformats.org/drawingml/2006/main">
-            <a:off x="818579" y="4012945"/>
+            <a:off x="818579" y="4372945"/>
             <a:ext cx="17145" cy="17145"/>
           </a:xfrm>
           <a:prstGeom xmlns:a="http://schemas.openxmlformats.org/drawingml/2006/main" prst="rect">
@@ -5065,7 +5065,7 @@
         </p:nvSpPr>
         <p:spPr>
           <a:xfrm xmlns:a="http://schemas.openxmlformats.org/drawingml/2006/main">
-            <a:off x="837438" y="4015187"/>
+            <a:off x="837438" y="4375187"/>
             <a:ext cx="17145" cy="17145"/>
           </a:xfrm>
           <a:prstGeom xmlns:a="http://schemas.openxmlformats.org/drawingml/2006/main" prst="rect">
@@ -5095,7 +5095,7 @@
         </p:nvSpPr>
         <p:spPr>
           <a:xfrm xmlns:a="http://schemas.openxmlformats.org/drawingml/2006/main">
-            <a:off x="856298" y="4017429"/>
+            <a:off x="856298" y="4377429"/>
             <a:ext cx="17145" cy="17145"/>
           </a:xfrm>
           <a:prstGeom xmlns:a="http://schemas.openxmlformats.org/drawingml/2006/main" prst="rect">
@@ -5125,7 +5125,7 @@
         </p:nvSpPr>
         <p:spPr>
           <a:xfrm xmlns:a="http://schemas.openxmlformats.org/drawingml/2006/main">
-            <a:off x="875157" y="4019671"/>
+            <a:off x="875157" y="4379671"/>
             <a:ext cx="17145" cy="17145"/>
           </a:xfrm>
           <a:prstGeom xmlns:a="http://schemas.openxmlformats.org/drawingml/2006/main" prst="rect">
@@ -5155,7 +5155,7 @@
         </p:nvSpPr>
         <p:spPr>
           <a:xfrm xmlns:a="http://schemas.openxmlformats.org/drawingml/2006/main">
-            <a:off x="894017" y="4021914"/>
+            <a:off x="894017" y="4381914"/>
             <a:ext cx="17145" cy="17145"/>
           </a:xfrm>
           <a:prstGeom xmlns:a="http://schemas.openxmlformats.org/drawingml/2006/main" prst="rect">
@@ -5185,7 +5185,7 @@
         </p:nvSpPr>
         <p:spPr>
           <a:xfrm xmlns:a="http://schemas.openxmlformats.org/drawingml/2006/main">
-            <a:off x="912876" y="4024156"/>
+            <a:off x="912876" y="4384156"/>
             <a:ext cx="17145" cy="17145"/>
           </a:xfrm>
           <a:prstGeom xmlns:a="http://schemas.openxmlformats.org/drawingml/2006/main" prst="rect">
@@ -5215,7 +5215,7 @@
         </p:nvSpPr>
         <p:spPr>
           <a:xfrm xmlns:a="http://schemas.openxmlformats.org/drawingml/2006/main">
-            <a:off x="931735" y="4026398"/>
+            <a:off x="931735" y="4386398"/>
             <a:ext cx="17145" cy="17145"/>
           </a:xfrm>
           <a:prstGeom xmlns:a="http://schemas.openxmlformats.org/drawingml/2006/main" prst="rect">
@@ -5245,7 +5245,7 @@
         </p:nvSpPr>
         <p:spPr>
           <a:xfrm xmlns:a="http://schemas.openxmlformats.org/drawingml/2006/main">
-            <a:off x="950595" y="4028640"/>
+            <a:off x="950595" y="4388640"/>
             <a:ext cx="17145" cy="17145"/>
           </a:xfrm>
           <a:prstGeom xmlns:a="http://schemas.openxmlformats.org/drawingml/2006/main" prst="rect">
@@ -5275,7 +5275,7 @@
         </p:nvSpPr>
         <p:spPr>
           <a:xfrm xmlns:a="http://schemas.openxmlformats.org/drawingml/2006/main">
-            <a:off x="969455" y="4030883"/>
+            <a:off x="969455" y="4390883"/>
             <a:ext cx="17145" cy="17145"/>
           </a:xfrm>
           <a:prstGeom xmlns:a="http://schemas.openxmlformats.org/drawingml/2006/main" prst="rect">
@@ -5305,7 +5305,7 @@
         </p:nvSpPr>
         <p:spPr>
           <a:xfrm xmlns:a="http://schemas.openxmlformats.org/drawingml/2006/main">
-            <a:off x="988314" y="4033125"/>
+            <a:off x="988314" y="4393125"/>
             <a:ext cx="17145" cy="17145"/>
           </a:xfrm>
           <a:prstGeom xmlns:a="http://schemas.openxmlformats.org/drawingml/2006/main" prst="rect">
@@ -5335,7 +5335,7 @@
         </p:nvSpPr>
         <p:spPr>
           <a:xfrm xmlns:a="http://schemas.openxmlformats.org/drawingml/2006/main">
-            <a:off x="1007174" y="4035367"/>
+            <a:off x="1007174" y="4395367"/>
             <a:ext cx="17145" cy="17145"/>
           </a:xfrm>
           <a:prstGeom xmlns:a="http://schemas.openxmlformats.org/drawingml/2006/main" prst="rect">
@@ -5365,7 +5365,7 @@
         </p:nvSpPr>
         <p:spPr>
           <a:xfrm xmlns:a="http://schemas.openxmlformats.org/drawingml/2006/main">
-            <a:off x="1026033" y="4037609"/>
+            <a:off x="1026033" y="4397609"/>
             <a:ext cx="17145" cy="17145"/>
           </a:xfrm>
           <a:prstGeom xmlns:a="http://schemas.openxmlformats.org/drawingml/2006/main" prst="rect">
@@ -5395,7 +5395,7 @@
         </p:nvSpPr>
         <p:spPr>
           <a:xfrm xmlns:a="http://schemas.openxmlformats.org/drawingml/2006/main">
-            <a:off x="1044893" y="4039851"/>
+            <a:off x="1044893" y="4399851"/>
             <a:ext cx="17145" cy="17145"/>
           </a:xfrm>
           <a:prstGeom xmlns:a="http://schemas.openxmlformats.org/drawingml/2006/main" prst="rect">
@@ -5425,7 +5425,7 @@
         </p:nvSpPr>
         <p:spPr>
           <a:xfrm xmlns:a="http://schemas.openxmlformats.org/drawingml/2006/main">
-            <a:off x="1063752" y="4042094"/>
+            <a:off x="1063752" y="4402094"/>
             <a:ext cx="17145" cy="17145"/>
           </a:xfrm>
           <a:prstGeom xmlns:a="http://schemas.openxmlformats.org/drawingml/2006/main" prst="rect">
@@ -5455,7 +5455,7 @@
         </p:nvSpPr>
         <p:spPr>
           <a:xfrm xmlns:a="http://schemas.openxmlformats.org/drawingml/2006/main">
-            <a:off x="1082612" y="4044336"/>
+            <a:off x="1082612" y="4404336"/>
             <a:ext cx="17145" cy="17145"/>
           </a:xfrm>
           <a:prstGeom xmlns:a="http://schemas.openxmlformats.org/drawingml/2006/main" prst="rect">
@@ -5485,7 +5485,7 @@
         </p:nvSpPr>
         <p:spPr>
           <a:xfrm xmlns:a="http://schemas.openxmlformats.org/drawingml/2006/main">
-            <a:off x="1101471" y="4046578"/>
+            <a:off x="1101471" y="4406578"/>
             <a:ext cx="17145" cy="17145"/>
           </a:xfrm>
           <a:prstGeom xmlns:a="http://schemas.openxmlformats.org/drawingml/2006/main" prst="rect">
@@ -5515,7 +5515,7 @@
         </p:nvSpPr>
         <p:spPr>
           <a:xfrm xmlns:a="http://schemas.openxmlformats.org/drawingml/2006/main">
-            <a:off x="1120331" y="4048820"/>
+            <a:off x="1120331" y="4408820"/>
             <a:ext cx="17145" cy="17145"/>
           </a:xfrm>
           <a:prstGeom xmlns:a="http://schemas.openxmlformats.org/drawingml/2006/main" prst="rect">
@@ -5545,7 +5545,7 @@
         </p:nvSpPr>
         <p:spPr>
           <a:xfrm xmlns:a="http://schemas.openxmlformats.org/drawingml/2006/main">
-            <a:off x="1139190" y="4051063"/>
+            <a:off x="1139190" y="4411063"/>
             <a:ext cx="17145" cy="17145"/>
           </a:xfrm>
           <a:prstGeom xmlns:a="http://schemas.openxmlformats.org/drawingml/2006/main" prst="rect">
@@ -5575,7 +5575,7 @@
         </p:nvSpPr>
         <p:spPr>
           <a:xfrm xmlns:a="http://schemas.openxmlformats.org/drawingml/2006/main">
-            <a:off x="1158050" y="4053305"/>
+            <a:off x="1158050" y="4413305"/>
             <a:ext cx="17145" cy="17145"/>
           </a:xfrm>
           <a:prstGeom xmlns:a="http://schemas.openxmlformats.org/drawingml/2006/main" prst="rect">
@@ -5605,7 +5605,7 @@
         </p:nvSpPr>
         <p:spPr>
           <a:xfrm xmlns:a="http://schemas.openxmlformats.org/drawingml/2006/main">
-            <a:off x="1176909" y="4055547"/>
+            <a:off x="1176909" y="4415547"/>
             <a:ext cx="17145" cy="17145"/>
           </a:xfrm>
           <a:prstGeom xmlns:a="http://schemas.openxmlformats.org/drawingml/2006/main" prst="rect">
@@ -5635,7 +5635,7 @@
         </p:nvSpPr>
         <p:spPr>
           <a:xfrm xmlns:a="http://schemas.openxmlformats.org/drawingml/2006/main">
-            <a:off x="1195769" y="4057789"/>
+            <a:off x="1195769" y="4417789"/>
             <a:ext cx="17145" cy="17145"/>
           </a:xfrm>
           <a:prstGeom xmlns:a="http://schemas.openxmlformats.org/drawingml/2006/main" prst="rect">
@@ -5665,7 +5665,7 @@
         </p:nvSpPr>
         <p:spPr>
           <a:xfrm xmlns:a="http://schemas.openxmlformats.org/drawingml/2006/main">
-            <a:off x="1214628" y="4060032"/>
+            <a:off x="1214628" y="4420032"/>
             <a:ext cx="17145" cy="17145"/>
           </a:xfrm>
           <a:prstGeom xmlns:a="http://schemas.openxmlformats.org/drawingml/2006/main" prst="rect">
@@ -5695,7 +5695,7 @@
         </p:nvSpPr>
         <p:spPr>
           <a:xfrm xmlns:a="http://schemas.openxmlformats.org/drawingml/2006/main">
-            <a:off x="1233488" y="4062274"/>
+            <a:off x="1233488" y="4422274"/>
             <a:ext cx="17145" cy="17145"/>
           </a:xfrm>
           <a:prstGeom xmlns:a="http://schemas.openxmlformats.org/drawingml/2006/main" prst="rect">
@@ -5725,7 +5725,7 @@
         </p:nvSpPr>
         <p:spPr>
           <a:xfrm xmlns:a="http://schemas.openxmlformats.org/drawingml/2006/main">
-            <a:off x="1252347" y="4064516"/>
+            <a:off x="1252347" y="4424516"/>
             <a:ext cx="17145" cy="17145"/>
           </a:xfrm>
           <a:prstGeom xmlns:a="http://schemas.openxmlformats.org/drawingml/2006/main" prst="rect">
@@ -5755,7 +5755,7 @@
         </p:nvSpPr>
         <p:spPr>
           <a:xfrm xmlns:a="http://schemas.openxmlformats.org/drawingml/2006/main">
-            <a:off x="1271207" y="4066758"/>
+            <a:off x="1271207" y="4426758"/>
             <a:ext cx="17145" cy="17145"/>
           </a:xfrm>
           <a:prstGeom xmlns:a="http://schemas.openxmlformats.org/drawingml/2006/main" prst="rect">
@@ -5785,7 +5785,7 @@
         </p:nvSpPr>
         <p:spPr>
           <a:xfrm xmlns:a="http://schemas.openxmlformats.org/drawingml/2006/main">
-            <a:off x="1290066" y="4069000"/>
+            <a:off x="1290066" y="4429000"/>
             <a:ext cx="17145" cy="17145"/>
           </a:xfrm>
           <a:prstGeom xmlns:a="http://schemas.openxmlformats.org/drawingml/2006/main" prst="rect">
@@ -5815,7 +5815,7 @@
         </p:nvSpPr>
         <p:spPr>
           <a:xfrm xmlns:a="http://schemas.openxmlformats.org/drawingml/2006/main">
-            <a:off x="1308926" y="4071243"/>
+            <a:off x="1308926" y="4431243"/>
             <a:ext cx="17145" cy="17145"/>
           </a:xfrm>
           <a:prstGeom xmlns:a="http://schemas.openxmlformats.org/drawingml/2006/main" prst="rect">
@@ -5845,7 +5845,7 @@
         </p:nvSpPr>
         <p:spPr>
           <a:xfrm xmlns:a="http://schemas.openxmlformats.org/drawingml/2006/main">
-            <a:off x="1327785" y="4073485"/>
+            <a:off x="1327785" y="4433485"/>
             <a:ext cx="17145" cy="17145"/>
           </a:xfrm>
           <a:prstGeom xmlns:a="http://schemas.openxmlformats.org/drawingml/2006/main" prst="rect">
@@ -5875,7 +5875,7 @@
         </p:nvSpPr>
         <p:spPr>
           <a:xfrm xmlns:a="http://schemas.openxmlformats.org/drawingml/2006/main">
-            <a:off x="1346645" y="4075727"/>
+            <a:off x="1346645" y="4435727"/>
             <a:ext cx="17145" cy="17145"/>
           </a:xfrm>
           <a:prstGeom xmlns:a="http://schemas.openxmlformats.org/drawingml/2006/main" prst="rect">
@@ -5905,7 +5905,7 @@
         </p:nvSpPr>
         <p:spPr>
           <a:xfrm xmlns:a="http://schemas.openxmlformats.org/drawingml/2006/main">
-            <a:off x="1365504" y="4077969"/>
+            <a:off x="1365504" y="4437969"/>
             <a:ext cx="17145" cy="17145"/>
           </a:xfrm>
           <a:prstGeom xmlns:a="http://schemas.openxmlformats.org/drawingml/2006/main" prst="rect">
@@ -5935,7 +5935,7 @@
         </p:nvSpPr>
         <p:spPr>
           <a:xfrm xmlns:a="http://schemas.openxmlformats.org/drawingml/2006/main">
-            <a:off x="1384364" y="4080212"/>
+            <a:off x="1384364" y="4440212"/>
             <a:ext cx="17145" cy="17145"/>
           </a:xfrm>
           <a:prstGeom xmlns:a="http://schemas.openxmlformats.org/drawingml/2006/main" prst="rect">
@@ -5965,7 +5965,7 @@
         </p:nvSpPr>
         <p:spPr>
           <a:xfrm xmlns:a="http://schemas.openxmlformats.org/drawingml/2006/main">
-            <a:off x="1403223" y="4082454"/>
+            <a:off x="1403223" y="4442454"/>
             <a:ext cx="17145" cy="17145"/>
           </a:xfrm>
           <a:prstGeom xmlns:a="http://schemas.openxmlformats.org/drawingml/2006/main" prst="rect">
@@ -5995,7 +5995,7 @@
         </p:nvSpPr>
         <p:spPr>
           <a:xfrm xmlns:a="http://schemas.openxmlformats.org/drawingml/2006/main">
-            <a:off x="1422083" y="4084696"/>
+            <a:off x="1422083" y="4444696"/>
             <a:ext cx="17145" cy="17145"/>
           </a:xfrm>
           <a:prstGeom xmlns:a="http://schemas.openxmlformats.org/drawingml/2006/main" prst="rect">
@@ -6025,7 +6025,7 @@
         </p:nvSpPr>
         <p:spPr>
           <a:xfrm xmlns:a="http://schemas.openxmlformats.org/drawingml/2006/main">
-            <a:off x="1440942" y="4086938"/>
+            <a:off x="1440942" y="4446938"/>
             <a:ext cx="17145" cy="17145"/>
           </a:xfrm>
           <a:prstGeom xmlns:a="http://schemas.openxmlformats.org/drawingml/2006/main" prst="rect">
@@ -6055,7 +6055,7 @@
         </p:nvSpPr>
         <p:spPr>
           <a:xfrm xmlns:a="http://schemas.openxmlformats.org/drawingml/2006/main">
-            <a:off x="1459802" y="4089181"/>
+            <a:off x="1459802" y="4449181"/>
             <a:ext cx="17145" cy="17145"/>
           </a:xfrm>
           <a:prstGeom xmlns:a="http://schemas.openxmlformats.org/drawingml/2006/main" prst="rect">
@@ -6085,7 +6085,7 @@
         </p:nvSpPr>
         <p:spPr>
           <a:xfrm xmlns:a="http://schemas.openxmlformats.org/drawingml/2006/main">
-            <a:off x="1478661" y="4091423"/>
+            <a:off x="1478661" y="4451423"/>
             <a:ext cx="17145" cy="17145"/>
           </a:xfrm>
           <a:prstGeom xmlns:a="http://schemas.openxmlformats.org/drawingml/2006/main" prst="rect">
@@ -6115,7 +6115,7 @@
         </p:nvSpPr>
         <p:spPr>
           <a:xfrm xmlns:a="http://schemas.openxmlformats.org/drawingml/2006/main">
-            <a:off x="1497521" y="4093665"/>
+            <a:off x="1497521" y="4453665"/>
             <a:ext cx="17145" cy="17145"/>
           </a:xfrm>
           <a:prstGeom xmlns:a="http://schemas.openxmlformats.org/drawingml/2006/main" prst="rect">
@@ -6145,7 +6145,7 @@
         </p:nvSpPr>
         <p:spPr>
           <a:xfrm xmlns:a="http://schemas.openxmlformats.org/drawingml/2006/main">
-            <a:off x="1516380" y="4095907"/>
+            <a:off x="1516380" y="4455907"/>
             <a:ext cx="17145" cy="17145"/>
           </a:xfrm>
           <a:prstGeom xmlns:a="http://schemas.openxmlformats.org/drawingml/2006/main" prst="rect">
@@ -6175,7 +6175,7 @@
         </p:nvSpPr>
         <p:spPr>
           <a:xfrm xmlns:a="http://schemas.openxmlformats.org/drawingml/2006/main">
-            <a:off x="1535240" y="4098149"/>
+            <a:off x="1535240" y="4458149"/>
             <a:ext cx="17145" cy="17145"/>
           </a:xfrm>
           <a:prstGeom xmlns:a="http://schemas.openxmlformats.org/drawingml/2006/main" prst="rect">
@@ -6205,7 +6205,7 @@
         </p:nvSpPr>
         <p:spPr>
           <a:xfrm xmlns:a="http://schemas.openxmlformats.org/drawingml/2006/main">
-            <a:off x="1554099" y="4100392"/>
+            <a:off x="1554099" y="4460392"/>
             <a:ext cx="17145" cy="17145"/>
           </a:xfrm>
           <a:prstGeom xmlns:a="http://schemas.openxmlformats.org/drawingml/2006/main" prst="rect">
@@ -6235,7 +6235,7 @@
         </p:nvSpPr>
         <p:spPr>
           <a:xfrm xmlns:a="http://schemas.openxmlformats.org/drawingml/2006/main">
-            <a:off x="1572958" y="4102634"/>
+            <a:off x="1572958" y="4462634"/>
             <a:ext cx="17145" cy="17145"/>
           </a:xfrm>
           <a:prstGeom xmlns:a="http://schemas.openxmlformats.org/drawingml/2006/main" prst="rect">
@@ -6265,7 +6265,7 @@
         </p:nvSpPr>
         <p:spPr>
           <a:xfrm xmlns:a="http://schemas.openxmlformats.org/drawingml/2006/main">
-            <a:off x="1591818" y="4104876"/>
+            <a:off x="1591818" y="4464876"/>
             <a:ext cx="17145" cy="17145"/>
           </a:xfrm>
           <a:prstGeom xmlns:a="http://schemas.openxmlformats.org/drawingml/2006/main" prst="rect">
@@ -6295,7 +6295,7 @@
         </p:nvSpPr>
         <p:spPr>
           <a:xfrm xmlns:a="http://schemas.openxmlformats.org/drawingml/2006/main">
-            <a:off x="1610678" y="4107118"/>
+            <a:off x="1610678" y="4467118"/>
             <a:ext cx="17145" cy="17145"/>
           </a:xfrm>
           <a:prstGeom xmlns:a="http://schemas.openxmlformats.org/drawingml/2006/main" prst="rect">
@@ -6325,7 +6325,7 @@
         </p:nvSpPr>
         <p:spPr>
           <a:xfrm xmlns:a="http://schemas.openxmlformats.org/drawingml/2006/main">
-            <a:off x="1629537" y="4109361"/>
+            <a:off x="1629537" y="4469361"/>
             <a:ext cx="17145" cy="17145"/>
           </a:xfrm>
           <a:prstGeom xmlns:a="http://schemas.openxmlformats.org/drawingml/2006/main" prst="rect">
@@ -6355,7 +6355,7 @@
         </p:nvSpPr>
         <p:spPr>
           <a:xfrm xmlns:a="http://schemas.openxmlformats.org/drawingml/2006/main">
-            <a:off x="1648397" y="4111603"/>
+            <a:off x="1648397" y="4471603"/>
             <a:ext cx="17145" cy="17145"/>
           </a:xfrm>
           <a:prstGeom xmlns:a="http://schemas.openxmlformats.org/drawingml/2006/main" prst="rect">
@@ -6385,7 +6385,7 @@
         </p:nvSpPr>
         <p:spPr>
           <a:xfrm xmlns:a="http://schemas.openxmlformats.org/drawingml/2006/main">
-            <a:off x="1667256" y="4113845"/>
+            <a:off x="1667256" y="4473845"/>
             <a:ext cx="17145" cy="17145"/>
           </a:xfrm>
           <a:prstGeom xmlns:a="http://schemas.openxmlformats.org/drawingml/2006/main" prst="rect">
@@ -6415,7 +6415,7 @@
         </p:nvSpPr>
         <p:spPr>
           <a:xfrm xmlns:a="http://schemas.openxmlformats.org/drawingml/2006/main">
-            <a:off x="1686115" y="4116087"/>
+            <a:off x="1686115" y="4476087"/>
             <a:ext cx="17145" cy="17145"/>
           </a:xfrm>
           <a:prstGeom xmlns:a="http://schemas.openxmlformats.org/drawingml/2006/main" prst="rect">
@@ -6445,7 +6445,7 @@
         </p:nvSpPr>
         <p:spPr>
           <a:xfrm xmlns:a="http://schemas.openxmlformats.org/drawingml/2006/main">
-            <a:off x="1671638" y="3689837"/>
+            <a:off x="1671638" y="4049837"/>
             <a:ext cx="66675" cy="66675"/>
           </a:xfrm>
           <a:prstGeom xmlns:a="http://schemas.openxmlformats.org/drawingml/2006/main" prst="ellipse">
@@ -6475,7 +6475,7 @@
         </p:nvSpPr>
         <p:spPr>
           <a:xfrm xmlns:a="http://schemas.openxmlformats.org/drawingml/2006/main">
-            <a:off x="1671638" y="4084992"/>
+            <a:off x="1671638" y="4444992"/>
             <a:ext cx="66675" cy="66675"/>
           </a:xfrm>
           <a:prstGeom xmlns:a="http://schemas.openxmlformats.org/drawingml/2006/main" prst="ellipse">
@@ -6505,7 +6505,7 @@
         </p:nvSpPr>
         <p:spPr>
           <a:xfrm xmlns:a="http://schemas.openxmlformats.org/drawingml/2006/main">
-            <a:off x="1704975" y="3723174"/>
+            <a:off x="1704975" y="4083174"/>
             <a:ext cx="17145" cy="17145"/>
           </a:xfrm>
           <a:prstGeom xmlns:a="http://schemas.openxmlformats.org/drawingml/2006/main" prst="rect">
@@ -6535,7 +6535,7 @@
         </p:nvSpPr>
         <p:spPr>
           <a:xfrm xmlns:a="http://schemas.openxmlformats.org/drawingml/2006/main">
-            <a:off x="1723835" y="3723436"/>
+            <a:off x="1723835" y="4083436"/>
             <a:ext cx="17145" cy="17145"/>
           </a:xfrm>
           <a:prstGeom xmlns:a="http://schemas.openxmlformats.org/drawingml/2006/main" prst="rect">
@@ -6565,7 +6565,7 @@
         </p:nvSpPr>
         <p:spPr>
           <a:xfrm xmlns:a="http://schemas.openxmlformats.org/drawingml/2006/main">
-            <a:off x="1742694" y="3723697"/>
+            <a:off x="1742694" y="4083697"/>
             <a:ext cx="17145" cy="17145"/>
           </a:xfrm>
           <a:prstGeom xmlns:a="http://schemas.openxmlformats.org/drawingml/2006/main" prst="rect">
@@ -6595,7 +6595,7 @@
         </p:nvSpPr>
         <p:spPr>
           <a:xfrm xmlns:a="http://schemas.openxmlformats.org/drawingml/2006/main">
-            <a:off x="1761554" y="3723959"/>
+            <a:off x="1761554" y="4083959"/>
             <a:ext cx="17145" cy="17145"/>
           </a:xfrm>
           <a:prstGeom xmlns:a="http://schemas.openxmlformats.org/drawingml/2006/main" prst="rect">
@@ -6625,7 +6625,7 @@
         </p:nvSpPr>
         <p:spPr>
           <a:xfrm xmlns:a="http://schemas.openxmlformats.org/drawingml/2006/main">
-            <a:off x="1780413" y="3724221"/>
+            <a:off x="1780413" y="4084221"/>
             <a:ext cx="17145" cy="17145"/>
           </a:xfrm>
           <a:prstGeom xmlns:a="http://schemas.openxmlformats.org/drawingml/2006/main" prst="rect">
@@ -6655,7 +6655,7 @@
         </p:nvSpPr>
         <p:spPr>
           <a:xfrm xmlns:a="http://schemas.openxmlformats.org/drawingml/2006/main">
-            <a:off x="1799273" y="3724482"/>
+            <a:off x="1799273" y="4084482"/>
             <a:ext cx="17145" cy="17145"/>
           </a:xfrm>
           <a:prstGeom xmlns:a="http://schemas.openxmlformats.org/drawingml/2006/main" prst="rect">
@@ -6685,7 +6685,7 @@
         </p:nvSpPr>
         <p:spPr>
           <a:xfrm xmlns:a="http://schemas.openxmlformats.org/drawingml/2006/main">
-            <a:off x="1818132" y="3724744"/>
+            <a:off x="1818132" y="4084744"/>
             <a:ext cx="17145" cy="17145"/>
           </a:xfrm>
           <a:prstGeom xmlns:a="http://schemas.openxmlformats.org/drawingml/2006/main" prst="rect">
@@ -6715,7 +6715,7 @@
         </p:nvSpPr>
         <p:spPr>
           <a:xfrm xmlns:a="http://schemas.openxmlformats.org/drawingml/2006/main">
-            <a:off x="1836992" y="3725006"/>
+            <a:off x="1836992" y="4085006"/>
             <a:ext cx="17145" cy="17145"/>
           </a:xfrm>
           <a:prstGeom xmlns:a="http://schemas.openxmlformats.org/drawingml/2006/main" prst="rect">
@@ -6745,7 +6745,7 @@
         </p:nvSpPr>
         <p:spPr>
           <a:xfrm xmlns:a="http://schemas.openxmlformats.org/drawingml/2006/main">
-            <a:off x="1855851" y="3725267"/>
+            <a:off x="1855851" y="4085267"/>
             <a:ext cx="17145" cy="17145"/>
           </a:xfrm>
           <a:prstGeom xmlns:a="http://schemas.openxmlformats.org/drawingml/2006/main" prst="rect">
@@ -6775,7 +6775,7 @@
         </p:nvSpPr>
         <p:spPr>
           <a:xfrm xmlns:a="http://schemas.openxmlformats.org/drawingml/2006/main">
-            <a:off x="1874711" y="3725529"/>
+            <a:off x="1874711" y="4085529"/>
             <a:ext cx="17145" cy="17145"/>
           </a:xfrm>
           <a:prstGeom xmlns:a="http://schemas.openxmlformats.org/drawingml/2006/main" prst="rect">
@@ -6805,7 +6805,7 @@
         </p:nvSpPr>
         <p:spPr>
           <a:xfrm xmlns:a="http://schemas.openxmlformats.org/drawingml/2006/main">
-            <a:off x="1893570" y="3725791"/>
+            <a:off x="1893570" y="4085791"/>
             <a:ext cx="17145" cy="17145"/>
           </a:xfrm>
           <a:prstGeom xmlns:a="http://schemas.openxmlformats.org/drawingml/2006/main" prst="rect">
@@ -6835,7 +6835,7 @@
         </p:nvSpPr>
         <p:spPr>
           <a:xfrm xmlns:a="http://schemas.openxmlformats.org/drawingml/2006/main">
-            <a:off x="1912430" y="3726052"/>
+            <a:off x="1912430" y="4086052"/>
             <a:ext cx="17145" cy="17145"/>
           </a:xfrm>
           <a:prstGeom xmlns:a="http://schemas.openxmlformats.org/drawingml/2006/main" prst="rect">
@@ -6865,7 +6865,7 @@
         </p:nvSpPr>
         <p:spPr>
           <a:xfrm xmlns:a="http://schemas.openxmlformats.org/drawingml/2006/main">
-            <a:off x="1931289" y="3726314"/>
+            <a:off x="1931289" y="4086314"/>
             <a:ext cx="17145" cy="17145"/>
           </a:xfrm>
           <a:prstGeom xmlns:a="http://schemas.openxmlformats.org/drawingml/2006/main" prst="rect">
@@ -6895,7 +6895,7 @@
         </p:nvSpPr>
         <p:spPr>
           <a:xfrm xmlns:a="http://schemas.openxmlformats.org/drawingml/2006/main">
-            <a:off x="1950149" y="3726576"/>
+            <a:off x="1950149" y="4086576"/>
             <a:ext cx="17145" cy="17145"/>
           </a:xfrm>
           <a:prstGeom xmlns:a="http://schemas.openxmlformats.org/drawingml/2006/main" prst="rect">
@@ -6925,7 +6925,7 @@
         </p:nvSpPr>
         <p:spPr>
           <a:xfrm xmlns:a="http://schemas.openxmlformats.org/drawingml/2006/main">
-            <a:off x="1969008" y="3726837"/>
+            <a:off x="1969008" y="4086837"/>
             <a:ext cx="17145" cy="17145"/>
           </a:xfrm>
           <a:prstGeom xmlns:a="http://schemas.openxmlformats.org/drawingml/2006/main" prst="rect">
@@ -6955,7 +6955,7 @@
         </p:nvSpPr>
         <p:spPr>
           <a:xfrm xmlns:a="http://schemas.openxmlformats.org/drawingml/2006/main">
-            <a:off x="1987868" y="3727099"/>
+            <a:off x="1987868" y="4087099"/>
             <a:ext cx="17145" cy="17145"/>
           </a:xfrm>
           <a:prstGeom xmlns:a="http://schemas.openxmlformats.org/drawingml/2006/main" prst="rect">
@@ -6985,7 +6985,7 @@
         </p:nvSpPr>
         <p:spPr>
           <a:xfrm xmlns:a="http://schemas.openxmlformats.org/drawingml/2006/main">
-            <a:off x="2006727" y="3727361"/>
+            <a:off x="2006727" y="4087361"/>
             <a:ext cx="17145" cy="17145"/>
           </a:xfrm>
           <a:prstGeom xmlns:a="http://schemas.openxmlformats.org/drawingml/2006/main" prst="rect">
@@ -7015,7 +7015,7 @@
         </p:nvSpPr>
         <p:spPr>
           <a:xfrm xmlns:a="http://schemas.openxmlformats.org/drawingml/2006/main">
-            <a:off x="2025587" y="3727622"/>
+            <a:off x="2025587" y="4087622"/>
             <a:ext cx="17145" cy="17145"/>
           </a:xfrm>
           <a:prstGeom xmlns:a="http://schemas.openxmlformats.org/drawingml/2006/main" prst="rect">
@@ -7045,7 +7045,7 @@
         </p:nvSpPr>
         <p:spPr>
           <a:xfrm xmlns:a="http://schemas.openxmlformats.org/drawingml/2006/main">
-            <a:off x="2044446" y="3727884"/>
+            <a:off x="2044446" y="4087884"/>
             <a:ext cx="17145" cy="17145"/>
           </a:xfrm>
           <a:prstGeom xmlns:a="http://schemas.openxmlformats.org/drawingml/2006/main" prst="rect">
@@ -7075,7 +7075,7 @@
         </p:nvSpPr>
         <p:spPr>
           <a:xfrm xmlns:a="http://schemas.openxmlformats.org/drawingml/2006/main">
-            <a:off x="2063306" y="3728146"/>
+            <a:off x="2063306" y="4088146"/>
             <a:ext cx="17145" cy="17145"/>
           </a:xfrm>
           <a:prstGeom xmlns:a="http://schemas.openxmlformats.org/drawingml/2006/main" prst="rect">
@@ -7105,7 +7105,7 @@
         </p:nvSpPr>
         <p:spPr>
           <a:xfrm xmlns:a="http://schemas.openxmlformats.org/drawingml/2006/main">
-            <a:off x="2082165" y="3728407"/>
+            <a:off x="2082165" y="4088407"/>
             <a:ext cx="17145" cy="17145"/>
           </a:xfrm>
           <a:prstGeom xmlns:a="http://schemas.openxmlformats.org/drawingml/2006/main" prst="rect">
@@ -7135,7 +7135,7 @@
         </p:nvSpPr>
         <p:spPr>
           <a:xfrm xmlns:a="http://schemas.openxmlformats.org/drawingml/2006/main">
-            <a:off x="2101025" y="3728669"/>
+            <a:off x="2101025" y="4088669"/>
             <a:ext cx="17145" cy="17145"/>
           </a:xfrm>
           <a:prstGeom xmlns:a="http://schemas.openxmlformats.org/drawingml/2006/main" prst="rect">
@@ -7165,7 +7165,7 @@
         </p:nvSpPr>
         <p:spPr>
           <a:xfrm xmlns:a="http://schemas.openxmlformats.org/drawingml/2006/main">
-            <a:off x="2119884" y="3728931"/>
+            <a:off x="2119884" y="4088931"/>
             <a:ext cx="17145" cy="17145"/>
           </a:xfrm>
           <a:prstGeom xmlns:a="http://schemas.openxmlformats.org/drawingml/2006/main" prst="rect">
@@ -7195,7 +7195,7 @@
         </p:nvSpPr>
         <p:spPr>
           <a:xfrm xmlns:a="http://schemas.openxmlformats.org/drawingml/2006/main">
-            <a:off x="2138744" y="3729192"/>
+            <a:off x="2138744" y="4089192"/>
             <a:ext cx="17145" cy="17145"/>
           </a:xfrm>
           <a:prstGeom xmlns:a="http://schemas.openxmlformats.org/drawingml/2006/main" prst="rect">
@@ -7225,7 +7225,7 @@
         </p:nvSpPr>
         <p:spPr>
           <a:xfrm xmlns:a="http://schemas.openxmlformats.org/drawingml/2006/main">
-            <a:off x="2157603" y="3729454"/>
+            <a:off x="2157603" y="4089454"/>
             <a:ext cx="17145" cy="17145"/>
           </a:xfrm>
           <a:prstGeom xmlns:a="http://schemas.openxmlformats.org/drawingml/2006/main" prst="rect">
@@ -7255,7 +7255,7 @@
         </p:nvSpPr>
         <p:spPr>
           <a:xfrm xmlns:a="http://schemas.openxmlformats.org/drawingml/2006/main">
-            <a:off x="2176463" y="3729716"/>
+            <a:off x="2176463" y="4089716"/>
             <a:ext cx="17145" cy="17145"/>
           </a:xfrm>
           <a:prstGeom xmlns:a="http://schemas.openxmlformats.org/drawingml/2006/main" prst="rect">
@@ -7285,7 +7285,7 @@
         </p:nvSpPr>
         <p:spPr>
           <a:xfrm xmlns:a="http://schemas.openxmlformats.org/drawingml/2006/main">
-            <a:off x="2195322" y="3729977"/>
+            <a:off x="2195322" y="4089977"/>
             <a:ext cx="17145" cy="17145"/>
           </a:xfrm>
           <a:prstGeom xmlns:a="http://schemas.openxmlformats.org/drawingml/2006/main" prst="rect">
@@ -7315,7 +7315,7 @@
         </p:nvSpPr>
         <p:spPr>
           <a:xfrm xmlns:a="http://schemas.openxmlformats.org/drawingml/2006/main">
-            <a:off x="2214182" y="3730239"/>
+            <a:off x="2214182" y="4090239"/>
             <a:ext cx="17145" cy="17145"/>
           </a:xfrm>
           <a:prstGeom xmlns:a="http://schemas.openxmlformats.org/drawingml/2006/main" prst="rect">
@@ -7345,7 +7345,7 @@
         </p:nvSpPr>
         <p:spPr>
           <a:xfrm xmlns:a="http://schemas.openxmlformats.org/drawingml/2006/main">
-            <a:off x="2233041" y="3730501"/>
+            <a:off x="2233041" y="4090501"/>
             <a:ext cx="17145" cy="17145"/>
           </a:xfrm>
           <a:prstGeom xmlns:a="http://schemas.openxmlformats.org/drawingml/2006/main" prst="rect">
@@ -7375,7 +7375,7 @@
         </p:nvSpPr>
         <p:spPr>
           <a:xfrm xmlns:a="http://schemas.openxmlformats.org/drawingml/2006/main">
-            <a:off x="2251901" y="3730762"/>
+            <a:off x="2251901" y="4090762"/>
             <a:ext cx="17145" cy="17145"/>
           </a:xfrm>
           <a:prstGeom xmlns:a="http://schemas.openxmlformats.org/drawingml/2006/main" prst="rect">
@@ -7405,7 +7405,7 @@
         </p:nvSpPr>
         <p:spPr>
           <a:xfrm xmlns:a="http://schemas.openxmlformats.org/drawingml/2006/main">
-            <a:off x="2270760" y="3731024"/>
+            <a:off x="2270760" y="4091024"/>
             <a:ext cx="17145" cy="17145"/>
           </a:xfrm>
           <a:prstGeom xmlns:a="http://schemas.openxmlformats.org/drawingml/2006/main" prst="rect">
@@ -7435,7 +7435,7 @@
         </p:nvSpPr>
         <p:spPr>
           <a:xfrm xmlns:a="http://schemas.openxmlformats.org/drawingml/2006/main">
-            <a:off x="2289620" y="3731286"/>
+            <a:off x="2289620" y="4091286"/>
             <a:ext cx="17145" cy="17145"/>
           </a:xfrm>
           <a:prstGeom xmlns:a="http://schemas.openxmlformats.org/drawingml/2006/main" prst="rect">
@@ -7465,7 +7465,7 @@
         </p:nvSpPr>
         <p:spPr>
           <a:xfrm xmlns:a="http://schemas.openxmlformats.org/drawingml/2006/main">
-            <a:off x="2308479" y="3731547"/>
+            <a:off x="2308479" y="4091547"/>
             <a:ext cx="17145" cy="17145"/>
           </a:xfrm>
           <a:prstGeom xmlns:a="http://schemas.openxmlformats.org/drawingml/2006/main" prst="rect">
@@ -7495,7 +7495,7 @@
         </p:nvSpPr>
         <p:spPr>
           <a:xfrm xmlns:a="http://schemas.openxmlformats.org/drawingml/2006/main">
-            <a:off x="2327339" y="3731809"/>
+            <a:off x="2327339" y="4091809"/>
             <a:ext cx="17145" cy="17145"/>
           </a:xfrm>
           <a:prstGeom xmlns:a="http://schemas.openxmlformats.org/drawingml/2006/main" prst="rect">
@@ -7525,7 +7525,7 @@
         </p:nvSpPr>
         <p:spPr>
           <a:xfrm xmlns:a="http://schemas.openxmlformats.org/drawingml/2006/main">
-            <a:off x="2346198" y="3732071"/>
+            <a:off x="2346198" y="4092071"/>
             <a:ext cx="17145" cy="17145"/>
           </a:xfrm>
           <a:prstGeom xmlns:a="http://schemas.openxmlformats.org/drawingml/2006/main" prst="rect">
@@ -7555,7 +7555,7 @@
         </p:nvSpPr>
         <p:spPr>
           <a:xfrm xmlns:a="http://schemas.openxmlformats.org/drawingml/2006/main">
-            <a:off x="2365058" y="3732332"/>
+            <a:off x="2365058" y="4092332"/>
             <a:ext cx="17145" cy="17145"/>
           </a:xfrm>
           <a:prstGeom xmlns:a="http://schemas.openxmlformats.org/drawingml/2006/main" prst="rect">
@@ -7585,7 +7585,7 @@
         </p:nvSpPr>
         <p:spPr>
           <a:xfrm xmlns:a="http://schemas.openxmlformats.org/drawingml/2006/main">
-            <a:off x="2383917" y="3732594"/>
+            <a:off x="2383917" y="4092594"/>
             <a:ext cx="17145" cy="17145"/>
           </a:xfrm>
           <a:prstGeom xmlns:a="http://schemas.openxmlformats.org/drawingml/2006/main" prst="rect">
@@ -7615,7 +7615,7 @@
         </p:nvSpPr>
         <p:spPr>
           <a:xfrm xmlns:a="http://schemas.openxmlformats.org/drawingml/2006/main">
-            <a:off x="2402777" y="3732856"/>
+            <a:off x="2402777" y="4092856"/>
             <a:ext cx="17145" cy="17145"/>
           </a:xfrm>
           <a:prstGeom xmlns:a="http://schemas.openxmlformats.org/drawingml/2006/main" prst="rect">
@@ -7645,7 +7645,7 @@
         </p:nvSpPr>
         <p:spPr>
           <a:xfrm xmlns:a="http://schemas.openxmlformats.org/drawingml/2006/main">
-            <a:off x="2421636" y="3733117"/>
+            <a:off x="2421636" y="4093117"/>
             <a:ext cx="17145" cy="17145"/>
           </a:xfrm>
           <a:prstGeom xmlns:a="http://schemas.openxmlformats.org/drawingml/2006/main" prst="rect">
@@ -7675,7 +7675,7 @@
         </p:nvSpPr>
         <p:spPr>
           <a:xfrm xmlns:a="http://schemas.openxmlformats.org/drawingml/2006/main">
-            <a:off x="2440496" y="3733379"/>
+            <a:off x="2440496" y="4093379"/>
             <a:ext cx="17145" cy="17145"/>
           </a:xfrm>
           <a:prstGeom xmlns:a="http://schemas.openxmlformats.org/drawingml/2006/main" prst="rect">
@@ -7705,7 +7705,7 @@
         </p:nvSpPr>
         <p:spPr>
           <a:xfrm xmlns:a="http://schemas.openxmlformats.org/drawingml/2006/main">
-            <a:off x="2459355" y="3733641"/>
+            <a:off x="2459355" y="4093641"/>
             <a:ext cx="17145" cy="17145"/>
           </a:xfrm>
           <a:prstGeom xmlns:a="http://schemas.openxmlformats.org/drawingml/2006/main" prst="rect">
@@ -7735,7 +7735,7 @@
         </p:nvSpPr>
         <p:spPr>
           <a:xfrm xmlns:a="http://schemas.openxmlformats.org/drawingml/2006/main">
-            <a:off x="2478215" y="3733902"/>
+            <a:off x="2478215" y="4093902"/>
             <a:ext cx="17145" cy="17145"/>
           </a:xfrm>
           <a:prstGeom xmlns:a="http://schemas.openxmlformats.org/drawingml/2006/main" prst="rect">
@@ -7765,7 +7765,7 @@
         </p:nvSpPr>
         <p:spPr>
           <a:xfrm xmlns:a="http://schemas.openxmlformats.org/drawingml/2006/main">
-            <a:off x="2497074" y="3734164"/>
+            <a:off x="2497074" y="4094164"/>
             <a:ext cx="17145" cy="17145"/>
           </a:xfrm>
           <a:prstGeom xmlns:a="http://schemas.openxmlformats.org/drawingml/2006/main" prst="rect">
@@ -7795,7 +7795,7 @@
         </p:nvSpPr>
         <p:spPr>
           <a:xfrm xmlns:a="http://schemas.openxmlformats.org/drawingml/2006/main">
-            <a:off x="2515934" y="3734426"/>
+            <a:off x="2515934" y="4094426"/>
             <a:ext cx="17145" cy="17145"/>
           </a:xfrm>
           <a:prstGeom xmlns:a="http://schemas.openxmlformats.org/drawingml/2006/main" prst="rect">
@@ -7825,7 +7825,7 @@
         </p:nvSpPr>
         <p:spPr>
           <a:xfrm xmlns:a="http://schemas.openxmlformats.org/drawingml/2006/main">
-            <a:off x="2534793" y="3734687"/>
+            <a:off x="2534793" y="4094687"/>
             <a:ext cx="17145" cy="17145"/>
           </a:xfrm>
           <a:prstGeom xmlns:a="http://schemas.openxmlformats.org/drawingml/2006/main" prst="rect">
@@ -7855,7 +7855,7 @@
         </p:nvSpPr>
         <p:spPr>
           <a:xfrm xmlns:a="http://schemas.openxmlformats.org/drawingml/2006/main">
-            <a:off x="2553653" y="3734949"/>
+            <a:off x="2553653" y="4094949"/>
             <a:ext cx="17145" cy="17145"/>
           </a:xfrm>
           <a:prstGeom xmlns:a="http://schemas.openxmlformats.org/drawingml/2006/main" prst="rect">
@@ -7885,7 +7885,7 @@
         </p:nvSpPr>
         <p:spPr>
           <a:xfrm xmlns:a="http://schemas.openxmlformats.org/drawingml/2006/main">
-            <a:off x="2572512" y="3735211"/>
+            <a:off x="2572512" y="4095211"/>
             <a:ext cx="17145" cy="17145"/>
           </a:xfrm>
           <a:prstGeom xmlns:a="http://schemas.openxmlformats.org/drawingml/2006/main" prst="rect">
@@ -7915,7 +7915,7 @@
         </p:nvSpPr>
         <p:spPr>
           <a:xfrm xmlns:a="http://schemas.openxmlformats.org/drawingml/2006/main">
-            <a:off x="2591372" y="3735472"/>
+            <a:off x="2591372" y="4095472"/>
             <a:ext cx="17145" cy="17145"/>
           </a:xfrm>
           <a:prstGeom xmlns:a="http://schemas.openxmlformats.org/drawingml/2006/main" prst="rect">
@@ -7945,7 +7945,7 @@
         </p:nvSpPr>
         <p:spPr>
           <a:xfrm xmlns:a="http://schemas.openxmlformats.org/drawingml/2006/main">
-            <a:off x="2610231" y="3735734"/>
+            <a:off x="2610231" y="4095734"/>
             <a:ext cx="17145" cy="17145"/>
           </a:xfrm>
           <a:prstGeom xmlns:a="http://schemas.openxmlformats.org/drawingml/2006/main" prst="rect">
@@ -7975,7 +7975,7 @@
         </p:nvSpPr>
         <p:spPr>
           <a:xfrm xmlns:a="http://schemas.openxmlformats.org/drawingml/2006/main">
-            <a:off x="2629091" y="3735996"/>
+            <a:off x="2629091" y="4095996"/>
             <a:ext cx="17145" cy="17145"/>
           </a:xfrm>
           <a:prstGeom xmlns:a="http://schemas.openxmlformats.org/drawingml/2006/main" prst="rect">
@@ -8005,7 +8005,7 @@
         </p:nvSpPr>
         <p:spPr>
           <a:xfrm xmlns:a="http://schemas.openxmlformats.org/drawingml/2006/main">
-            <a:off x="1704975" y="4118330"/>
+            <a:off x="1704975" y="4478330"/>
             <a:ext cx="17145" cy="17145"/>
           </a:xfrm>
           <a:prstGeom xmlns:a="http://schemas.openxmlformats.org/drawingml/2006/main" prst="rect">
@@ -8035,7 +8035,7 @@
         </p:nvSpPr>
         <p:spPr>
           <a:xfrm xmlns:a="http://schemas.openxmlformats.org/drawingml/2006/main">
-            <a:off x="1723835" y="4118790"/>
+            <a:off x="1723835" y="4478790"/>
             <a:ext cx="17145" cy="17145"/>
           </a:xfrm>
           <a:prstGeom xmlns:a="http://schemas.openxmlformats.org/drawingml/2006/main" prst="rect">
@@ -8065,7 +8065,7 @@
         </p:nvSpPr>
         <p:spPr>
           <a:xfrm xmlns:a="http://schemas.openxmlformats.org/drawingml/2006/main">
-            <a:off x="1742694" y="4119251"/>
+            <a:off x="1742694" y="4479251"/>
             <a:ext cx="17145" cy="17145"/>
           </a:xfrm>
           <a:prstGeom xmlns:a="http://schemas.openxmlformats.org/drawingml/2006/main" prst="rect">
@@ -8095,7 +8095,7 @@
         </p:nvSpPr>
         <p:spPr>
           <a:xfrm xmlns:a="http://schemas.openxmlformats.org/drawingml/2006/main">
-            <a:off x="1761554" y="4119711"/>
+            <a:off x="1761554" y="4479711"/>
             <a:ext cx="17145" cy="17145"/>
           </a:xfrm>
           <a:prstGeom xmlns:a="http://schemas.openxmlformats.org/drawingml/2006/main" prst="rect">
@@ -8125,7 +8125,7 @@
         </p:nvSpPr>
         <p:spPr>
           <a:xfrm xmlns:a="http://schemas.openxmlformats.org/drawingml/2006/main">
-            <a:off x="1780413" y="4120172"/>
+            <a:off x="1780413" y="4480172"/>
             <a:ext cx="17145" cy="17145"/>
           </a:xfrm>
           <a:prstGeom xmlns:a="http://schemas.openxmlformats.org/drawingml/2006/main" prst="rect">
@@ -8155,7 +8155,7 @@
         </p:nvSpPr>
         <p:spPr>
           <a:xfrm xmlns:a="http://schemas.openxmlformats.org/drawingml/2006/main">
-            <a:off x="1799273" y="4120632"/>
+            <a:off x="1799273" y="4480632"/>
             <a:ext cx="17145" cy="17145"/>
           </a:xfrm>
           <a:prstGeom xmlns:a="http://schemas.openxmlformats.org/drawingml/2006/main" prst="rect">
@@ -8185,7 +8185,7 @@
         </p:nvSpPr>
         <p:spPr>
           <a:xfrm xmlns:a="http://schemas.openxmlformats.org/drawingml/2006/main">
-            <a:off x="1818132" y="4121093"/>
+            <a:off x="1818132" y="4481093"/>
             <a:ext cx="17145" cy="17145"/>
           </a:xfrm>
           <a:prstGeom xmlns:a="http://schemas.openxmlformats.org/drawingml/2006/main" prst="rect">
@@ -8215,7 +8215,7 @@
         </p:nvSpPr>
         <p:spPr>
           <a:xfrm xmlns:a="http://schemas.openxmlformats.org/drawingml/2006/main">
-            <a:off x="1836992" y="4121553"/>
+            <a:off x="1836992" y="4481553"/>
             <a:ext cx="17145" cy="17145"/>
           </a:xfrm>
           <a:prstGeom xmlns:a="http://schemas.openxmlformats.org/drawingml/2006/main" prst="rect">
@@ -8245,7 +8245,7 @@
         </p:nvSpPr>
         <p:spPr>
           <a:xfrm xmlns:a="http://schemas.openxmlformats.org/drawingml/2006/main">
-            <a:off x="1855851" y="4122014"/>
+            <a:off x="1855851" y="4482014"/>
             <a:ext cx="17145" cy="17145"/>
           </a:xfrm>
           <a:prstGeom xmlns:a="http://schemas.openxmlformats.org/drawingml/2006/main" prst="rect">
@@ -8275,7 +8275,7 @@
         </p:nvSpPr>
         <p:spPr>
           <a:xfrm xmlns:a="http://schemas.openxmlformats.org/drawingml/2006/main">
-            <a:off x="1874711" y="4122475"/>
+            <a:off x="1874711" y="4482475"/>
             <a:ext cx="17145" cy="17145"/>
           </a:xfrm>
           <a:prstGeom xmlns:a="http://schemas.openxmlformats.org/drawingml/2006/main" prst="rect">
@@ -8305,7 +8305,7 @@
         </p:nvSpPr>
         <p:spPr>
           <a:xfrm xmlns:a="http://schemas.openxmlformats.org/drawingml/2006/main">
-            <a:off x="1893570" y="4122935"/>
+            <a:off x="1893570" y="4482935"/>
             <a:ext cx="17145" cy="17145"/>
           </a:xfrm>
           <a:prstGeom xmlns:a="http://schemas.openxmlformats.org/drawingml/2006/main" prst="rect">
@@ -8335,7 +8335,7 @@
         </p:nvSpPr>
         <p:spPr>
           <a:xfrm xmlns:a="http://schemas.openxmlformats.org/drawingml/2006/main">
-            <a:off x="1912430" y="4123396"/>
+            <a:off x="1912430" y="4483396"/>
             <a:ext cx="17145" cy="17145"/>
           </a:xfrm>
           <a:prstGeom xmlns:a="http://schemas.openxmlformats.org/drawingml/2006/main" prst="rect">
@@ -8365,7 +8365,7 @@
         </p:nvSpPr>
         <p:spPr>
           <a:xfrm xmlns:a="http://schemas.openxmlformats.org/drawingml/2006/main">
-            <a:off x="1931289" y="4123856"/>
+            <a:off x="1931289" y="4483856"/>
             <a:ext cx="17145" cy="17145"/>
           </a:xfrm>
           <a:prstGeom xmlns:a="http://schemas.openxmlformats.org/drawingml/2006/main" prst="rect">
@@ -8395,7 +8395,7 @@
         </p:nvSpPr>
         <p:spPr>
           <a:xfrm xmlns:a="http://schemas.openxmlformats.org/drawingml/2006/main">
-            <a:off x="1950149" y="4124317"/>
+            <a:off x="1950149" y="4484317"/>
             <a:ext cx="17145" cy="17145"/>
           </a:xfrm>
           <a:prstGeom xmlns:a="http://schemas.openxmlformats.org/drawingml/2006/main" prst="rect">
@@ -8425,7 +8425,7 @@
         </p:nvSpPr>
         <p:spPr>
           <a:xfrm xmlns:a="http://schemas.openxmlformats.org/drawingml/2006/main">
-            <a:off x="1969008" y="4124777"/>
+            <a:off x="1969008" y="4484777"/>
             <a:ext cx="17145" cy="17145"/>
           </a:xfrm>
           <a:prstGeom xmlns:a="http://schemas.openxmlformats.org/drawingml/2006/main" prst="rect">
@@ -8455,7 +8455,7 @@
         </p:nvSpPr>
         <p:spPr>
           <a:xfrm xmlns:a="http://schemas.openxmlformats.org/drawingml/2006/main">
-            <a:off x="1987868" y="4125238"/>
+            <a:off x="1987868" y="4485238"/>
             <a:ext cx="17145" cy="17145"/>
           </a:xfrm>
           <a:prstGeom xmlns:a="http://schemas.openxmlformats.org/drawingml/2006/main" prst="rect">
@@ -8485,7 +8485,7 @@
         </p:nvSpPr>
         <p:spPr>
           <a:xfrm xmlns:a="http://schemas.openxmlformats.org/drawingml/2006/main">
-            <a:off x="2006727" y="4125699"/>
+            <a:off x="2006727" y="4485699"/>
             <a:ext cx="17145" cy="17145"/>
           </a:xfrm>
           <a:prstGeom xmlns:a="http://schemas.openxmlformats.org/drawingml/2006/main" prst="rect">
@@ -8515,7 +8515,7 @@
         </p:nvSpPr>
         <p:spPr>
           <a:xfrm xmlns:a="http://schemas.openxmlformats.org/drawingml/2006/main">
-            <a:off x="2025587" y="4126159"/>
+            <a:off x="2025587" y="4486159"/>
             <a:ext cx="17145" cy="17145"/>
           </a:xfrm>
           <a:prstGeom xmlns:a="http://schemas.openxmlformats.org/drawingml/2006/main" prst="rect">
@@ -8545,7 +8545,7 @@
         </p:nvSpPr>
         <p:spPr>
           <a:xfrm xmlns:a="http://schemas.openxmlformats.org/drawingml/2006/main">
-            <a:off x="2044446" y="4126620"/>
+            <a:off x="2044446" y="4486620"/>
             <a:ext cx="17145" cy="17145"/>
           </a:xfrm>
           <a:prstGeom xmlns:a="http://schemas.openxmlformats.org/drawingml/2006/main" prst="rect">
@@ -8575,7 +8575,7 @@
         </p:nvSpPr>
         <p:spPr>
           <a:xfrm xmlns:a="http://schemas.openxmlformats.org/drawingml/2006/main">
-            <a:off x="2063306" y="4127080"/>
+            <a:off x="2063306" y="4487080"/>
             <a:ext cx="17145" cy="17145"/>
           </a:xfrm>
           <a:prstGeom xmlns:a="http://schemas.openxmlformats.org/drawingml/2006/main" prst="rect">
@@ -8605,7 +8605,7 @@
         </p:nvSpPr>
         <p:spPr>
           <a:xfrm xmlns:a="http://schemas.openxmlformats.org/drawingml/2006/main">
-            <a:off x="2082165" y="4127541"/>
+            <a:off x="2082165" y="4487541"/>
             <a:ext cx="17145" cy="17145"/>
           </a:xfrm>
           <a:prstGeom xmlns:a="http://schemas.openxmlformats.org/drawingml/2006/main" prst="rect">
@@ -8635,7 +8635,7 @@
         </p:nvSpPr>
         <p:spPr>
           <a:xfrm xmlns:a="http://schemas.openxmlformats.org/drawingml/2006/main">
-            <a:off x="2101025" y="4128001"/>
+            <a:off x="2101025" y="4488001"/>
             <a:ext cx="17145" cy="17145"/>
           </a:xfrm>
           <a:prstGeom xmlns:a="http://schemas.openxmlformats.org/drawingml/2006/main" prst="rect">
@@ -8665,7 +8665,7 @@
         </p:nvSpPr>
         <p:spPr>
           <a:xfrm xmlns:a="http://schemas.openxmlformats.org/drawingml/2006/main">
-            <a:off x="2119884" y="4128462"/>
+            <a:off x="2119884" y="4488462"/>
             <a:ext cx="17145" cy="17145"/>
           </a:xfrm>
           <a:prstGeom xmlns:a="http://schemas.openxmlformats.org/drawingml/2006/main" prst="rect">
@@ -8695,7 +8695,7 @@
         </p:nvSpPr>
         <p:spPr>
           <a:xfrm xmlns:a="http://schemas.openxmlformats.org/drawingml/2006/main">
-            <a:off x="2138744" y="4128923"/>
+            <a:off x="2138744" y="4488923"/>
             <a:ext cx="17145" cy="17145"/>
           </a:xfrm>
           <a:prstGeom xmlns:a="http://schemas.openxmlformats.org/drawingml/2006/main" prst="rect">
@@ -8725,7 +8725,7 @@
         </p:nvSpPr>
         <p:spPr>
           <a:xfrm xmlns:a="http://schemas.openxmlformats.org/drawingml/2006/main">
-            <a:off x="2157603" y="4129383"/>
+            <a:off x="2157603" y="4489383"/>
             <a:ext cx="17145" cy="17145"/>
           </a:xfrm>
           <a:prstGeom xmlns:a="http://schemas.openxmlformats.org/drawingml/2006/main" prst="rect">
@@ -8755,7 +8755,7 @@
         </p:nvSpPr>
         <p:spPr>
           <a:xfrm xmlns:a="http://schemas.openxmlformats.org/drawingml/2006/main">
-            <a:off x="2176463" y="4129844"/>
+            <a:off x="2176463" y="4489844"/>
             <a:ext cx="17145" cy="17145"/>
           </a:xfrm>
           <a:prstGeom xmlns:a="http://schemas.openxmlformats.org/drawingml/2006/main" prst="rect">
@@ -8785,7 +8785,7 @@
         </p:nvSpPr>
         <p:spPr>
           <a:xfrm xmlns:a="http://schemas.openxmlformats.org/drawingml/2006/main">
-            <a:off x="2195322" y="4130304"/>
+            <a:off x="2195322" y="4490304"/>
             <a:ext cx="17145" cy="17145"/>
           </a:xfrm>
           <a:prstGeom xmlns:a="http://schemas.openxmlformats.org/drawingml/2006/main" prst="rect">
@@ -8815,7 +8815,7 @@
         </p:nvSpPr>
         <p:spPr>
           <a:xfrm xmlns:a="http://schemas.openxmlformats.org/drawingml/2006/main">
-            <a:off x="2214182" y="4130765"/>
+            <a:off x="2214182" y="4490765"/>
             <a:ext cx="17145" cy="17145"/>
           </a:xfrm>
           <a:prstGeom xmlns:a="http://schemas.openxmlformats.org/drawingml/2006/main" prst="rect">
@@ -8845,7 +8845,7 @@
         </p:nvSpPr>
         <p:spPr>
           <a:xfrm xmlns:a="http://schemas.openxmlformats.org/drawingml/2006/main">
-            <a:off x="2233041" y="4131225"/>
+            <a:off x="2233041" y="4491225"/>
             <a:ext cx="17145" cy="17145"/>
           </a:xfrm>
           <a:prstGeom xmlns:a="http://schemas.openxmlformats.org/drawingml/2006/main" prst="rect">
@@ -8875,7 +8875,7 @@
         </p:nvSpPr>
         <p:spPr>
           <a:xfrm xmlns:a="http://schemas.openxmlformats.org/drawingml/2006/main">
-            <a:off x="2251901" y="4131686"/>
+            <a:off x="2251901" y="4491686"/>
             <a:ext cx="17145" cy="17145"/>
           </a:xfrm>
           <a:prstGeom xmlns:a="http://schemas.openxmlformats.org/drawingml/2006/main" prst="rect">
@@ -8905,7 +8905,7 @@
         </p:nvSpPr>
         <p:spPr>
           <a:xfrm xmlns:a="http://schemas.openxmlformats.org/drawingml/2006/main">
-            <a:off x="2270760" y="4132147"/>
+            <a:off x="2270760" y="4492147"/>
             <a:ext cx="17145" cy="17145"/>
           </a:xfrm>
           <a:prstGeom xmlns:a="http://schemas.openxmlformats.org/drawingml/2006/main" prst="rect">
@@ -8935,7 +8935,7 @@
         </p:nvSpPr>
         <p:spPr>
           <a:xfrm xmlns:a="http://schemas.openxmlformats.org/drawingml/2006/main">
-            <a:off x="2289620" y="4132607"/>
+            <a:off x="2289620" y="4492607"/>
             <a:ext cx="17145" cy="17145"/>
           </a:xfrm>
           <a:prstGeom xmlns:a="http://schemas.openxmlformats.org/drawingml/2006/main" prst="rect">
@@ -8965,7 +8965,7 @@
         </p:nvSpPr>
         <p:spPr>
           <a:xfrm xmlns:a="http://schemas.openxmlformats.org/drawingml/2006/main">
-            <a:off x="2308479" y="4133068"/>
+            <a:off x="2308479" y="4493068"/>
             <a:ext cx="17145" cy="17145"/>
           </a:xfrm>
           <a:prstGeom xmlns:a="http://schemas.openxmlformats.org/drawingml/2006/main" prst="rect">
@@ -8995,7 +8995,7 @@
         </p:nvSpPr>
         <p:spPr>
           <a:xfrm xmlns:a="http://schemas.openxmlformats.org/drawingml/2006/main">
-            <a:off x="2327339" y="4133528"/>
+            <a:off x="2327339" y="4493528"/>
             <a:ext cx="17145" cy="17145"/>
           </a:xfrm>
           <a:prstGeom xmlns:a="http://schemas.openxmlformats.org/drawingml/2006/main" prst="rect">
@@ -9025,7 +9025,7 @@
         </p:nvSpPr>
         <p:spPr>
           <a:xfrm xmlns:a="http://schemas.openxmlformats.org/drawingml/2006/main">
-            <a:off x="2346198" y="4133989"/>
+            <a:off x="2346198" y="4493989"/>
             <a:ext cx="17145" cy="17145"/>
           </a:xfrm>
           <a:prstGeom xmlns:a="http://schemas.openxmlformats.org/drawingml/2006/main" prst="rect">
@@ -9055,7 +9055,7 @@
         </p:nvSpPr>
         <p:spPr>
           <a:xfrm xmlns:a="http://schemas.openxmlformats.org/drawingml/2006/main">
-            <a:off x="2365058" y="4134449"/>
+            <a:off x="2365058" y="4494449"/>
             <a:ext cx="17145" cy="17145"/>
           </a:xfrm>
           <a:prstGeom xmlns:a="http://schemas.openxmlformats.org/drawingml/2006/main" prst="rect">
@@ -9085,7 +9085,7 @@
         </p:nvSpPr>
         <p:spPr>
           <a:xfrm xmlns:a="http://schemas.openxmlformats.org/drawingml/2006/main">
-            <a:off x="2383917" y="4134910"/>
+            <a:off x="2383917" y="4494910"/>
             <a:ext cx="17145" cy="17145"/>
           </a:xfrm>
           <a:prstGeom xmlns:a="http://schemas.openxmlformats.org/drawingml/2006/main" prst="rect">
@@ -9115,7 +9115,7 @@
         </p:nvSpPr>
         <p:spPr>
           <a:xfrm xmlns:a="http://schemas.openxmlformats.org/drawingml/2006/main">
-            <a:off x="2402777" y="4135370"/>
+            <a:off x="2402777" y="4495370"/>
             <a:ext cx="17145" cy="17145"/>
           </a:xfrm>
           <a:prstGeom xmlns:a="http://schemas.openxmlformats.org/drawingml/2006/main" prst="rect">
@@ -9145,7 +9145,7 @@
         </p:nvSpPr>
         <p:spPr>
           <a:xfrm xmlns:a="http://schemas.openxmlformats.org/drawingml/2006/main">
-            <a:off x="2421636" y="4135831"/>
+            <a:off x="2421636" y="4495831"/>
             <a:ext cx="17145" cy="17145"/>
           </a:xfrm>
           <a:prstGeom xmlns:a="http://schemas.openxmlformats.org/drawingml/2006/main" prst="rect">
@@ -9175,7 +9175,7 @@
         </p:nvSpPr>
         <p:spPr>
           <a:xfrm xmlns:a="http://schemas.openxmlformats.org/drawingml/2006/main">
-            <a:off x="2440496" y="4136292"/>
+            <a:off x="2440496" y="4496292"/>
             <a:ext cx="17145" cy="17145"/>
           </a:xfrm>
           <a:prstGeom xmlns:a="http://schemas.openxmlformats.org/drawingml/2006/main" prst="rect">
@@ -9205,7 +9205,7 @@
         </p:nvSpPr>
         <p:spPr>
           <a:xfrm xmlns:a="http://schemas.openxmlformats.org/drawingml/2006/main">
-            <a:off x="2459355" y="4136752"/>
+            <a:off x="2459355" y="4496752"/>
             <a:ext cx="17145" cy="17145"/>
           </a:xfrm>
           <a:prstGeom xmlns:a="http://schemas.openxmlformats.org/drawingml/2006/main" prst="rect">
@@ -9235,7 +9235,7 @@
         </p:nvSpPr>
         <p:spPr>
           <a:xfrm xmlns:a="http://schemas.openxmlformats.org/drawingml/2006/main">
-            <a:off x="2478215" y="4137213"/>
+            <a:off x="2478215" y="4497213"/>
             <a:ext cx="17145" cy="17145"/>
           </a:xfrm>
           <a:prstGeom xmlns:a="http://schemas.openxmlformats.org/drawingml/2006/main" prst="rect">
@@ -9265,7 +9265,7 @@
         </p:nvSpPr>
         <p:spPr>
           <a:xfrm xmlns:a="http://schemas.openxmlformats.org/drawingml/2006/main">
-            <a:off x="2497074" y="4137673"/>
+            <a:off x="2497074" y="4497673"/>
             <a:ext cx="17145" cy="17145"/>
           </a:xfrm>
           <a:prstGeom xmlns:a="http://schemas.openxmlformats.org/drawingml/2006/main" prst="rect">
@@ -9295,7 +9295,7 @@
         </p:nvSpPr>
         <p:spPr>
           <a:xfrm xmlns:a="http://schemas.openxmlformats.org/drawingml/2006/main">
-            <a:off x="2515934" y="4138134"/>
+            <a:off x="2515934" y="4498134"/>
             <a:ext cx="17145" cy="17145"/>
           </a:xfrm>
           <a:prstGeom xmlns:a="http://schemas.openxmlformats.org/drawingml/2006/main" prst="rect">
@@ -9325,7 +9325,7 @@
         </p:nvSpPr>
         <p:spPr>
           <a:xfrm xmlns:a="http://schemas.openxmlformats.org/drawingml/2006/main">
-            <a:off x="2534793" y="4138594"/>
+            <a:off x="2534793" y="4498594"/>
             <a:ext cx="17145" cy="17145"/>
           </a:xfrm>
           <a:prstGeom xmlns:a="http://schemas.openxmlformats.org/drawingml/2006/main" prst="rect">
@@ -9355,7 +9355,7 @@
         </p:nvSpPr>
         <p:spPr>
           <a:xfrm xmlns:a="http://schemas.openxmlformats.org/drawingml/2006/main">
-            <a:off x="2553653" y="4139055"/>
+            <a:off x="2553653" y="4499055"/>
             <a:ext cx="17145" cy="17145"/>
           </a:xfrm>
           <a:prstGeom xmlns:a="http://schemas.openxmlformats.org/drawingml/2006/main" prst="rect">
@@ -9385,7 +9385,7 @@
         </p:nvSpPr>
         <p:spPr>
           <a:xfrm xmlns:a="http://schemas.openxmlformats.org/drawingml/2006/main">
-            <a:off x="2572512" y="4139516"/>
+            <a:off x="2572512" y="4499516"/>
             <a:ext cx="17145" cy="17145"/>
           </a:xfrm>
           <a:prstGeom xmlns:a="http://schemas.openxmlformats.org/drawingml/2006/main" prst="rect">
@@ -9415,7 +9415,7 @@
         </p:nvSpPr>
         <p:spPr>
           <a:xfrm xmlns:a="http://schemas.openxmlformats.org/drawingml/2006/main">
-            <a:off x="2591372" y="4139976"/>
+            <a:off x="2591372" y="4499976"/>
             <a:ext cx="17145" cy="17145"/>
           </a:xfrm>
           <a:prstGeom xmlns:a="http://schemas.openxmlformats.org/drawingml/2006/main" prst="rect">
@@ -9445,7 +9445,7 @@
         </p:nvSpPr>
         <p:spPr>
           <a:xfrm xmlns:a="http://schemas.openxmlformats.org/drawingml/2006/main">
-            <a:off x="2610231" y="4140437"/>
+            <a:off x="2610231" y="4500437"/>
             <a:ext cx="17145" cy="17145"/>
           </a:xfrm>
           <a:prstGeom xmlns:a="http://schemas.openxmlformats.org/drawingml/2006/main" prst="rect">
@@ -9475,7 +9475,7 @@
         </p:nvSpPr>
         <p:spPr>
           <a:xfrm xmlns:a="http://schemas.openxmlformats.org/drawingml/2006/main">
-            <a:off x="2629091" y="4140897"/>
+            <a:off x="2629091" y="4500897"/>
             <a:ext cx="17145" cy="17145"/>
           </a:xfrm>
           <a:prstGeom xmlns:a="http://schemas.openxmlformats.org/drawingml/2006/main" prst="rect">
@@ -9505,7 +9505,7 @@
         </p:nvSpPr>
         <p:spPr>
           <a:xfrm xmlns:a="http://schemas.openxmlformats.org/drawingml/2006/main">
-            <a:off x="2614613" y="3702920"/>
+            <a:off x="2614613" y="4062920"/>
             <a:ext cx="66675" cy="66675"/>
           </a:xfrm>
           <a:prstGeom xmlns:a="http://schemas.openxmlformats.org/drawingml/2006/main" prst="ellipse">
@@ -9535,7 +9535,7 @@
         </p:nvSpPr>
         <p:spPr>
           <a:xfrm xmlns:a="http://schemas.openxmlformats.org/drawingml/2006/main">
-            <a:off x="2614613" y="4108020"/>
+            <a:off x="2614613" y="4468020"/>
             <a:ext cx="66675" cy="66675"/>
           </a:xfrm>
           <a:prstGeom xmlns:a="http://schemas.openxmlformats.org/drawingml/2006/main" prst="ellipse">
@@ -9565,7 +9565,7 @@
         </p:nvSpPr>
         <p:spPr>
           <a:xfrm xmlns:a="http://schemas.openxmlformats.org/drawingml/2006/main">
-            <a:off x="2647950" y="3736257"/>
+            <a:off x="2647950" y="4096257"/>
             <a:ext cx="17145" cy="17145"/>
           </a:xfrm>
           <a:prstGeom xmlns:a="http://schemas.openxmlformats.org/drawingml/2006/main" prst="rect">
@@ -9595,7 +9595,7 @@
         </p:nvSpPr>
         <p:spPr>
           <a:xfrm xmlns:a="http://schemas.openxmlformats.org/drawingml/2006/main">
-            <a:off x="2666810" y="3736792"/>
+            <a:off x="2666810" y="4096792"/>
             <a:ext cx="17145" cy="17145"/>
           </a:xfrm>
           <a:prstGeom xmlns:a="http://schemas.openxmlformats.org/drawingml/2006/main" prst="rect">
@@ -9625,7 +9625,7 @@
         </p:nvSpPr>
         <p:spPr>
           <a:xfrm xmlns:a="http://schemas.openxmlformats.org/drawingml/2006/main">
-            <a:off x="2685669" y="3737327"/>
+            <a:off x="2685669" y="4097327"/>
             <a:ext cx="17145" cy="17145"/>
           </a:xfrm>
           <a:prstGeom xmlns:a="http://schemas.openxmlformats.org/drawingml/2006/main" prst="rect">
@@ -9655,7 +9655,7 @@
         </p:nvSpPr>
         <p:spPr>
           <a:xfrm xmlns:a="http://schemas.openxmlformats.org/drawingml/2006/main">
-            <a:off x="2704529" y="3737862"/>
+            <a:off x="2704529" y="4097862"/>
             <a:ext cx="17145" cy="17145"/>
           </a:xfrm>
           <a:prstGeom xmlns:a="http://schemas.openxmlformats.org/drawingml/2006/main" prst="rect">
@@ -9685,7 +9685,7 @@
         </p:nvSpPr>
         <p:spPr>
           <a:xfrm xmlns:a="http://schemas.openxmlformats.org/drawingml/2006/main">
-            <a:off x="2723388" y="3738396"/>
+            <a:off x="2723388" y="4098396"/>
             <a:ext cx="17145" cy="17145"/>
           </a:xfrm>
           <a:prstGeom xmlns:a="http://schemas.openxmlformats.org/drawingml/2006/main" prst="rect">
@@ -9715,7 +9715,7 @@
         </p:nvSpPr>
         <p:spPr>
           <a:xfrm xmlns:a="http://schemas.openxmlformats.org/drawingml/2006/main">
-            <a:off x="2742248" y="3738931"/>
+            <a:off x="2742248" y="4098931"/>
             <a:ext cx="17145" cy="17145"/>
           </a:xfrm>
           <a:prstGeom xmlns:a="http://schemas.openxmlformats.org/drawingml/2006/main" prst="rect">
@@ -9745,7 +9745,7 @@
         </p:nvSpPr>
         <p:spPr>
           <a:xfrm xmlns:a="http://schemas.openxmlformats.org/drawingml/2006/main">
-            <a:off x="2761107" y="3739466"/>
+            <a:off x="2761107" y="4099466"/>
             <a:ext cx="17145" cy="17145"/>
           </a:xfrm>
           <a:prstGeom xmlns:a="http://schemas.openxmlformats.org/drawingml/2006/main" prst="rect">
@@ -9775,7 +9775,7 @@
         </p:nvSpPr>
         <p:spPr>
           <a:xfrm xmlns:a="http://schemas.openxmlformats.org/drawingml/2006/main">
-            <a:off x="2779967" y="3740000"/>
+            <a:off x="2779967" y="4100000"/>
             <a:ext cx="17145" cy="17145"/>
           </a:xfrm>
           <a:prstGeom xmlns:a="http://schemas.openxmlformats.org/drawingml/2006/main" prst="rect">
@@ -9805,7 +9805,7 @@
         </p:nvSpPr>
         <p:spPr>
           <a:xfrm xmlns:a="http://schemas.openxmlformats.org/drawingml/2006/main">
-            <a:off x="2798826" y="3740535"/>
+            <a:off x="2798826" y="4100535"/>
             <a:ext cx="17145" cy="17145"/>
           </a:xfrm>
           <a:prstGeom xmlns:a="http://schemas.openxmlformats.org/drawingml/2006/main" prst="rect">
@@ -9835,7 +9835,7 @@
         </p:nvSpPr>
         <p:spPr>
           <a:xfrm xmlns:a="http://schemas.openxmlformats.org/drawingml/2006/main">
-            <a:off x="2817686" y="3741070"/>
+            <a:off x="2817686" y="4101070"/>
             <a:ext cx="17145" cy="17145"/>
           </a:xfrm>
           <a:prstGeom xmlns:a="http://schemas.openxmlformats.org/drawingml/2006/main" prst="rect">
@@ -9865,7 +9865,7 @@
         </p:nvSpPr>
         <p:spPr>
           <a:xfrm xmlns:a="http://schemas.openxmlformats.org/drawingml/2006/main">
-            <a:off x="2836545" y="3741604"/>
+            <a:off x="2836545" y="4101604"/>
             <a:ext cx="17145" cy="17145"/>
           </a:xfrm>
           <a:prstGeom xmlns:a="http://schemas.openxmlformats.org/drawingml/2006/main" prst="rect">
@@ -9895,7 +9895,7 @@
         </p:nvSpPr>
         <p:spPr>
           <a:xfrm xmlns:a="http://schemas.openxmlformats.org/drawingml/2006/main">
-            <a:off x="2855404" y="3742139"/>
+            <a:off x="2855404" y="4102139"/>
             <a:ext cx="17145" cy="17145"/>
           </a:xfrm>
           <a:prstGeom xmlns:a="http://schemas.openxmlformats.org/drawingml/2006/main" prst="rect">
@@ -9925,7 +9925,7 @@
         </p:nvSpPr>
         <p:spPr>
           <a:xfrm xmlns:a="http://schemas.openxmlformats.org/drawingml/2006/main">
-            <a:off x="2874264" y="3742674"/>
+            <a:off x="2874264" y="4102674"/>
             <a:ext cx="17145" cy="17145"/>
           </a:xfrm>
           <a:prstGeom xmlns:a="http://schemas.openxmlformats.org/drawingml/2006/main" prst="rect">
@@ -9955,7 +9955,7 @@
         </p:nvSpPr>
         <p:spPr>
           <a:xfrm xmlns:a="http://schemas.openxmlformats.org/drawingml/2006/main">
-            <a:off x="2893124" y="3743209"/>
+            <a:off x="2893124" y="4103209"/>
             <a:ext cx="17145" cy="17145"/>
           </a:xfrm>
           <a:prstGeom xmlns:a="http://schemas.openxmlformats.org/drawingml/2006/main" prst="rect">
@@ -9985,7 +9985,7 @@
         </p:nvSpPr>
         <p:spPr>
           <a:xfrm xmlns:a="http://schemas.openxmlformats.org/drawingml/2006/main">
-            <a:off x="2911983" y="3743743"/>
+            <a:off x="2911983" y="4103743"/>
             <a:ext cx="17145" cy="17145"/>
           </a:xfrm>
           <a:prstGeom xmlns:a="http://schemas.openxmlformats.org/drawingml/2006/main" prst="rect">
@@ -10015,7 +10015,7 @@
         </p:nvSpPr>
         <p:spPr>
           <a:xfrm xmlns:a="http://schemas.openxmlformats.org/drawingml/2006/main">
-            <a:off x="2930843" y="3744278"/>
+            <a:off x="2930843" y="4104278"/>
             <a:ext cx="17145" cy="17145"/>
           </a:xfrm>
           <a:prstGeom xmlns:a="http://schemas.openxmlformats.org/drawingml/2006/main" prst="rect">
@@ -10045,7 +10045,7 @@
         </p:nvSpPr>
         <p:spPr>
           <a:xfrm xmlns:a="http://schemas.openxmlformats.org/drawingml/2006/main">
-            <a:off x="2949702" y="3744813"/>
+            <a:off x="2949702" y="4104813"/>
             <a:ext cx="17145" cy="17145"/>
           </a:xfrm>
           <a:prstGeom xmlns:a="http://schemas.openxmlformats.org/drawingml/2006/main" prst="rect">
@@ -10075,7 +10075,7 @@
         </p:nvSpPr>
         <p:spPr>
           <a:xfrm xmlns:a="http://schemas.openxmlformats.org/drawingml/2006/main">
-            <a:off x="2968561" y="3745347"/>
+            <a:off x="2968561" y="4105347"/>
             <a:ext cx="17145" cy="17145"/>
           </a:xfrm>
           <a:prstGeom xmlns:a="http://schemas.openxmlformats.org/drawingml/2006/main" prst="rect">
@@ -10105,7 +10105,7 @@
         </p:nvSpPr>
         <p:spPr>
           <a:xfrm xmlns:a="http://schemas.openxmlformats.org/drawingml/2006/main">
-            <a:off x="2987421" y="3745882"/>
+            <a:off x="2987421" y="4105882"/>
             <a:ext cx="17145" cy="17145"/>
           </a:xfrm>
           <a:prstGeom xmlns:a="http://schemas.openxmlformats.org/drawingml/2006/main" prst="rect">
@@ -10135,7 +10135,7 @@
         </p:nvSpPr>
         <p:spPr>
           <a:xfrm xmlns:a="http://schemas.openxmlformats.org/drawingml/2006/main">
-            <a:off x="3006281" y="3746417"/>
+            <a:off x="3006281" y="4106417"/>
             <a:ext cx="17145" cy="17145"/>
           </a:xfrm>
           <a:prstGeom xmlns:a="http://schemas.openxmlformats.org/drawingml/2006/main" prst="rect">
@@ -10165,7 +10165,7 @@
         </p:nvSpPr>
         <p:spPr>
           <a:xfrm xmlns:a="http://schemas.openxmlformats.org/drawingml/2006/main">
-            <a:off x="3025140" y="3746952"/>
+            <a:off x="3025140" y="4106952"/>
             <a:ext cx="17145" cy="17145"/>
           </a:xfrm>
           <a:prstGeom xmlns:a="http://schemas.openxmlformats.org/drawingml/2006/main" prst="rect">
@@ -10195,7 +10195,7 @@
         </p:nvSpPr>
         <p:spPr>
           <a:xfrm xmlns:a="http://schemas.openxmlformats.org/drawingml/2006/main">
-            <a:off x="3044000" y="3747486"/>
+            <a:off x="3044000" y="4107486"/>
             <a:ext cx="17145" cy="17145"/>
           </a:xfrm>
           <a:prstGeom xmlns:a="http://schemas.openxmlformats.org/drawingml/2006/main" prst="rect">
@@ -10225,7 +10225,7 @@
         </p:nvSpPr>
         <p:spPr>
           <a:xfrm xmlns:a="http://schemas.openxmlformats.org/drawingml/2006/main">
-            <a:off x="3062859" y="3748021"/>
+            <a:off x="3062859" y="4108021"/>
             <a:ext cx="17145" cy="17145"/>
           </a:xfrm>
           <a:prstGeom xmlns:a="http://schemas.openxmlformats.org/drawingml/2006/main" prst="rect">
@@ -10255,7 +10255,7 @@
         </p:nvSpPr>
         <p:spPr>
           <a:xfrm xmlns:a="http://schemas.openxmlformats.org/drawingml/2006/main">
-            <a:off x="3081719" y="3748556"/>
+            <a:off x="3081719" y="4108556"/>
             <a:ext cx="17145" cy="17145"/>
           </a:xfrm>
           <a:prstGeom xmlns:a="http://schemas.openxmlformats.org/drawingml/2006/main" prst="rect">
@@ -10285,7 +10285,7 @@
         </p:nvSpPr>
         <p:spPr>
           <a:xfrm xmlns:a="http://schemas.openxmlformats.org/drawingml/2006/main">
-            <a:off x="3100578" y="3749090"/>
+            <a:off x="3100578" y="4109090"/>
             <a:ext cx="17145" cy="17145"/>
           </a:xfrm>
           <a:prstGeom xmlns:a="http://schemas.openxmlformats.org/drawingml/2006/main" prst="rect">
@@ -10315,7 +10315,7 @@
         </p:nvSpPr>
         <p:spPr>
           <a:xfrm xmlns:a="http://schemas.openxmlformats.org/drawingml/2006/main">
-            <a:off x="3119438" y="3749625"/>
+            <a:off x="3119438" y="4109625"/>
             <a:ext cx="17145" cy="17145"/>
           </a:xfrm>
           <a:prstGeom xmlns:a="http://schemas.openxmlformats.org/drawingml/2006/main" prst="rect">
@@ -10345,7 +10345,7 @@
         </p:nvSpPr>
         <p:spPr>
           <a:xfrm xmlns:a="http://schemas.openxmlformats.org/drawingml/2006/main">
-            <a:off x="3138297" y="3750160"/>
+            <a:off x="3138297" y="4110160"/>
             <a:ext cx="17145" cy="17145"/>
           </a:xfrm>
           <a:prstGeom xmlns:a="http://schemas.openxmlformats.org/drawingml/2006/main" prst="rect">
@@ -10375,7 +10375,7 @@
         </p:nvSpPr>
         <p:spPr>
           <a:xfrm xmlns:a="http://schemas.openxmlformats.org/drawingml/2006/main">
-            <a:off x="3157157" y="3750695"/>
+            <a:off x="3157157" y="4110695"/>
             <a:ext cx="17145" cy="17145"/>
           </a:xfrm>
           <a:prstGeom xmlns:a="http://schemas.openxmlformats.org/drawingml/2006/main" prst="rect">
@@ -10405,7 +10405,7 @@
         </p:nvSpPr>
         <p:spPr>
           <a:xfrm xmlns:a="http://schemas.openxmlformats.org/drawingml/2006/main">
-            <a:off x="3176016" y="3751229"/>
+            <a:off x="3176016" y="4111229"/>
             <a:ext cx="17145" cy="17145"/>
           </a:xfrm>
           <a:prstGeom xmlns:a="http://schemas.openxmlformats.org/drawingml/2006/main" prst="rect">
@@ -10435,7 +10435,7 @@
         </p:nvSpPr>
         <p:spPr>
           <a:xfrm xmlns:a="http://schemas.openxmlformats.org/drawingml/2006/main">
-            <a:off x="3194876" y="3751764"/>
+            <a:off x="3194876" y="4111764"/>
             <a:ext cx="17145" cy="17145"/>
           </a:xfrm>
           <a:prstGeom xmlns:a="http://schemas.openxmlformats.org/drawingml/2006/main" prst="rect">
@@ -10465,7 +10465,7 @@
         </p:nvSpPr>
         <p:spPr>
           <a:xfrm xmlns:a="http://schemas.openxmlformats.org/drawingml/2006/main">
-            <a:off x="3213735" y="3752299"/>
+            <a:off x="3213735" y="4112299"/>
             <a:ext cx="17145" cy="17145"/>
           </a:xfrm>
           <a:prstGeom xmlns:a="http://schemas.openxmlformats.org/drawingml/2006/main" prst="rect">
@@ -10495,7 +10495,7 @@
         </p:nvSpPr>
         <p:spPr>
           <a:xfrm xmlns:a="http://schemas.openxmlformats.org/drawingml/2006/main">
-            <a:off x="3232595" y="3752833"/>
+            <a:off x="3232595" y="4112833"/>
             <a:ext cx="17145" cy="17145"/>
           </a:xfrm>
           <a:prstGeom xmlns:a="http://schemas.openxmlformats.org/drawingml/2006/main" prst="rect">
@@ -10525,7 +10525,7 @@
         </p:nvSpPr>
         <p:spPr>
           <a:xfrm xmlns:a="http://schemas.openxmlformats.org/drawingml/2006/main">
-            <a:off x="3251454" y="3753368"/>
+            <a:off x="3251454" y="4113368"/>
             <a:ext cx="17145" cy="17145"/>
           </a:xfrm>
           <a:prstGeom xmlns:a="http://schemas.openxmlformats.org/drawingml/2006/main" prst="rect">
@@ -10555,7 +10555,7 @@
         </p:nvSpPr>
         <p:spPr>
           <a:xfrm xmlns:a="http://schemas.openxmlformats.org/drawingml/2006/main">
-            <a:off x="3270314" y="3753903"/>
+            <a:off x="3270314" y="4113903"/>
             <a:ext cx="17145" cy="17145"/>
           </a:xfrm>
           <a:prstGeom xmlns:a="http://schemas.openxmlformats.org/drawingml/2006/main" prst="rect">
@@ -10585,7 +10585,7 @@
         </p:nvSpPr>
         <p:spPr>
           <a:xfrm xmlns:a="http://schemas.openxmlformats.org/drawingml/2006/main">
-            <a:off x="3289173" y="3754438"/>
+            <a:off x="3289173" y="4114438"/>
             <a:ext cx="17145" cy="17145"/>
           </a:xfrm>
           <a:prstGeom xmlns:a="http://schemas.openxmlformats.org/drawingml/2006/main" prst="rect">
@@ -10615,7 +10615,7 @@
         </p:nvSpPr>
         <p:spPr>
           <a:xfrm xmlns:a="http://schemas.openxmlformats.org/drawingml/2006/main">
-            <a:off x="3308033" y="3754972"/>
+            <a:off x="3308033" y="4114972"/>
             <a:ext cx="17145" cy="17145"/>
           </a:xfrm>
           <a:prstGeom xmlns:a="http://schemas.openxmlformats.org/drawingml/2006/main" prst="rect">
@@ -10645,7 +10645,7 @@
         </p:nvSpPr>
         <p:spPr>
           <a:xfrm xmlns:a="http://schemas.openxmlformats.org/drawingml/2006/main">
-            <a:off x="3326892" y="3755507"/>
+            <a:off x="3326892" y="4115507"/>
             <a:ext cx="17145" cy="17145"/>
           </a:xfrm>
           <a:prstGeom xmlns:a="http://schemas.openxmlformats.org/drawingml/2006/main" prst="rect">
@@ -10675,7 +10675,7 @@
         </p:nvSpPr>
         <p:spPr>
           <a:xfrm xmlns:a="http://schemas.openxmlformats.org/drawingml/2006/main">
-            <a:off x="3345752" y="3756042"/>
+            <a:off x="3345752" y="4116042"/>
             <a:ext cx="17145" cy="17145"/>
           </a:xfrm>
           <a:prstGeom xmlns:a="http://schemas.openxmlformats.org/drawingml/2006/main" prst="rect">
@@ -10705,7 +10705,7 @@
         </p:nvSpPr>
         <p:spPr>
           <a:xfrm xmlns:a="http://schemas.openxmlformats.org/drawingml/2006/main">
-            <a:off x="3364611" y="3756576"/>
+            <a:off x="3364611" y="4116576"/>
             <a:ext cx="17145" cy="17145"/>
           </a:xfrm>
           <a:prstGeom xmlns:a="http://schemas.openxmlformats.org/drawingml/2006/main" prst="rect">
@@ -10735,7 +10735,7 @@
         </p:nvSpPr>
         <p:spPr>
           <a:xfrm xmlns:a="http://schemas.openxmlformats.org/drawingml/2006/main">
-            <a:off x="3383471" y="3757111"/>
+            <a:off x="3383471" y="4117111"/>
             <a:ext cx="17145" cy="17145"/>
           </a:xfrm>
           <a:prstGeom xmlns:a="http://schemas.openxmlformats.org/drawingml/2006/main" prst="rect">
@@ -10765,7 +10765,7 @@
         </p:nvSpPr>
         <p:spPr>
           <a:xfrm xmlns:a="http://schemas.openxmlformats.org/drawingml/2006/main">
-            <a:off x="3402330" y="3757646"/>
+            <a:off x="3402330" y="4117646"/>
             <a:ext cx="17145" cy="17145"/>
           </a:xfrm>
           <a:prstGeom xmlns:a="http://schemas.openxmlformats.org/drawingml/2006/main" prst="rect">
@@ -10795,7 +10795,7 @@
         </p:nvSpPr>
         <p:spPr>
           <a:xfrm xmlns:a="http://schemas.openxmlformats.org/drawingml/2006/main">
-            <a:off x="3421190" y="3758180"/>
+            <a:off x="3421190" y="4118180"/>
             <a:ext cx="17145" cy="17145"/>
           </a:xfrm>
           <a:prstGeom xmlns:a="http://schemas.openxmlformats.org/drawingml/2006/main" prst="rect">
@@ -10825,7 +10825,7 @@
         </p:nvSpPr>
         <p:spPr>
           <a:xfrm xmlns:a="http://schemas.openxmlformats.org/drawingml/2006/main">
-            <a:off x="3440049" y="3758715"/>
+            <a:off x="3440049" y="4118715"/>
             <a:ext cx="17145" cy="17145"/>
           </a:xfrm>
           <a:prstGeom xmlns:a="http://schemas.openxmlformats.org/drawingml/2006/main" prst="rect">
@@ -10855,7 +10855,7 @@
         </p:nvSpPr>
         <p:spPr>
           <a:xfrm xmlns:a="http://schemas.openxmlformats.org/drawingml/2006/main">
-            <a:off x="3458909" y="3759250"/>
+            <a:off x="3458909" y="4119250"/>
             <a:ext cx="17145" cy="17145"/>
           </a:xfrm>
           <a:prstGeom xmlns:a="http://schemas.openxmlformats.org/drawingml/2006/main" prst="rect">
@@ -10885,7 +10885,7 @@
         </p:nvSpPr>
         <p:spPr>
           <a:xfrm xmlns:a="http://schemas.openxmlformats.org/drawingml/2006/main">
-            <a:off x="3477768" y="3759785"/>
+            <a:off x="3477768" y="4119785"/>
             <a:ext cx="17145" cy="17145"/>
           </a:xfrm>
           <a:prstGeom xmlns:a="http://schemas.openxmlformats.org/drawingml/2006/main" prst="rect">
@@ -10915,7 +10915,7 @@
         </p:nvSpPr>
         <p:spPr>
           <a:xfrm xmlns:a="http://schemas.openxmlformats.org/drawingml/2006/main">
-            <a:off x="3496628" y="3760319"/>
+            <a:off x="3496628" y="4120319"/>
             <a:ext cx="17145" cy="17145"/>
           </a:xfrm>
           <a:prstGeom xmlns:a="http://schemas.openxmlformats.org/drawingml/2006/main" prst="rect">
@@ -10945,7 +10945,7 @@
         </p:nvSpPr>
         <p:spPr>
           <a:xfrm xmlns:a="http://schemas.openxmlformats.org/drawingml/2006/main">
-            <a:off x="3515487" y="3760854"/>
+            <a:off x="3515487" y="4120854"/>
             <a:ext cx="17145" cy="17145"/>
           </a:xfrm>
           <a:prstGeom xmlns:a="http://schemas.openxmlformats.org/drawingml/2006/main" prst="rect">
@@ -10975,7 +10975,7 @@
         </p:nvSpPr>
         <p:spPr>
           <a:xfrm xmlns:a="http://schemas.openxmlformats.org/drawingml/2006/main">
-            <a:off x="3534347" y="3761389"/>
+            <a:off x="3534347" y="4121389"/>
             <a:ext cx="17145" cy="17145"/>
           </a:xfrm>
           <a:prstGeom xmlns:a="http://schemas.openxmlformats.org/drawingml/2006/main" prst="rect">
@@ -11005,7 +11005,7 @@
         </p:nvSpPr>
         <p:spPr>
           <a:xfrm xmlns:a="http://schemas.openxmlformats.org/drawingml/2006/main">
-            <a:off x="3553206" y="3761923"/>
+            <a:off x="3553206" y="4121923"/>
             <a:ext cx="17145" cy="17145"/>
           </a:xfrm>
           <a:prstGeom xmlns:a="http://schemas.openxmlformats.org/drawingml/2006/main" prst="rect">
@@ -11035,7 +11035,7 @@
         </p:nvSpPr>
         <p:spPr>
           <a:xfrm xmlns:a="http://schemas.openxmlformats.org/drawingml/2006/main">
-            <a:off x="3572066" y="3762458"/>
+            <a:off x="3572066" y="4122458"/>
             <a:ext cx="17145" cy="17145"/>
           </a:xfrm>
           <a:prstGeom xmlns:a="http://schemas.openxmlformats.org/drawingml/2006/main" prst="rect">
@@ -11065,7 +11065,7 @@
         </p:nvSpPr>
         <p:spPr>
           <a:xfrm xmlns:a="http://schemas.openxmlformats.org/drawingml/2006/main">
-            <a:off x="2647950" y="4141358"/>
+            <a:off x="2647950" y="4501358"/>
             <a:ext cx="17145" cy="17145"/>
           </a:xfrm>
           <a:prstGeom xmlns:a="http://schemas.openxmlformats.org/drawingml/2006/main" prst="rect">
@@ -11095,7 +11095,7 @@
         </p:nvSpPr>
         <p:spPr>
           <a:xfrm xmlns:a="http://schemas.openxmlformats.org/drawingml/2006/main">
-            <a:off x="2666810" y="4141824"/>
+            <a:off x="2666810" y="4501824"/>
             <a:ext cx="17145" cy="17145"/>
           </a:xfrm>
           <a:prstGeom xmlns:a="http://schemas.openxmlformats.org/drawingml/2006/main" prst="rect">
@@ -11125,7 +11125,7 @@
         </p:nvSpPr>
         <p:spPr>
           <a:xfrm xmlns:a="http://schemas.openxmlformats.org/drawingml/2006/main">
-            <a:off x="2685669" y="4142289"/>
+            <a:off x="2685669" y="4502289"/>
             <a:ext cx="17145" cy="17145"/>
           </a:xfrm>
           <a:prstGeom xmlns:a="http://schemas.openxmlformats.org/drawingml/2006/main" prst="rect">
@@ -11155,7 +11155,7 @@
         </p:nvSpPr>
         <p:spPr>
           <a:xfrm xmlns:a="http://schemas.openxmlformats.org/drawingml/2006/main">
-            <a:off x="2704529" y="4142755"/>
+            <a:off x="2704529" y="4502755"/>
             <a:ext cx="17145" cy="17145"/>
           </a:xfrm>
           <a:prstGeom xmlns:a="http://schemas.openxmlformats.org/drawingml/2006/main" prst="rect">
@@ -11185,7 +11185,7 @@
         </p:nvSpPr>
         <p:spPr>
           <a:xfrm xmlns:a="http://schemas.openxmlformats.org/drawingml/2006/main">
-            <a:off x="2723388" y="4143221"/>
+            <a:off x="2723388" y="4503221"/>
             <a:ext cx="17145" cy="17145"/>
           </a:xfrm>
           <a:prstGeom xmlns:a="http://schemas.openxmlformats.org/drawingml/2006/main" prst="rect">
@@ -11215,7 +11215,7 @@
         </p:nvSpPr>
         <p:spPr>
           <a:xfrm xmlns:a="http://schemas.openxmlformats.org/drawingml/2006/main">
-            <a:off x="2742248" y="4143687"/>
+            <a:off x="2742248" y="4503687"/>
             <a:ext cx="17145" cy="17145"/>
           </a:xfrm>
           <a:prstGeom xmlns:a="http://schemas.openxmlformats.org/drawingml/2006/main" prst="rect">
@@ -11245,7 +11245,7 @@
         </p:nvSpPr>
         <p:spPr>
           <a:xfrm xmlns:a="http://schemas.openxmlformats.org/drawingml/2006/main">
-            <a:off x="2761107" y="4144152"/>
+            <a:off x="2761107" y="4504152"/>
             <a:ext cx="17145" cy="17145"/>
           </a:xfrm>
           <a:prstGeom xmlns:a="http://schemas.openxmlformats.org/drawingml/2006/main" prst="rect">
@@ -11275,7 +11275,7 @@
         </p:nvSpPr>
         <p:spPr>
           <a:xfrm xmlns:a="http://schemas.openxmlformats.org/drawingml/2006/main">
-            <a:off x="2779967" y="4144618"/>
+            <a:off x="2779967" y="4504618"/>
             <a:ext cx="17145" cy="17145"/>
           </a:xfrm>
           <a:prstGeom xmlns:a="http://schemas.openxmlformats.org/drawingml/2006/main" prst="rect">
@@ -11305,7 +11305,7 @@
         </p:nvSpPr>
         <p:spPr>
           <a:xfrm xmlns:a="http://schemas.openxmlformats.org/drawingml/2006/main">
-            <a:off x="2798826" y="4145084"/>
+            <a:off x="2798826" y="4505084"/>
             <a:ext cx="17145" cy="17145"/>
           </a:xfrm>
           <a:prstGeom xmlns:a="http://schemas.openxmlformats.org/drawingml/2006/main" prst="rect">
@@ -11335,7 +11335,7 @@
         </p:nvSpPr>
         <p:spPr>
           <a:xfrm xmlns:a="http://schemas.openxmlformats.org/drawingml/2006/main">
-            <a:off x="2817686" y="4145550"/>
+            <a:off x="2817686" y="4505550"/>
             <a:ext cx="17145" cy="17145"/>
           </a:xfrm>
           <a:prstGeom xmlns:a="http://schemas.openxmlformats.org/drawingml/2006/main" prst="rect">
@@ -11365,7 +11365,7 @@
         </p:nvSpPr>
         <p:spPr>
           <a:xfrm xmlns:a="http://schemas.openxmlformats.org/drawingml/2006/main">
-            <a:off x="2836545" y="4146015"/>
+            <a:off x="2836545" y="4506015"/>
             <a:ext cx="17145" cy="17145"/>
           </a:xfrm>
           <a:prstGeom xmlns:a="http://schemas.openxmlformats.org/drawingml/2006/main" prst="rect">
@@ -11395,7 +11395,7 @@
         </p:nvSpPr>
         <p:spPr>
           <a:xfrm xmlns:a="http://schemas.openxmlformats.org/drawingml/2006/main">
-            <a:off x="2855404" y="4146481"/>
+            <a:off x="2855404" y="4506481"/>
             <a:ext cx="17145" cy="17145"/>
           </a:xfrm>
           <a:prstGeom xmlns:a="http://schemas.openxmlformats.org/drawingml/2006/main" prst="rect">
@@ -11425,7 +11425,7 @@
         </p:nvSpPr>
         <p:spPr>
           <a:xfrm xmlns:a="http://schemas.openxmlformats.org/drawingml/2006/main">
-            <a:off x="2874264" y="4146947"/>
+            <a:off x="2874264" y="4506947"/>
             <a:ext cx="17145" cy="17145"/>
           </a:xfrm>
           <a:prstGeom xmlns:a="http://schemas.openxmlformats.org/drawingml/2006/main" prst="rect">
@@ -11455,7 +11455,7 @@
         </p:nvSpPr>
         <p:spPr>
           <a:xfrm xmlns:a="http://schemas.openxmlformats.org/drawingml/2006/main">
-            <a:off x="2893124" y="4147413"/>
+            <a:off x="2893124" y="4507413"/>
             <a:ext cx="17145" cy="17145"/>
           </a:xfrm>
           <a:prstGeom xmlns:a="http://schemas.openxmlformats.org/drawingml/2006/main" prst="rect">
@@ -11485,7 +11485,7 @@
         </p:nvSpPr>
         <p:spPr>
           <a:xfrm xmlns:a="http://schemas.openxmlformats.org/drawingml/2006/main">
-            <a:off x="2911983" y="4147878"/>
+            <a:off x="2911983" y="4507878"/>
             <a:ext cx="17145" cy="17145"/>
           </a:xfrm>
           <a:prstGeom xmlns:a="http://schemas.openxmlformats.org/drawingml/2006/main" prst="rect">
@@ -11515,7 +11515,7 @@
         </p:nvSpPr>
         <p:spPr>
           <a:xfrm xmlns:a="http://schemas.openxmlformats.org/drawingml/2006/main">
-            <a:off x="2930843" y="4148344"/>
+            <a:off x="2930843" y="4508344"/>
             <a:ext cx="17145" cy="17145"/>
           </a:xfrm>
           <a:prstGeom xmlns:a="http://schemas.openxmlformats.org/drawingml/2006/main" prst="rect">
@@ -11545,7 +11545,7 @@
         </p:nvSpPr>
         <p:spPr>
           <a:xfrm xmlns:a="http://schemas.openxmlformats.org/drawingml/2006/main">
-            <a:off x="2949702" y="4148810"/>
+            <a:off x="2949702" y="4508810"/>
             <a:ext cx="17145" cy="17145"/>
           </a:xfrm>
           <a:prstGeom xmlns:a="http://schemas.openxmlformats.org/drawingml/2006/main" prst="rect">
@@ -11575,7 +11575,7 @@
         </p:nvSpPr>
         <p:spPr>
           <a:xfrm xmlns:a="http://schemas.openxmlformats.org/drawingml/2006/main">
-            <a:off x="2968561" y="4149276"/>
+            <a:off x="2968561" y="4509276"/>
             <a:ext cx="17145" cy="17145"/>
           </a:xfrm>
           <a:prstGeom xmlns:a="http://schemas.openxmlformats.org/drawingml/2006/main" prst="rect">
@@ -11605,7 +11605,7 @@
         </p:nvSpPr>
         <p:spPr>
           <a:xfrm xmlns:a="http://schemas.openxmlformats.org/drawingml/2006/main">
-            <a:off x="2987421" y="4149742"/>
+            <a:off x="2987421" y="4509742"/>
             <a:ext cx="17145" cy="17145"/>
           </a:xfrm>
           <a:prstGeom xmlns:a="http://schemas.openxmlformats.org/drawingml/2006/main" prst="rect">
@@ -11635,7 +11635,7 @@
         </p:nvSpPr>
         <p:spPr>
           <a:xfrm xmlns:a="http://schemas.openxmlformats.org/drawingml/2006/main">
-            <a:off x="3006281" y="4150207"/>
+            <a:off x="3006281" y="4510207"/>
             <a:ext cx="17145" cy="17145"/>
           </a:xfrm>
           <a:prstGeom xmlns:a="http://schemas.openxmlformats.org/drawingml/2006/main" prst="rect">
@@ -11665,7 +11665,7 @@
         </p:nvSpPr>
         <p:spPr>
           <a:xfrm xmlns:a="http://schemas.openxmlformats.org/drawingml/2006/main">
-            <a:off x="3025140" y="4150673"/>
+            <a:off x="3025140" y="4510673"/>
             <a:ext cx="17145" cy="17145"/>
           </a:xfrm>
           <a:prstGeom xmlns:a="http://schemas.openxmlformats.org/drawingml/2006/main" prst="rect">
@@ -11695,7 +11695,7 @@
         </p:nvSpPr>
         <p:spPr>
           <a:xfrm xmlns:a="http://schemas.openxmlformats.org/drawingml/2006/main">
-            <a:off x="3044000" y="4151139"/>
+            <a:off x="3044000" y="4511139"/>
             <a:ext cx="17145" cy="17145"/>
           </a:xfrm>
           <a:prstGeom xmlns:a="http://schemas.openxmlformats.org/drawingml/2006/main" prst="rect">
@@ -11725,7 +11725,7 @@
         </p:nvSpPr>
         <p:spPr>
           <a:xfrm xmlns:a="http://schemas.openxmlformats.org/drawingml/2006/main">
-            <a:off x="3062859" y="4151605"/>
+            <a:off x="3062859" y="4511605"/>
             <a:ext cx="17145" cy="17145"/>
           </a:xfrm>
           <a:prstGeom xmlns:a="http://schemas.openxmlformats.org/drawingml/2006/main" prst="rect">
@@ -11755,7 +11755,7 @@
         </p:nvSpPr>
         <p:spPr>
           <a:xfrm xmlns:a="http://schemas.openxmlformats.org/drawingml/2006/main">
-            <a:off x="3081719" y="4152070"/>
+            <a:off x="3081719" y="4512070"/>
             <a:ext cx="17145" cy="17145"/>
           </a:xfrm>
           <a:prstGeom xmlns:a="http://schemas.openxmlformats.org/drawingml/2006/main" prst="rect">
@@ -11785,7 +11785,7 @@
         </p:nvSpPr>
         <p:spPr>
           <a:xfrm xmlns:a="http://schemas.openxmlformats.org/drawingml/2006/main">
-            <a:off x="3100578" y="4152536"/>
+            <a:off x="3100578" y="4512536"/>
             <a:ext cx="17145" cy="17145"/>
           </a:xfrm>
           <a:prstGeom xmlns:a="http://schemas.openxmlformats.org/drawingml/2006/main" prst="rect">
@@ -11815,7 +11815,7 @@
         </p:nvSpPr>
         <p:spPr>
           <a:xfrm xmlns:a="http://schemas.openxmlformats.org/drawingml/2006/main">
-            <a:off x="3119438" y="4153002"/>
+            <a:off x="3119438" y="4513002"/>
             <a:ext cx="17145" cy="17145"/>
           </a:xfrm>
           <a:prstGeom xmlns:a="http://schemas.openxmlformats.org/drawingml/2006/main" prst="rect">
@@ -11845,7 +11845,7 @@
         </p:nvSpPr>
         <p:spPr>
           <a:xfrm xmlns:a="http://schemas.openxmlformats.org/drawingml/2006/main">
-            <a:off x="3138297" y="4153468"/>
+            <a:off x="3138297" y="4513468"/>
             <a:ext cx="17145" cy="17145"/>
           </a:xfrm>
           <a:prstGeom xmlns:a="http://schemas.openxmlformats.org/drawingml/2006/main" prst="rect">
@@ -11875,7 +11875,7 @@
         </p:nvSpPr>
         <p:spPr>
           <a:xfrm xmlns:a="http://schemas.openxmlformats.org/drawingml/2006/main">
-            <a:off x="3157157" y="4153933"/>
+            <a:off x="3157157" y="4513933"/>
             <a:ext cx="17145" cy="17145"/>
           </a:xfrm>
           <a:prstGeom xmlns:a="http://schemas.openxmlformats.org/drawingml/2006/main" prst="rect">
@@ -11905,7 +11905,7 @@
         </p:nvSpPr>
         <p:spPr>
           <a:xfrm xmlns:a="http://schemas.openxmlformats.org/drawingml/2006/main">
-            <a:off x="3176016" y="4154399"/>
+            <a:off x="3176016" y="4514399"/>
             <a:ext cx="17145" cy="17145"/>
           </a:xfrm>
           <a:prstGeom xmlns:a="http://schemas.openxmlformats.org/drawingml/2006/main" prst="rect">
@@ -11935,7 +11935,7 @@
         </p:nvSpPr>
         <p:spPr>
           <a:xfrm xmlns:a="http://schemas.openxmlformats.org/drawingml/2006/main">
-            <a:off x="3194876" y="4154865"/>
+            <a:off x="3194876" y="4514865"/>
             <a:ext cx="17145" cy="17145"/>
           </a:xfrm>
           <a:prstGeom xmlns:a="http://schemas.openxmlformats.org/drawingml/2006/main" prst="rect">
@@ -11965,7 +11965,7 @@
         </p:nvSpPr>
         <p:spPr>
           <a:xfrm xmlns:a="http://schemas.openxmlformats.org/drawingml/2006/main">
-            <a:off x="3213735" y="4155331"/>
+            <a:off x="3213735" y="4515331"/>
             <a:ext cx="17145" cy="17145"/>
           </a:xfrm>
           <a:prstGeom xmlns:a="http://schemas.openxmlformats.org/drawingml/2006/main" prst="rect">
@@ -11995,7 +11995,7 @@
         </p:nvSpPr>
         <p:spPr>
           <a:xfrm xmlns:a="http://schemas.openxmlformats.org/drawingml/2006/main">
-            <a:off x="3232595" y="4155796"/>
+            <a:off x="3232595" y="4515796"/>
             <a:ext cx="17145" cy="17145"/>
           </a:xfrm>
           <a:prstGeom xmlns:a="http://schemas.openxmlformats.org/drawingml/2006/main" prst="rect">
@@ -12025,7 +12025,7 @@
         </p:nvSpPr>
         <p:spPr>
           <a:xfrm xmlns:a="http://schemas.openxmlformats.org/drawingml/2006/main">
-            <a:off x="3251454" y="4156262"/>
+            <a:off x="3251454" y="4516262"/>
             <a:ext cx="17145" cy="17145"/>
           </a:xfrm>
           <a:prstGeom xmlns:a="http://schemas.openxmlformats.org/drawingml/2006/main" prst="rect">
@@ -12055,7 +12055,7 @@
         </p:nvSpPr>
         <p:spPr>
           <a:xfrm xmlns:a="http://schemas.openxmlformats.org/drawingml/2006/main">
-            <a:off x="3270314" y="4156728"/>
+            <a:off x="3270314" y="4516728"/>
             <a:ext cx="17145" cy="17145"/>
           </a:xfrm>
           <a:prstGeom xmlns:a="http://schemas.openxmlformats.org/drawingml/2006/main" prst="rect">
@@ -12085,7 +12085,7 @@
         </p:nvSpPr>
         <p:spPr>
           <a:xfrm xmlns:a="http://schemas.openxmlformats.org/drawingml/2006/main">
-            <a:off x="3289173" y="4157194"/>
+            <a:off x="3289173" y="4517194"/>
             <a:ext cx="17145" cy="17145"/>
           </a:xfrm>
           <a:prstGeom xmlns:a="http://schemas.openxmlformats.org/drawingml/2006/main" prst="rect">
@@ -12115,7 +12115,7 @@
         </p:nvSpPr>
         <p:spPr>
           <a:xfrm xmlns:a="http://schemas.openxmlformats.org/drawingml/2006/main">
-            <a:off x="3308033" y="4157659"/>
+            <a:off x="3308033" y="4517659"/>
             <a:ext cx="17145" cy="17145"/>
           </a:xfrm>
           <a:prstGeom xmlns:a="http://schemas.openxmlformats.org/drawingml/2006/main" prst="rect">
@@ -12145,7 +12145,7 @@
         </p:nvSpPr>
         <p:spPr>
           <a:xfrm xmlns:a="http://schemas.openxmlformats.org/drawingml/2006/main">
-            <a:off x="3326892" y="4158125"/>
+            <a:off x="3326892" y="4518125"/>
             <a:ext cx="17145" cy="17145"/>
           </a:xfrm>
           <a:prstGeom xmlns:a="http://schemas.openxmlformats.org/drawingml/2006/main" prst="rect">
@@ -12175,7 +12175,7 @@
         </p:nvSpPr>
         <p:spPr>
           <a:xfrm xmlns:a="http://schemas.openxmlformats.org/drawingml/2006/main">
-            <a:off x="3345752" y="4158591"/>
+            <a:off x="3345752" y="4518591"/>
             <a:ext cx="17145" cy="17145"/>
           </a:xfrm>
           <a:prstGeom xmlns:a="http://schemas.openxmlformats.org/drawingml/2006/main" prst="rect">
@@ -12205,7 +12205,7 @@
         </p:nvSpPr>
         <p:spPr>
           <a:xfrm xmlns:a="http://schemas.openxmlformats.org/drawingml/2006/main">
-            <a:off x="3364611" y="4159057"/>
+            <a:off x="3364611" y="4519057"/>
             <a:ext cx="17145" cy="17145"/>
           </a:xfrm>
           <a:prstGeom xmlns:a="http://schemas.openxmlformats.org/drawingml/2006/main" prst="rect">
@@ -12235,7 +12235,7 @@
         </p:nvSpPr>
         <p:spPr>
           <a:xfrm xmlns:a="http://schemas.openxmlformats.org/drawingml/2006/main">
-            <a:off x="3383471" y="4159523"/>
+            <a:off x="3383471" y="4519523"/>
             <a:ext cx="17145" cy="17145"/>
           </a:xfrm>
           <a:prstGeom xmlns:a="http://schemas.openxmlformats.org/drawingml/2006/main" prst="rect">
@@ -12265,7 +12265,7 @@
         </p:nvSpPr>
         <p:spPr>
           <a:xfrm xmlns:a="http://schemas.openxmlformats.org/drawingml/2006/main">
-            <a:off x="3402330" y="4159988"/>
+            <a:off x="3402330" y="4519988"/>
             <a:ext cx="17145" cy="17145"/>
           </a:xfrm>
           <a:prstGeom xmlns:a="http://schemas.openxmlformats.org/drawingml/2006/main" prst="rect">
@@ -12295,7 +12295,7 @@
         </p:nvSpPr>
         <p:spPr>
           <a:xfrm xmlns:a="http://schemas.openxmlformats.org/drawingml/2006/main">
-            <a:off x="3421190" y="4160454"/>
+            <a:off x="3421190" y="4520454"/>
             <a:ext cx="17145" cy="17145"/>
           </a:xfrm>
           <a:prstGeom xmlns:a="http://schemas.openxmlformats.org/drawingml/2006/main" prst="rect">
@@ -12325,7 +12325,7 @@
         </p:nvSpPr>
         <p:spPr>
           <a:xfrm xmlns:a="http://schemas.openxmlformats.org/drawingml/2006/main">
-            <a:off x="3440049" y="4160920"/>
+            <a:off x="3440049" y="4520920"/>
             <a:ext cx="17145" cy="17145"/>
           </a:xfrm>
           <a:prstGeom xmlns:a="http://schemas.openxmlformats.org/drawingml/2006/main" prst="rect">
@@ -12355,7 +12355,7 @@
         </p:nvSpPr>
         <p:spPr>
           <a:xfrm xmlns:a="http://schemas.openxmlformats.org/drawingml/2006/main">
-            <a:off x="3458909" y="4161386"/>
+            <a:off x="3458909" y="4521386"/>
             <a:ext cx="17145" cy="17145"/>
           </a:xfrm>
           <a:prstGeom xmlns:a="http://schemas.openxmlformats.org/drawingml/2006/main" prst="rect">
@@ -12385,7 +12385,7 @@
         </p:nvSpPr>
         <p:spPr>
           <a:xfrm xmlns:a="http://schemas.openxmlformats.org/drawingml/2006/main">
-            <a:off x="3477768" y="4161851"/>
+            <a:off x="3477768" y="4521851"/>
             <a:ext cx="17145" cy="17145"/>
           </a:xfrm>
           <a:prstGeom xmlns:a="http://schemas.openxmlformats.org/drawingml/2006/main" prst="rect">
@@ -12415,7 +12415,7 @@
         </p:nvSpPr>
         <p:spPr>
           <a:xfrm xmlns:a="http://schemas.openxmlformats.org/drawingml/2006/main">
-            <a:off x="3496628" y="4162317"/>
+            <a:off x="3496628" y="4522317"/>
             <a:ext cx="17145" cy="17145"/>
           </a:xfrm>
           <a:prstGeom xmlns:a="http://schemas.openxmlformats.org/drawingml/2006/main" prst="rect">
@@ -12445,7 +12445,7 @@
         </p:nvSpPr>
         <p:spPr>
           <a:xfrm xmlns:a="http://schemas.openxmlformats.org/drawingml/2006/main">
-            <a:off x="3515487" y="4162783"/>
+            <a:off x="3515487" y="4522783"/>
             <a:ext cx="17145" cy="17145"/>
           </a:xfrm>
           <a:prstGeom xmlns:a="http://schemas.openxmlformats.org/drawingml/2006/main" prst="rect">
@@ -12475,7 +12475,7 @@
         </p:nvSpPr>
         <p:spPr>
           <a:xfrm xmlns:a="http://schemas.openxmlformats.org/drawingml/2006/main">
-            <a:off x="3534347" y="4163249"/>
+            <a:off x="3534347" y="4523249"/>
             <a:ext cx="17145" cy="17145"/>
           </a:xfrm>
           <a:prstGeom xmlns:a="http://schemas.openxmlformats.org/drawingml/2006/main" prst="rect">
@@ -12505,7 +12505,7 @@
         </p:nvSpPr>
         <p:spPr>
           <a:xfrm xmlns:a="http://schemas.openxmlformats.org/drawingml/2006/main">
-            <a:off x="3553206" y="4163714"/>
+            <a:off x="3553206" y="4523714"/>
             <a:ext cx="17145" cy="17145"/>
           </a:xfrm>
           <a:prstGeom xmlns:a="http://schemas.openxmlformats.org/drawingml/2006/main" prst="rect">
@@ -12535,7 +12535,7 @@
         </p:nvSpPr>
         <p:spPr>
           <a:xfrm xmlns:a="http://schemas.openxmlformats.org/drawingml/2006/main">
-            <a:off x="3572066" y="4164180"/>
+            <a:off x="3572066" y="4524180"/>
             <a:ext cx="17145" cy="17145"/>
           </a:xfrm>
           <a:prstGeom xmlns:a="http://schemas.openxmlformats.org/drawingml/2006/main" prst="rect">
@@ -12565,7 +12565,7 @@
         </p:nvSpPr>
         <p:spPr>
           <a:xfrm xmlns:a="http://schemas.openxmlformats.org/drawingml/2006/main">
-            <a:off x="3557588" y="3729655"/>
+            <a:off x="3557588" y="4089655"/>
             <a:ext cx="66675" cy="66675"/>
           </a:xfrm>
           <a:prstGeom xmlns:a="http://schemas.openxmlformats.org/drawingml/2006/main" prst="ellipse">
@@ -12595,7 +12595,7 @@
         </p:nvSpPr>
         <p:spPr>
           <a:xfrm xmlns:a="http://schemas.openxmlformats.org/drawingml/2006/main">
-            <a:off x="3557588" y="4131308"/>
+            <a:off x="3557588" y="4491308"/>
             <a:ext cx="66675" cy="66675"/>
           </a:xfrm>
           <a:prstGeom xmlns:a="http://schemas.openxmlformats.org/drawingml/2006/main" prst="ellipse">
@@ -12625,7 +12625,7 @@
         </p:nvSpPr>
         <p:spPr>
           <a:xfrm xmlns:a="http://schemas.openxmlformats.org/drawingml/2006/main">
-            <a:off x="3590925" y="3762993"/>
+            <a:off x="3590925" y="4122993"/>
             <a:ext cx="17145" cy="17145"/>
           </a:xfrm>
           <a:prstGeom xmlns:a="http://schemas.openxmlformats.org/drawingml/2006/main" prst="rect">
@@ -12655,7 +12655,7 @@
         </p:nvSpPr>
         <p:spPr>
           <a:xfrm xmlns:a="http://schemas.openxmlformats.org/drawingml/2006/main">
-            <a:off x="3609785" y="3764529"/>
+            <a:off x="3609785" y="4124529"/>
             <a:ext cx="17145" cy="17145"/>
           </a:xfrm>
           <a:prstGeom xmlns:a="http://schemas.openxmlformats.org/drawingml/2006/main" prst="rect">
@@ -12685,7 +12685,7 @@
         </p:nvSpPr>
         <p:spPr>
           <a:xfrm xmlns:a="http://schemas.openxmlformats.org/drawingml/2006/main">
-            <a:off x="3628644" y="3766065"/>
+            <a:off x="3628644" y="4126065"/>
             <a:ext cx="17145" cy="17145"/>
           </a:xfrm>
           <a:prstGeom xmlns:a="http://schemas.openxmlformats.org/drawingml/2006/main" prst="rect">
@@ -12715,7 +12715,7 @@
         </p:nvSpPr>
         <p:spPr>
           <a:xfrm xmlns:a="http://schemas.openxmlformats.org/drawingml/2006/main">
-            <a:off x="3647504" y="3767600"/>
+            <a:off x="3647504" y="4127600"/>
             <a:ext cx="17145" cy="17145"/>
           </a:xfrm>
           <a:prstGeom xmlns:a="http://schemas.openxmlformats.org/drawingml/2006/main" prst="rect">
@@ -12745,7 +12745,7 @@
         </p:nvSpPr>
         <p:spPr>
           <a:xfrm xmlns:a="http://schemas.openxmlformats.org/drawingml/2006/main">
-            <a:off x="3666363" y="3769136"/>
+            <a:off x="3666363" y="4129136"/>
             <a:ext cx="17145" cy="17145"/>
           </a:xfrm>
           <a:prstGeom xmlns:a="http://schemas.openxmlformats.org/drawingml/2006/main" prst="rect">
@@ -12775,7 +12775,7 @@
         </p:nvSpPr>
         <p:spPr>
           <a:xfrm xmlns:a="http://schemas.openxmlformats.org/drawingml/2006/main">
-            <a:off x="3685223" y="3770672"/>
+            <a:off x="3685223" y="4130672"/>
             <a:ext cx="17145" cy="17145"/>
           </a:xfrm>
           <a:prstGeom xmlns:a="http://schemas.openxmlformats.org/drawingml/2006/main" prst="rect">
@@ -12805,7 +12805,7 @@
         </p:nvSpPr>
         <p:spPr>
           <a:xfrm xmlns:a="http://schemas.openxmlformats.org/drawingml/2006/main">
-            <a:off x="3704082" y="3772208"/>
+            <a:off x="3704082" y="4132208"/>
             <a:ext cx="17145" cy="17145"/>
           </a:xfrm>
           <a:prstGeom xmlns:a="http://schemas.openxmlformats.org/drawingml/2006/main" prst="rect">
@@ -12835,7 +12835,7 @@
         </p:nvSpPr>
         <p:spPr>
           <a:xfrm xmlns:a="http://schemas.openxmlformats.org/drawingml/2006/main">
-            <a:off x="3722942" y="3773744"/>
+            <a:off x="3722942" y="4133744"/>
             <a:ext cx="17145" cy="17145"/>
           </a:xfrm>
           <a:prstGeom xmlns:a="http://schemas.openxmlformats.org/drawingml/2006/main" prst="rect">
@@ -12865,7 +12865,7 @@
         </p:nvSpPr>
         <p:spPr>
           <a:xfrm xmlns:a="http://schemas.openxmlformats.org/drawingml/2006/main">
-            <a:off x="3741801" y="3775280"/>
+            <a:off x="3741801" y="4135280"/>
             <a:ext cx="17145" cy="17145"/>
           </a:xfrm>
           <a:prstGeom xmlns:a="http://schemas.openxmlformats.org/drawingml/2006/main" prst="rect">
@@ -12895,7 +12895,7 @@
         </p:nvSpPr>
         <p:spPr>
           <a:xfrm xmlns:a="http://schemas.openxmlformats.org/drawingml/2006/main">
-            <a:off x="3760661" y="3776816"/>
+            <a:off x="3760661" y="4136816"/>
             <a:ext cx="17145" cy="17145"/>
           </a:xfrm>
           <a:prstGeom xmlns:a="http://schemas.openxmlformats.org/drawingml/2006/main" prst="rect">
@@ -12925,7 +12925,7 @@
         </p:nvSpPr>
         <p:spPr>
           <a:xfrm xmlns:a="http://schemas.openxmlformats.org/drawingml/2006/main">
-            <a:off x="3779520" y="3778352"/>
+            <a:off x="3779520" y="4138352"/>
             <a:ext cx="17145" cy="17145"/>
           </a:xfrm>
           <a:prstGeom xmlns:a="http://schemas.openxmlformats.org/drawingml/2006/main" prst="rect">
@@ -12955,7 +12955,7 @@
         </p:nvSpPr>
         <p:spPr>
           <a:xfrm xmlns:a="http://schemas.openxmlformats.org/drawingml/2006/main">
-            <a:off x="3798379" y="3779887"/>
+            <a:off x="3798379" y="4139887"/>
             <a:ext cx="17145" cy="17145"/>
           </a:xfrm>
           <a:prstGeom xmlns:a="http://schemas.openxmlformats.org/drawingml/2006/main" prst="rect">
@@ -12985,7 +12985,7 @@
         </p:nvSpPr>
         <p:spPr>
           <a:xfrm xmlns:a="http://schemas.openxmlformats.org/drawingml/2006/main">
-            <a:off x="3817239" y="3781423"/>
+            <a:off x="3817239" y="4141423"/>
             <a:ext cx="17145" cy="17145"/>
           </a:xfrm>
           <a:prstGeom xmlns:a="http://schemas.openxmlformats.org/drawingml/2006/main" prst="rect">
@@ -13015,7 +13015,7 @@
         </p:nvSpPr>
         <p:spPr>
           <a:xfrm xmlns:a="http://schemas.openxmlformats.org/drawingml/2006/main">
-            <a:off x="3836099" y="3782959"/>
+            <a:off x="3836099" y="4142959"/>
             <a:ext cx="17145" cy="17145"/>
           </a:xfrm>
           <a:prstGeom xmlns:a="http://schemas.openxmlformats.org/drawingml/2006/main" prst="rect">
@@ -13045,7 +13045,7 @@
         </p:nvSpPr>
         <p:spPr>
           <a:xfrm xmlns:a="http://schemas.openxmlformats.org/drawingml/2006/main">
-            <a:off x="3854958" y="3784495"/>
+            <a:off x="3854958" y="4144495"/>
             <a:ext cx="17145" cy="17145"/>
           </a:xfrm>
           <a:prstGeom xmlns:a="http://schemas.openxmlformats.org/drawingml/2006/main" prst="rect">
@@ -13075,7 +13075,7 @@
         </p:nvSpPr>
         <p:spPr>
           <a:xfrm xmlns:a="http://schemas.openxmlformats.org/drawingml/2006/main">
-            <a:off x="3873818" y="3786031"/>
+            <a:off x="3873818" y="4146031"/>
             <a:ext cx="17145" cy="17145"/>
           </a:xfrm>
           <a:prstGeom xmlns:a="http://schemas.openxmlformats.org/drawingml/2006/main" prst="rect">
@@ -13105,7 +13105,7 @@
         </p:nvSpPr>
         <p:spPr>
           <a:xfrm xmlns:a="http://schemas.openxmlformats.org/drawingml/2006/main">
-            <a:off x="3892677" y="3787567"/>
+            <a:off x="3892677" y="4147567"/>
             <a:ext cx="17145" cy="17145"/>
           </a:xfrm>
           <a:prstGeom xmlns:a="http://schemas.openxmlformats.org/drawingml/2006/main" prst="rect">
@@ -13135,7 +13135,7 @@
         </p:nvSpPr>
         <p:spPr>
           <a:xfrm xmlns:a="http://schemas.openxmlformats.org/drawingml/2006/main">
-            <a:off x="3911536" y="3789103"/>
+            <a:off x="3911536" y="4149103"/>
             <a:ext cx="17145" cy="17145"/>
           </a:xfrm>
           <a:prstGeom xmlns:a="http://schemas.openxmlformats.org/drawingml/2006/main" prst="rect">
@@ -13165,7 +13165,7 @@
         </p:nvSpPr>
         <p:spPr>
           <a:xfrm xmlns:a="http://schemas.openxmlformats.org/drawingml/2006/main">
-            <a:off x="3930396" y="3790638"/>
+            <a:off x="3930396" y="4150638"/>
             <a:ext cx="17145" cy="17145"/>
           </a:xfrm>
           <a:prstGeom xmlns:a="http://schemas.openxmlformats.org/drawingml/2006/main" prst="rect">
@@ -13195,7 +13195,7 @@
         </p:nvSpPr>
         <p:spPr>
           <a:xfrm xmlns:a="http://schemas.openxmlformats.org/drawingml/2006/main">
-            <a:off x="3949256" y="3792174"/>
+            <a:off x="3949256" y="4152174"/>
             <a:ext cx="17145" cy="17145"/>
           </a:xfrm>
           <a:prstGeom xmlns:a="http://schemas.openxmlformats.org/drawingml/2006/main" prst="rect">
@@ -13225,7 +13225,7 @@
         </p:nvSpPr>
         <p:spPr>
           <a:xfrm xmlns:a="http://schemas.openxmlformats.org/drawingml/2006/main">
-            <a:off x="3968115" y="3793710"/>
+            <a:off x="3968115" y="4153710"/>
             <a:ext cx="17145" cy="17145"/>
           </a:xfrm>
           <a:prstGeom xmlns:a="http://schemas.openxmlformats.org/drawingml/2006/main" prst="rect">
@@ -13255,7 +13255,7 @@
         </p:nvSpPr>
         <p:spPr>
           <a:xfrm xmlns:a="http://schemas.openxmlformats.org/drawingml/2006/main">
-            <a:off x="3986975" y="3795246"/>
+            <a:off x="3986975" y="4155246"/>
             <a:ext cx="17145" cy="17145"/>
           </a:xfrm>
           <a:prstGeom xmlns:a="http://schemas.openxmlformats.org/drawingml/2006/main" prst="rect">
@@ -13285,7 +13285,7 @@
         </p:nvSpPr>
         <p:spPr>
           <a:xfrm xmlns:a="http://schemas.openxmlformats.org/drawingml/2006/main">
-            <a:off x="4005834" y="3796782"/>
+            <a:off x="4005834" y="4156782"/>
             <a:ext cx="17145" cy="17145"/>
           </a:xfrm>
           <a:prstGeom xmlns:a="http://schemas.openxmlformats.org/drawingml/2006/main" prst="rect">
@@ -13315,7 +13315,7 @@
         </p:nvSpPr>
         <p:spPr>
           <a:xfrm xmlns:a="http://schemas.openxmlformats.org/drawingml/2006/main">
-            <a:off x="4024694" y="3798318"/>
+            <a:off x="4024694" y="4158318"/>
             <a:ext cx="17145" cy="17145"/>
           </a:xfrm>
           <a:prstGeom xmlns:a="http://schemas.openxmlformats.org/drawingml/2006/main" prst="rect">
@@ -13345,7 +13345,7 @@
         </p:nvSpPr>
         <p:spPr>
           <a:xfrm xmlns:a="http://schemas.openxmlformats.org/drawingml/2006/main">
-            <a:off x="4043553" y="3799854"/>
+            <a:off x="4043553" y="4159854"/>
             <a:ext cx="17145" cy="17145"/>
           </a:xfrm>
           <a:prstGeom xmlns:a="http://schemas.openxmlformats.org/drawingml/2006/main" prst="rect">
@@ -13375,7 +13375,7 @@
         </p:nvSpPr>
         <p:spPr>
           <a:xfrm xmlns:a="http://schemas.openxmlformats.org/drawingml/2006/main">
-            <a:off x="4062413" y="3801390"/>
+            <a:off x="4062413" y="4161390"/>
             <a:ext cx="17145" cy="17145"/>
           </a:xfrm>
           <a:prstGeom xmlns:a="http://schemas.openxmlformats.org/drawingml/2006/main" prst="rect">
@@ -13405,7 +13405,7 @@
         </p:nvSpPr>
         <p:spPr>
           <a:xfrm xmlns:a="http://schemas.openxmlformats.org/drawingml/2006/main">
-            <a:off x="4081272" y="3802925"/>
+            <a:off x="4081272" y="4162925"/>
             <a:ext cx="17145" cy="17145"/>
           </a:xfrm>
           <a:prstGeom xmlns:a="http://schemas.openxmlformats.org/drawingml/2006/main" prst="rect">
@@ -13435,7 +13435,7 @@
         </p:nvSpPr>
         <p:spPr>
           <a:xfrm xmlns:a="http://schemas.openxmlformats.org/drawingml/2006/main">
-            <a:off x="4100132" y="3804461"/>
+            <a:off x="4100132" y="4164461"/>
             <a:ext cx="17145" cy="17145"/>
           </a:xfrm>
           <a:prstGeom xmlns:a="http://schemas.openxmlformats.org/drawingml/2006/main" prst="rect">
@@ -13465,7 +13465,7 @@
         </p:nvSpPr>
         <p:spPr>
           <a:xfrm xmlns:a="http://schemas.openxmlformats.org/drawingml/2006/main">
-            <a:off x="4118991" y="3805997"/>
+            <a:off x="4118991" y="4165997"/>
             <a:ext cx="17145" cy="17145"/>
           </a:xfrm>
           <a:prstGeom xmlns:a="http://schemas.openxmlformats.org/drawingml/2006/main" prst="rect">
@@ -13495,7 +13495,7 @@
         </p:nvSpPr>
         <p:spPr>
           <a:xfrm xmlns:a="http://schemas.openxmlformats.org/drawingml/2006/main">
-            <a:off x="4137851" y="3807533"/>
+            <a:off x="4137851" y="4167533"/>
             <a:ext cx="17145" cy="17145"/>
           </a:xfrm>
           <a:prstGeom xmlns:a="http://schemas.openxmlformats.org/drawingml/2006/main" prst="rect">
@@ -13525,7 +13525,7 @@
         </p:nvSpPr>
         <p:spPr>
           <a:xfrm xmlns:a="http://schemas.openxmlformats.org/drawingml/2006/main">
-            <a:off x="4156710" y="3809069"/>
+            <a:off x="4156710" y="4169069"/>
             <a:ext cx="17145" cy="17145"/>
           </a:xfrm>
           <a:prstGeom xmlns:a="http://schemas.openxmlformats.org/drawingml/2006/main" prst="rect">
@@ -13555,7 +13555,7 @@
         </p:nvSpPr>
         <p:spPr>
           <a:xfrm xmlns:a="http://schemas.openxmlformats.org/drawingml/2006/main">
-            <a:off x="4175570" y="3810605"/>
+            <a:off x="4175570" y="4170605"/>
             <a:ext cx="17145" cy="17145"/>
           </a:xfrm>
           <a:prstGeom xmlns:a="http://schemas.openxmlformats.org/drawingml/2006/main" prst="rect">
@@ -13585,7 +13585,7 @@
         </p:nvSpPr>
         <p:spPr>
           <a:xfrm xmlns:a="http://schemas.openxmlformats.org/drawingml/2006/main">
-            <a:off x="4194429" y="3812141"/>
+            <a:off x="4194429" y="4172141"/>
             <a:ext cx="17145" cy="17145"/>
           </a:xfrm>
           <a:prstGeom xmlns:a="http://schemas.openxmlformats.org/drawingml/2006/main" prst="rect">
@@ -13615,7 +13615,7 @@
         </p:nvSpPr>
         <p:spPr>
           <a:xfrm xmlns:a="http://schemas.openxmlformats.org/drawingml/2006/main">
-            <a:off x="4213289" y="3813676"/>
+            <a:off x="4213289" y="4173676"/>
             <a:ext cx="17145" cy="17145"/>
           </a:xfrm>
           <a:prstGeom xmlns:a="http://schemas.openxmlformats.org/drawingml/2006/main" prst="rect">
@@ -13645,7 +13645,7 @@
         </p:nvSpPr>
         <p:spPr>
           <a:xfrm xmlns:a="http://schemas.openxmlformats.org/drawingml/2006/main">
-            <a:off x="4232148" y="3815212"/>
+            <a:off x="4232148" y="4175212"/>
             <a:ext cx="17145" cy="17145"/>
           </a:xfrm>
           <a:prstGeom xmlns:a="http://schemas.openxmlformats.org/drawingml/2006/main" prst="rect">
@@ -13675,7 +13675,7 @@
         </p:nvSpPr>
         <p:spPr>
           <a:xfrm xmlns:a="http://schemas.openxmlformats.org/drawingml/2006/main">
-            <a:off x="4251008" y="3816748"/>
+            <a:off x="4251008" y="4176748"/>
             <a:ext cx="17145" cy="17145"/>
           </a:xfrm>
           <a:prstGeom xmlns:a="http://schemas.openxmlformats.org/drawingml/2006/main" prst="rect">
@@ -13705,7 +13705,7 @@
         </p:nvSpPr>
         <p:spPr>
           <a:xfrm xmlns:a="http://schemas.openxmlformats.org/drawingml/2006/main">
-            <a:off x="4269867" y="3818284"/>
+            <a:off x="4269867" y="4178284"/>
             <a:ext cx="17145" cy="17145"/>
           </a:xfrm>
           <a:prstGeom xmlns:a="http://schemas.openxmlformats.org/drawingml/2006/main" prst="rect">
@@ -13735,7 +13735,7 @@
         </p:nvSpPr>
         <p:spPr>
           <a:xfrm xmlns:a="http://schemas.openxmlformats.org/drawingml/2006/main">
-            <a:off x="4288727" y="3819820"/>
+            <a:off x="4288727" y="4179820"/>
             <a:ext cx="17145" cy="17145"/>
           </a:xfrm>
           <a:prstGeom xmlns:a="http://schemas.openxmlformats.org/drawingml/2006/main" prst="rect">
@@ -13765,7 +13765,7 @@
         </p:nvSpPr>
         <p:spPr>
           <a:xfrm xmlns:a="http://schemas.openxmlformats.org/drawingml/2006/main">
-            <a:off x="4307586" y="3821356"/>
+            <a:off x="4307586" y="4181356"/>
             <a:ext cx="17145" cy="17145"/>
           </a:xfrm>
           <a:prstGeom xmlns:a="http://schemas.openxmlformats.org/drawingml/2006/main" prst="rect">
@@ -13795,7 +13795,7 @@
         </p:nvSpPr>
         <p:spPr>
           <a:xfrm xmlns:a="http://schemas.openxmlformats.org/drawingml/2006/main">
-            <a:off x="4326446" y="3822892"/>
+            <a:off x="4326446" y="4182892"/>
             <a:ext cx="17145" cy="17145"/>
           </a:xfrm>
           <a:prstGeom xmlns:a="http://schemas.openxmlformats.org/drawingml/2006/main" prst="rect">
@@ -13825,7 +13825,7 @@
         </p:nvSpPr>
         <p:spPr>
           <a:xfrm xmlns:a="http://schemas.openxmlformats.org/drawingml/2006/main">
-            <a:off x="4345305" y="3824428"/>
+            <a:off x="4345305" y="4184428"/>
             <a:ext cx="17145" cy="17145"/>
           </a:xfrm>
           <a:prstGeom xmlns:a="http://schemas.openxmlformats.org/drawingml/2006/main" prst="rect">
@@ -13855,7 +13855,7 @@
         </p:nvSpPr>
         <p:spPr>
           <a:xfrm xmlns:a="http://schemas.openxmlformats.org/drawingml/2006/main">
-            <a:off x="4364165" y="3825963"/>
+            <a:off x="4364165" y="4185963"/>
             <a:ext cx="17145" cy="17145"/>
           </a:xfrm>
           <a:prstGeom xmlns:a="http://schemas.openxmlformats.org/drawingml/2006/main" prst="rect">
@@ -13885,7 +13885,7 @@
         </p:nvSpPr>
         <p:spPr>
           <a:xfrm xmlns:a="http://schemas.openxmlformats.org/drawingml/2006/main">
-            <a:off x="4383024" y="3827499"/>
+            <a:off x="4383024" y="4187499"/>
             <a:ext cx="17145" cy="17145"/>
           </a:xfrm>
           <a:prstGeom xmlns:a="http://schemas.openxmlformats.org/drawingml/2006/main" prst="rect">
@@ -13915,7 +13915,7 @@
         </p:nvSpPr>
         <p:spPr>
           <a:xfrm xmlns:a="http://schemas.openxmlformats.org/drawingml/2006/main">
-            <a:off x="4401884" y="3829035"/>
+            <a:off x="4401884" y="4189035"/>
             <a:ext cx="17145" cy="17145"/>
           </a:xfrm>
           <a:prstGeom xmlns:a="http://schemas.openxmlformats.org/drawingml/2006/main" prst="rect">
@@ -13945,7 +13945,7 @@
         </p:nvSpPr>
         <p:spPr>
           <a:xfrm xmlns:a="http://schemas.openxmlformats.org/drawingml/2006/main">
-            <a:off x="4420743" y="3830571"/>
+            <a:off x="4420743" y="4190571"/>
             <a:ext cx="17145" cy="17145"/>
           </a:xfrm>
           <a:prstGeom xmlns:a="http://schemas.openxmlformats.org/drawingml/2006/main" prst="rect">
@@ -13975,7 +13975,7 @@
         </p:nvSpPr>
         <p:spPr>
           <a:xfrm xmlns:a="http://schemas.openxmlformats.org/drawingml/2006/main">
-            <a:off x="4439603" y="3832107"/>
+            <a:off x="4439603" y="4192107"/>
             <a:ext cx="17145" cy="17145"/>
           </a:xfrm>
           <a:prstGeom xmlns:a="http://schemas.openxmlformats.org/drawingml/2006/main" prst="rect">
@@ -14005,7 +14005,7 @@
         </p:nvSpPr>
         <p:spPr>
           <a:xfrm xmlns:a="http://schemas.openxmlformats.org/drawingml/2006/main">
-            <a:off x="4458462" y="3833643"/>
+            <a:off x="4458462" y="4193643"/>
             <a:ext cx="17145" cy="17145"/>
           </a:xfrm>
           <a:prstGeom xmlns:a="http://schemas.openxmlformats.org/drawingml/2006/main" prst="rect">
@@ -14035,7 +14035,7 @@
         </p:nvSpPr>
         <p:spPr>
           <a:xfrm xmlns:a="http://schemas.openxmlformats.org/drawingml/2006/main">
-            <a:off x="4477322" y="3835179"/>
+            <a:off x="4477322" y="4195179"/>
             <a:ext cx="17145" cy="17145"/>
           </a:xfrm>
           <a:prstGeom xmlns:a="http://schemas.openxmlformats.org/drawingml/2006/main" prst="rect">
@@ -14065,7 +14065,7 @@
         </p:nvSpPr>
         <p:spPr>
           <a:xfrm xmlns:a="http://schemas.openxmlformats.org/drawingml/2006/main">
-            <a:off x="4496181" y="3836714"/>
+            <a:off x="4496181" y="4196714"/>
             <a:ext cx="17145" cy="17145"/>
           </a:xfrm>
           <a:prstGeom xmlns:a="http://schemas.openxmlformats.org/drawingml/2006/main" prst="rect">
@@ -14095,7 +14095,7 @@
         </p:nvSpPr>
         <p:spPr>
           <a:xfrm xmlns:a="http://schemas.openxmlformats.org/drawingml/2006/main">
-            <a:off x="4515041" y="3838250"/>
+            <a:off x="4515041" y="4198250"/>
             <a:ext cx="17145" cy="17145"/>
           </a:xfrm>
           <a:prstGeom xmlns:a="http://schemas.openxmlformats.org/drawingml/2006/main" prst="rect">
@@ -14125,7 +14125,7 @@
         </p:nvSpPr>
         <p:spPr>
           <a:xfrm xmlns:a="http://schemas.openxmlformats.org/drawingml/2006/main">
-            <a:off x="3590925" y="4164646"/>
+            <a:off x="3590925" y="4524646"/>
             <a:ext cx="17145" cy="17145"/>
           </a:xfrm>
           <a:prstGeom xmlns:a="http://schemas.openxmlformats.org/drawingml/2006/main" prst="rect">
@@ -14155,7 +14155,7 @@
         </p:nvSpPr>
         <p:spPr>
           <a:xfrm xmlns:a="http://schemas.openxmlformats.org/drawingml/2006/main">
-            <a:off x="3609785" y="4166000"/>
+            <a:off x="3609785" y="4526000"/>
             <a:ext cx="17145" cy="17145"/>
           </a:xfrm>
           <a:prstGeom xmlns:a="http://schemas.openxmlformats.org/drawingml/2006/main" prst="rect">
@@ -14185,7 +14185,7 @@
         </p:nvSpPr>
         <p:spPr>
           <a:xfrm xmlns:a="http://schemas.openxmlformats.org/drawingml/2006/main">
-            <a:off x="3628644" y="4167354"/>
+            <a:off x="3628644" y="4527354"/>
             <a:ext cx="17145" cy="17145"/>
           </a:xfrm>
           <a:prstGeom xmlns:a="http://schemas.openxmlformats.org/drawingml/2006/main" prst="rect">
@@ -14215,7 +14215,7 @@
         </p:nvSpPr>
         <p:spPr>
           <a:xfrm xmlns:a="http://schemas.openxmlformats.org/drawingml/2006/main">
-            <a:off x="3647504" y="4168708"/>
+            <a:off x="3647504" y="4528708"/>
             <a:ext cx="17145" cy="17145"/>
           </a:xfrm>
           <a:prstGeom xmlns:a="http://schemas.openxmlformats.org/drawingml/2006/main" prst="rect">
@@ -14245,7 +14245,7 @@
         </p:nvSpPr>
         <p:spPr>
           <a:xfrm xmlns:a="http://schemas.openxmlformats.org/drawingml/2006/main">
-            <a:off x="3666363" y="4170062"/>
+            <a:off x="3666363" y="4530062"/>
             <a:ext cx="17145" cy="17145"/>
           </a:xfrm>
           <a:prstGeom xmlns:a="http://schemas.openxmlformats.org/drawingml/2006/main" prst="rect">
@@ -14275,7 +14275,7 @@
         </p:nvSpPr>
         <p:spPr>
           <a:xfrm xmlns:a="http://schemas.openxmlformats.org/drawingml/2006/main">
-            <a:off x="3685223" y="4171416"/>
+            <a:off x="3685223" y="4531416"/>
             <a:ext cx="17145" cy="17145"/>
           </a:xfrm>
           <a:prstGeom xmlns:a="http://schemas.openxmlformats.org/drawingml/2006/main" prst="rect">
@@ -14305,7 +14305,7 @@
         </p:nvSpPr>
         <p:spPr>
           <a:xfrm xmlns:a="http://schemas.openxmlformats.org/drawingml/2006/main">
-            <a:off x="3704082" y="4172770"/>
+            <a:off x="3704082" y="4532770"/>
             <a:ext cx="17145" cy="17145"/>
           </a:xfrm>
           <a:prstGeom xmlns:a="http://schemas.openxmlformats.org/drawingml/2006/main" prst="rect">
@@ -14335,7 +14335,7 @@
         </p:nvSpPr>
         <p:spPr>
           <a:xfrm xmlns:a="http://schemas.openxmlformats.org/drawingml/2006/main">
-            <a:off x="3722942" y="4174124"/>
+            <a:off x="3722942" y="4534124"/>
             <a:ext cx="17145" cy="17145"/>
           </a:xfrm>
           <a:prstGeom xmlns:a="http://schemas.openxmlformats.org/drawingml/2006/main" prst="rect">
@@ -14365,7 +14365,7 @@
         </p:nvSpPr>
         <p:spPr>
           <a:xfrm xmlns:a="http://schemas.openxmlformats.org/drawingml/2006/main">
-            <a:off x="3741801" y="4175478"/>
+            <a:off x="3741801" y="4535478"/>
             <a:ext cx="17145" cy="17145"/>
           </a:xfrm>
           <a:prstGeom xmlns:a="http://schemas.openxmlformats.org/drawingml/2006/main" prst="rect">
@@ -14395,7 +14395,7 @@
         </p:nvSpPr>
         <p:spPr>
           <a:xfrm xmlns:a="http://schemas.openxmlformats.org/drawingml/2006/main">
-            <a:off x="3760661" y="4176832"/>
+            <a:off x="3760661" y="4536832"/>
             <a:ext cx="17145" cy="17145"/>
           </a:xfrm>
           <a:prstGeom xmlns:a="http://schemas.openxmlformats.org/drawingml/2006/main" prst="rect">
@@ -14425,7 +14425,7 @@
         </p:nvSpPr>
         <p:spPr>
           <a:xfrm xmlns:a="http://schemas.openxmlformats.org/drawingml/2006/main">
-            <a:off x="3779520" y="4178186"/>
+            <a:off x="3779520" y="4538186"/>
             <a:ext cx="17145" cy="17145"/>
           </a:xfrm>
           <a:prstGeom xmlns:a="http://schemas.openxmlformats.org/drawingml/2006/main" prst="rect">
@@ -14455,7 +14455,7 @@
         </p:nvSpPr>
         <p:spPr>
           <a:xfrm xmlns:a="http://schemas.openxmlformats.org/drawingml/2006/main">
-            <a:off x="3798379" y="4179540"/>
+            <a:off x="3798379" y="4539540"/>
             <a:ext cx="17145" cy="17145"/>
           </a:xfrm>
           <a:prstGeom xmlns:a="http://schemas.openxmlformats.org/drawingml/2006/main" prst="rect">
@@ -14485,7 +14485,7 @@
         </p:nvSpPr>
         <p:spPr>
           <a:xfrm xmlns:a="http://schemas.openxmlformats.org/drawingml/2006/main">
-            <a:off x="3817239" y="4180894"/>
+            <a:off x="3817239" y="4540894"/>
             <a:ext cx="17145" cy="17145"/>
           </a:xfrm>
           <a:prstGeom xmlns:a="http://schemas.openxmlformats.org/drawingml/2006/main" prst="rect">
@@ -14515,7 +14515,7 @@
         </p:nvSpPr>
         <p:spPr>
           <a:xfrm xmlns:a="http://schemas.openxmlformats.org/drawingml/2006/main">
-            <a:off x="3836099" y="4182248"/>
+            <a:off x="3836099" y="4542248"/>
             <a:ext cx="17145" cy="17145"/>
           </a:xfrm>
           <a:prstGeom xmlns:a="http://schemas.openxmlformats.org/drawingml/2006/main" prst="rect">
@@ -14545,7 +14545,7 @@
         </p:nvSpPr>
         <p:spPr>
           <a:xfrm xmlns:a="http://schemas.openxmlformats.org/drawingml/2006/main">
-            <a:off x="3854958" y="4183602"/>
+            <a:off x="3854958" y="4543602"/>
             <a:ext cx="17145" cy="17145"/>
           </a:xfrm>
           <a:prstGeom xmlns:a="http://schemas.openxmlformats.org/drawingml/2006/main" prst="rect">
@@ -14575,7 +14575,7 @@
         </p:nvSpPr>
         <p:spPr>
           <a:xfrm xmlns:a="http://schemas.openxmlformats.org/drawingml/2006/main">
-            <a:off x="3873818" y="4184956"/>
+            <a:off x="3873818" y="4544956"/>
             <a:ext cx="17145" cy="17145"/>
           </a:xfrm>
           <a:prstGeom xmlns:a="http://schemas.openxmlformats.org/drawingml/2006/main" prst="rect">
@@ -14605,7 +14605,7 @@
         </p:nvSpPr>
         <p:spPr>
           <a:xfrm xmlns:a="http://schemas.openxmlformats.org/drawingml/2006/main">
-            <a:off x="3892677" y="4186310"/>
+            <a:off x="3892677" y="4546310"/>
             <a:ext cx="17145" cy="17145"/>
           </a:xfrm>
           <a:prstGeom xmlns:a="http://schemas.openxmlformats.org/drawingml/2006/main" prst="rect">
@@ -14635,7 +14635,7 @@
         </p:nvSpPr>
         <p:spPr>
           <a:xfrm xmlns:a="http://schemas.openxmlformats.org/drawingml/2006/main">
-            <a:off x="3911536" y="4187664"/>
+            <a:off x="3911536" y="4547664"/>
             <a:ext cx="17145" cy="17145"/>
           </a:xfrm>
           <a:prstGeom xmlns:a="http://schemas.openxmlformats.org/drawingml/2006/main" prst="rect">
@@ -14665,7 +14665,7 @@
         </p:nvSpPr>
         <p:spPr>
           <a:xfrm xmlns:a="http://schemas.openxmlformats.org/drawingml/2006/main">
-            <a:off x="3930396" y="4189018"/>
+            <a:off x="3930396" y="4549018"/>
             <a:ext cx="17145" cy="17145"/>
           </a:xfrm>
           <a:prstGeom xmlns:a="http://schemas.openxmlformats.org/drawingml/2006/main" prst="rect">
@@ -14695,7 +14695,7 @@
         </p:nvSpPr>
         <p:spPr>
           <a:xfrm xmlns:a="http://schemas.openxmlformats.org/drawingml/2006/main">
-            <a:off x="3949256" y="4190372"/>
+            <a:off x="3949256" y="4550372"/>
             <a:ext cx="17145" cy="17145"/>
           </a:xfrm>
           <a:prstGeom xmlns:a="http://schemas.openxmlformats.org/drawingml/2006/main" prst="rect">
@@ -14725,7 +14725,7 @@
         </p:nvSpPr>
         <p:spPr>
           <a:xfrm xmlns:a="http://schemas.openxmlformats.org/drawingml/2006/main">
-            <a:off x="3968115" y="4191726"/>
+            <a:off x="3968115" y="4551726"/>
             <a:ext cx="17145" cy="17145"/>
           </a:xfrm>
           <a:prstGeom xmlns:a="http://schemas.openxmlformats.org/drawingml/2006/main" prst="rect">
@@ -14755,7 +14755,7 @@
         </p:nvSpPr>
         <p:spPr>
           <a:xfrm xmlns:a="http://schemas.openxmlformats.org/drawingml/2006/main">
-            <a:off x="3986975" y="4193080"/>
+            <a:off x="3986975" y="4553080"/>
             <a:ext cx="17145" cy="17145"/>
           </a:xfrm>
           <a:prstGeom xmlns:a="http://schemas.openxmlformats.org/drawingml/2006/main" prst="rect">
@@ -14785,7 +14785,7 @@
         </p:nvSpPr>
         <p:spPr>
           <a:xfrm xmlns:a="http://schemas.openxmlformats.org/drawingml/2006/main">
-            <a:off x="4005834" y="4194434"/>
+            <a:off x="4005834" y="4554434"/>
             <a:ext cx="17145" cy="17145"/>
           </a:xfrm>
           <a:prstGeom xmlns:a="http://schemas.openxmlformats.org/drawingml/2006/main" prst="rect">
@@ -14815,7 +14815,7 @@
         </p:nvSpPr>
         <p:spPr>
           <a:xfrm xmlns:a="http://schemas.openxmlformats.org/drawingml/2006/main">
-            <a:off x="4024694" y="4195788"/>
+            <a:off x="4024694" y="4555788"/>
             <a:ext cx="17145" cy="17145"/>
           </a:xfrm>
           <a:prstGeom xmlns:a="http://schemas.openxmlformats.org/drawingml/2006/main" prst="rect">
@@ -14845,7 +14845,7 @@
         </p:nvSpPr>
         <p:spPr>
           <a:xfrm xmlns:a="http://schemas.openxmlformats.org/drawingml/2006/main">
-            <a:off x="4043553" y="4197142"/>
+            <a:off x="4043553" y="4557142"/>
             <a:ext cx="17145" cy="17145"/>
           </a:xfrm>
           <a:prstGeom xmlns:a="http://schemas.openxmlformats.org/drawingml/2006/main" prst="rect">
@@ -14875,7 +14875,7 @@
         </p:nvSpPr>
         <p:spPr>
           <a:xfrm xmlns:a="http://schemas.openxmlformats.org/drawingml/2006/main">
-            <a:off x="4062413" y="4198496"/>
+            <a:off x="4062413" y="4558496"/>
             <a:ext cx="17145" cy="17145"/>
           </a:xfrm>
           <a:prstGeom xmlns:a="http://schemas.openxmlformats.org/drawingml/2006/main" prst="rect">
@@ -14905,7 +14905,7 @@
         </p:nvSpPr>
         <p:spPr>
           <a:xfrm xmlns:a="http://schemas.openxmlformats.org/drawingml/2006/main">
-            <a:off x="4081272" y="4199850"/>
+            <a:off x="4081272" y="4559850"/>
             <a:ext cx="17145" cy="17145"/>
           </a:xfrm>
           <a:prstGeom xmlns:a="http://schemas.openxmlformats.org/drawingml/2006/main" prst="rect">
@@ -14935,7 +14935,7 @@
         </p:nvSpPr>
         <p:spPr>
           <a:xfrm xmlns:a="http://schemas.openxmlformats.org/drawingml/2006/main">
-            <a:off x="4100132" y="4201204"/>
+            <a:off x="4100132" y="4561204"/>
             <a:ext cx="17145" cy="17145"/>
           </a:xfrm>
           <a:prstGeom xmlns:a="http://schemas.openxmlformats.org/drawingml/2006/main" prst="rect">
@@ -14965,7 +14965,7 @@
         </p:nvSpPr>
         <p:spPr>
           <a:xfrm xmlns:a="http://schemas.openxmlformats.org/drawingml/2006/main">
-            <a:off x="4118991" y="4202558"/>
+            <a:off x="4118991" y="4562558"/>
             <a:ext cx="17145" cy="17145"/>
           </a:xfrm>
           <a:prstGeom xmlns:a="http://schemas.openxmlformats.org/drawingml/2006/main" prst="rect">
@@ -14995,7 +14995,7 @@
         </p:nvSpPr>
         <p:spPr>
           <a:xfrm xmlns:a="http://schemas.openxmlformats.org/drawingml/2006/main">
-            <a:off x="4137851" y="4203912"/>
+            <a:off x="4137851" y="4563912"/>
             <a:ext cx="17145" cy="17145"/>
           </a:xfrm>
           <a:prstGeom xmlns:a="http://schemas.openxmlformats.org/drawingml/2006/main" prst="rect">
@@ -15025,7 +15025,7 @@
         </p:nvSpPr>
         <p:spPr>
           <a:xfrm xmlns:a="http://schemas.openxmlformats.org/drawingml/2006/main">
-            <a:off x="4156710" y="4205266"/>
+            <a:off x="4156710" y="4565266"/>
             <a:ext cx="17145" cy="17145"/>
           </a:xfrm>
           <a:prstGeom xmlns:a="http://schemas.openxmlformats.org/drawingml/2006/main" prst="rect">
@@ -15055,7 +15055,7 @@
         </p:nvSpPr>
         <p:spPr>
           <a:xfrm xmlns:a="http://schemas.openxmlformats.org/drawingml/2006/main">
-            <a:off x="4175570" y="4206620"/>
+            <a:off x="4175570" y="4566620"/>
             <a:ext cx="17145" cy="17145"/>
           </a:xfrm>
           <a:prstGeom xmlns:a="http://schemas.openxmlformats.org/drawingml/2006/main" prst="rect">
@@ -15085,7 +15085,7 @@
         </p:nvSpPr>
         <p:spPr>
           <a:xfrm xmlns:a="http://schemas.openxmlformats.org/drawingml/2006/main">
-            <a:off x="4194429" y="4207974"/>
+            <a:off x="4194429" y="4567974"/>
             <a:ext cx="17145" cy="17145"/>
           </a:xfrm>
           <a:prstGeom xmlns:a="http://schemas.openxmlformats.org/drawingml/2006/main" prst="rect">
@@ -15115,7 +15115,7 @@
         </p:nvSpPr>
         <p:spPr>
           <a:xfrm xmlns:a="http://schemas.openxmlformats.org/drawingml/2006/main">
-            <a:off x="4213289" y="4209328"/>
+            <a:off x="4213289" y="4569328"/>
             <a:ext cx="17145" cy="17145"/>
           </a:xfrm>
           <a:prstGeom xmlns:a="http://schemas.openxmlformats.org/drawingml/2006/main" prst="rect">
@@ -15145,7 +15145,7 @@
         </p:nvSpPr>
         <p:spPr>
           <a:xfrm xmlns:a="http://schemas.openxmlformats.org/drawingml/2006/main">
-            <a:off x="4232148" y="4210682"/>
+            <a:off x="4232148" y="4570682"/>
             <a:ext cx="17145" cy="17145"/>
           </a:xfrm>
           <a:prstGeom xmlns:a="http://schemas.openxmlformats.org/drawingml/2006/main" prst="rect">
@@ -15175,7 +15175,7 @@
         </p:nvSpPr>
         <p:spPr>
           <a:xfrm xmlns:a="http://schemas.openxmlformats.org/drawingml/2006/main">
-            <a:off x="4251008" y="4212036"/>
+            <a:off x="4251008" y="4572036"/>
             <a:ext cx="17145" cy="17145"/>
           </a:xfrm>
           <a:prstGeom xmlns:a="http://schemas.openxmlformats.org/drawingml/2006/main" prst="rect">
@@ -15205,7 +15205,7 @@
         </p:nvSpPr>
         <p:spPr>
           <a:xfrm xmlns:a="http://schemas.openxmlformats.org/drawingml/2006/main">
-            <a:off x="4269867" y="4213390"/>
+            <a:off x="4269867" y="4573390"/>
             <a:ext cx="17145" cy="17145"/>
           </a:xfrm>
           <a:prstGeom xmlns:a="http://schemas.openxmlformats.org/drawingml/2006/main" prst="rect">
@@ -15235,7 +15235,7 @@
         </p:nvSpPr>
         <p:spPr>
           <a:xfrm xmlns:a="http://schemas.openxmlformats.org/drawingml/2006/main">
-            <a:off x="4288727" y="4214744"/>
+            <a:off x="4288727" y="4574744"/>
             <a:ext cx="17145" cy="17145"/>
           </a:xfrm>
           <a:prstGeom xmlns:a="http://schemas.openxmlformats.org/drawingml/2006/main" prst="rect">
@@ -15265,7 +15265,7 @@
         </p:nvSpPr>
         <p:spPr>
           <a:xfrm xmlns:a="http://schemas.openxmlformats.org/drawingml/2006/main">
-            <a:off x="4307586" y="4216098"/>
+            <a:off x="4307586" y="4576098"/>
             <a:ext cx="17145" cy="17145"/>
           </a:xfrm>
           <a:prstGeom xmlns:a="http://schemas.openxmlformats.org/drawingml/2006/main" prst="rect">
@@ -15295,7 +15295,7 @@
         </p:nvSpPr>
         <p:spPr>
           <a:xfrm xmlns:a="http://schemas.openxmlformats.org/drawingml/2006/main">
-            <a:off x="4326446" y="4217452"/>
+            <a:off x="4326446" y="4577452"/>
             <a:ext cx="17145" cy="17145"/>
           </a:xfrm>
           <a:prstGeom xmlns:a="http://schemas.openxmlformats.org/drawingml/2006/main" prst="rect">
@@ -15325,7 +15325,7 @@
         </p:nvSpPr>
         <p:spPr>
           <a:xfrm xmlns:a="http://schemas.openxmlformats.org/drawingml/2006/main">
-            <a:off x="4345305" y="4218806"/>
+            <a:off x="4345305" y="4578806"/>
             <a:ext cx="17145" cy="17145"/>
           </a:xfrm>
           <a:prstGeom xmlns:a="http://schemas.openxmlformats.org/drawingml/2006/main" prst="rect">
@@ -15355,7 +15355,7 @@
         </p:nvSpPr>
         <p:spPr>
           <a:xfrm xmlns:a="http://schemas.openxmlformats.org/drawingml/2006/main">
-            <a:off x="4364165" y="4220160"/>
+            <a:off x="4364165" y="4580160"/>
             <a:ext cx="17145" cy="17145"/>
           </a:xfrm>
           <a:prstGeom xmlns:a="http://schemas.openxmlformats.org/drawingml/2006/main" prst="rect">
@@ -15385,7 +15385,7 @@
         </p:nvSpPr>
         <p:spPr>
           <a:xfrm xmlns:a="http://schemas.openxmlformats.org/drawingml/2006/main">
-            <a:off x="4383024" y="4221514"/>
+            <a:off x="4383024" y="4581514"/>
             <a:ext cx="17145" cy="17145"/>
           </a:xfrm>
           <a:prstGeom xmlns:a="http://schemas.openxmlformats.org/drawingml/2006/main" prst="rect">
@@ -15415,7 +15415,7 @@
         </p:nvSpPr>
         <p:spPr>
           <a:xfrm xmlns:a="http://schemas.openxmlformats.org/drawingml/2006/main">
-            <a:off x="4401884" y="4222868"/>
+            <a:off x="4401884" y="4582868"/>
             <a:ext cx="17145" cy="17145"/>
           </a:xfrm>
           <a:prstGeom xmlns:a="http://schemas.openxmlformats.org/drawingml/2006/main" prst="rect">
@@ -15445,7 +15445,7 @@
         </p:nvSpPr>
         <p:spPr>
           <a:xfrm xmlns:a="http://schemas.openxmlformats.org/drawingml/2006/main">
-            <a:off x="4420743" y="4224222"/>
+            <a:off x="4420743" y="4584222"/>
             <a:ext cx="17145" cy="17145"/>
           </a:xfrm>
           <a:prstGeom xmlns:a="http://schemas.openxmlformats.org/drawingml/2006/main" prst="rect">
@@ -15475,7 +15475,7 @@
         </p:nvSpPr>
         <p:spPr>
           <a:xfrm xmlns:a="http://schemas.openxmlformats.org/drawingml/2006/main">
-            <a:off x="4439603" y="4225576"/>
+            <a:off x="4439603" y="4585576"/>
             <a:ext cx="17145" cy="17145"/>
           </a:xfrm>
           <a:prstGeom xmlns:a="http://schemas.openxmlformats.org/drawingml/2006/main" prst="rect">
@@ -15505,7 +15505,7 @@
         </p:nvSpPr>
         <p:spPr>
           <a:xfrm xmlns:a="http://schemas.openxmlformats.org/drawingml/2006/main">
-            <a:off x="4458462" y="4226930"/>
+            <a:off x="4458462" y="4586930"/>
             <a:ext cx="17145" cy="17145"/>
           </a:xfrm>
           <a:prstGeom xmlns:a="http://schemas.openxmlformats.org/drawingml/2006/main" prst="rect">
@@ -15535,7 +15535,7 @@
         </p:nvSpPr>
         <p:spPr>
           <a:xfrm xmlns:a="http://schemas.openxmlformats.org/drawingml/2006/main">
-            <a:off x="4477322" y="4228284"/>
+            <a:off x="4477322" y="4588284"/>
             <a:ext cx="17145" cy="17145"/>
           </a:xfrm>
           <a:prstGeom xmlns:a="http://schemas.openxmlformats.org/drawingml/2006/main" prst="rect">
@@ -15565,7 +15565,7 @@
         </p:nvSpPr>
         <p:spPr>
           <a:xfrm xmlns:a="http://schemas.openxmlformats.org/drawingml/2006/main">
-            <a:off x="4496181" y="4229638"/>
+            <a:off x="4496181" y="4589638"/>
             <a:ext cx="17145" cy="17145"/>
           </a:xfrm>
           <a:prstGeom xmlns:a="http://schemas.openxmlformats.org/drawingml/2006/main" prst="rect">
@@ -15595,7 +15595,7 @@
         </p:nvSpPr>
         <p:spPr>
           <a:xfrm xmlns:a="http://schemas.openxmlformats.org/drawingml/2006/main">
-            <a:off x="4515041" y="4230992"/>
+            <a:off x="4515041" y="4590992"/>
             <a:ext cx="17145" cy="17145"/>
           </a:xfrm>
           <a:prstGeom xmlns:a="http://schemas.openxmlformats.org/drawingml/2006/main" prst="rect">
@@ -15625,7 +15625,7 @@
         </p:nvSpPr>
         <p:spPr>
           <a:xfrm xmlns:a="http://schemas.openxmlformats.org/drawingml/2006/main">
-            <a:off x="4500563" y="3806449"/>
+            <a:off x="4500563" y="4166449"/>
             <a:ext cx="66675" cy="66675"/>
           </a:xfrm>
           <a:prstGeom xmlns:a="http://schemas.openxmlformats.org/drawingml/2006/main" prst="ellipse">
@@ -15655,7 +15655,7 @@
         </p:nvSpPr>
         <p:spPr>
           <a:xfrm xmlns:a="http://schemas.openxmlformats.org/drawingml/2006/main">
-            <a:off x="4500563" y="4199008"/>
+            <a:off x="4500563" y="4559008"/>
             <a:ext cx="66675" cy="66675"/>
           </a:xfrm>
           <a:prstGeom xmlns:a="http://schemas.openxmlformats.org/drawingml/2006/main" prst="ellipse">
@@ -15685,7 +15685,7 @@
         </p:nvSpPr>
         <p:spPr>
           <a:xfrm xmlns:a="http://schemas.openxmlformats.org/drawingml/2006/main">
-            <a:off x="828675" y="5429250"/>
+            <a:off x="828675" y="5789250"/>
             <a:ext cx="114300" cy="114300"/>
           </a:xfrm>
           <a:prstGeom xmlns:a="http://schemas.openxmlformats.org/drawingml/2006/main" prst="rect">
@@ -15715,7 +15715,7 @@
         </p:nvSpPr>
         <p:spPr>
           <a:xfrm xmlns:a="http://schemas.openxmlformats.org/drawingml/2006/main">
-            <a:off x="1000125" y="5381625"/>
+            <a:off x="1000125" y="5741625"/>
             <a:ext cx="1905000" cy="209550"/>
           </a:xfrm>
           <a:prstGeom xmlns:a="http://schemas.openxmlformats.org/drawingml/2006/main" prst="rect">
@@ -15772,7 +15772,7 @@
         </p:nvSpPr>
         <p:spPr>
           <a:xfrm xmlns:a="http://schemas.openxmlformats.org/drawingml/2006/main">
-            <a:off x="3238500" y="5429250"/>
+            <a:off x="3238500" y="5789250"/>
             <a:ext cx="114300" cy="114300"/>
           </a:xfrm>
           <a:prstGeom xmlns:a="http://schemas.openxmlformats.org/drawingml/2006/main" prst="rect">
@@ -15802,7 +15802,7 @@
         </p:nvSpPr>
         <p:spPr>
           <a:xfrm xmlns:a="http://schemas.openxmlformats.org/drawingml/2006/main">
-            <a:off x="3409950" y="5381625"/>
+            <a:off x="3409950" y="5741625"/>
             <a:ext cx="1428750" cy="209550"/>
           </a:xfrm>
           <a:prstGeom xmlns:a="http://schemas.openxmlformats.org/drawingml/2006/main" prst="rect">
